--- a/PIXELFORGE_FYP_PRESENTATION.pptx
+++ b/PIXELFORGE_FYP_PRESENTATION.pptx
@@ -510,7 +510,7 @@
           <a:lstStyle/>
           <a:p>
             <a:r>
-              <a:t>Welcome respected committee members. Today I am presenting PixelForge, a comprehensive digital asset engineering platform. Unlike traditional single-purpose tools, PixelForge is an all-in-one suite engineered on the modern MERN stack coupled with compiled native C++ bindings for blazing fast image, PDF, and AI processing without consumer subscriptions.</a:t>
+              <a:t>Assalam u Alaikum respected panel members. My name is Muhammad Ali Raza and today I am presenting my final year project called PixelForge. It is an all-in-one image and PDF processing platform built on MERN stack.</a:t>
             </a:r>
           </a:p>
         </p:txBody>
@@ -580,7 +580,7 @@
           <a:lstStyle/>
           <a:p>
             <a:r>
-              <a:t>Here we establish the core motivation. Users currently experience severe fragmentation, juggling multiple separate websites like iLovePDF, TinyPNG, and Remove.bg. Furthermore, platforms like SmallPDF have restricted free users to only 2 tasks per day, while proprietary tools store sensitive documents on remote servers without cryptographic lifecycle deletion guarantees.</a:t>
+              <a:t>So what is PixelForge? It is a free online platform where you can do everything related to images and PDFs. Instead of using 5-6 different websites, you just use PixelForge. It has 114 plus tools and everything works in your browser.</a:t>
             </a:r>
           </a:p>
         </p:txBody>
@@ -650,7 +650,7 @@
           <a:lstStyle/>
           <a:p>
             <a:r>
-              <a:t>PixelForge directly solves these problems through three architectural pillars: First, unifying 114+ tools into a single coherent workspace. Second, a strict Zero-Trust ephemeral privacy model where all files are destroyed automatically after 60 minutes. Third, utilizing compiled native C++ bindings for libvips and PDF-Lib, achieving sub-120ms latencies without shell injection risks.</a:t>
+              <a:t>Why did we build PixelForge? Because right now if you want to compress an image you go to TinyPNG, to merge PDFs you go to iLovePDF, to remove background you go to Remove.bg. These websites charge monthly fees and they keep your files on their servers which is a privacy risk.</a:t>
             </a:r>
           </a:p>
         </p:txBody>
@@ -720,7 +720,7 @@
           <a:lstStyle/>
           <a:p>
             <a:r>
-              <a:t>This slide demonstrates the complete MERN engineering stack. Walk the examiners through the 4 tiers: The React 19 frontend with 24kB initial bundle and 3D visual canvas; Express gateway with Multer field normalization; Compiled libvips native engine bindings executing in-memory; and the dual persistence layer using MongoDB TTL indexes paired with an atomic disk registry that survives database outages and worker reboots.</a:t>
+              <a:t>PixelForge has 114 plus tools covering images, PDFs and AI. Everything is completely free with no daily limits. It uses native C++ engines so it's 5 times faster than normal JavaScript tools. And the UI is modern with 3D animations using Three.js.</a:t>
             </a:r>
           </a:p>
         </p:txBody>
@@ -790,7 +790,7 @@
           <a:lstStyle/>
           <a:p>
             <a:r>
-              <a:t>Detail the file lifecycle: User drops files in browser, MIME headers are strictly verified, Multer normalizes payloads, native C++ libvips buffers perform multi-threaded transforms, an ephemeral UUIDv4 token is generated, and a background daemon automatically executes disk purges after 60 minutes.</a:t>
+              <a:t>PixelForge is built using the MERN stack which stands for MongoDB, Express, React and Node.js. On top of that we use Sharp which is a C++ image engine that makes processing 5 times faster. For PDFs we use PDF-Lib, for OCR we use Tesseract.js, and for Word conversion we use Mammoth.</a:t>
             </a:r>
           </a:p>
         </p:txBody>
@@ -860,7 +860,7 @@
           <a:lstStyle/>
           <a:p>
             <a:r>
-              <a:t>Present the functional scope: 62 Image tools, 19 PDF utilities, and 7 AI tools. Emphasize practical real-world features such as government exam/passport photo resizing, official document encryption, and neural OCR. All 88 active tools share a single unified workspace runner with batch queueing.</a:t>
+              <a:t>Here you can see all the tool categories. We have 62 Image tools for tasks like compression, format conversion, resizing and background removal. 19 PDF tools for merging, splitting, encryption and Word conversion. And 7 AI-powered tools for OCR, summarization and QR code generation.</a:t>
             </a:r>
           </a:p>
         </p:txBody>
@@ -930,7 +930,7 @@
           <a:lstStyle/>
           <a:p>
             <a:r>
-              <a:t>This benchmark table is your strongest competitive defense. Walk through each row: PixelForge unites images, PDFs, and AI in 114+ tools compared to only 20-25 tools on iLovePDF or SmallPDF. SmallPDF restricts free users to 2 tasks per day and charges $12/month, while PixelForge provides unlimited usage, a strict 60-minute cryptographic purge policy, and a modern 3D interface with zero advertisements.</a:t>
+              <a:t>This comparison table clearly shows why PixelForge is better. We have 114 plus tools compared to 25 on iLovePDF. We are completely free while SmallPDF charges 12 dollars per month. We auto-delete files in 60 minutes while SmallPDF keeps them for 14 days. And we have zero ads.</a:t>
             </a:r>
           </a:p>
         </p:txBody>
@@ -1000,7 +1000,7 @@
           <a:lstStyle/>
           <a:p>
             <a:r>
-              <a:t>Present empirical SQA evidence: All 88 active tools were verified end-to-end with genuine test fixtures, achieving a 100% pass rate. All 35 Jest tests across 5 server suites pass cleanly. Walk through the 4 resolved defects: Multer FormData normalization, AI image route isolation, strict CORS whitelist validation, and multi-worker atomic registry persistence.</a:t>
+              <a:t>We did complete testing of the project. All 88 active tools were tested with real files and all passed. 35 unit tests all pass. We found 4 bugs during testing and fixed all of them. The project is 100% production ready.</a:t>
             </a:r>
           </a:p>
         </p:txBody>
@@ -1070,7 +1070,7 @@
           <a:lstStyle/>
           <a:p>
             <a:r>
-              <a:t>Conclude the defense presentation. Summarize the academic contributions (buffer streaming without shell injection), the societal impact (eliminating predatory subscriptions for students and creators), and our future roadmap toward client-side WebAssembly for completely offline edge execution. Thank the committee and invite questions.</a:t>
+              <a:t>Thank you for your time. To summarize, PixelForge is an all-in-one free platform with 114 plus tools built on MERN stack. It is faster, cheaper and more private than iLovePDF or SmallPDF. I am now open for any questions you may have.</a:t>
             </a:r>
           </a:p>
         </p:txBody>
@@ -4071,9 +4071,17 @@
   <p:cSld>
     <p:bg>
       <p:bgPr>
-        <a:solidFill>
-          <a:srgbClr val="0B0D14"/>
-        </a:solidFill>
+        <a:gradFill rotWithShape="1">
+          <a:gsLst>
+            <a:gs pos="0">
+              <a:srgbClr val="0F172A"/>
+            </a:gs>
+            <a:gs pos="100000">
+              <a:srgbClr val="1E2846"/>
+            </a:gs>
+          </a:gsLst>
+          <a:lin scaled="0"/>
+        </a:gradFill>
         <a:effectLst/>
       </p:bgPr>
     </p:bg>
@@ -4086,26 +4094,31 @@
       <p:grpSpPr/>
       <p:sp>
         <p:nvSpPr>
-          <p:cNvPr id="2" name="Rounded Rectangle 1"/>
+          <p:cNvPr id="2" name="Rectangle 1"/>
           <p:cNvSpPr/>
           <p:nvPr/>
         </p:nvSpPr>
         <p:spPr>
           <a:xfrm>
-            <a:off x="3346704" y="731520"/>
-            <a:ext cx="5486400" cy="411480"/>
+            <a:off x="4114800" y="1097280"/>
+            <a:ext cx="3931920" cy="54864"/>
           </a:xfrm>
-          <a:prstGeom prst="roundRect">
+          <a:prstGeom prst="rect">
             <a:avLst/>
           </a:prstGeom>
           <a:solidFill>
-            <a:srgbClr val="19261C"/>
+            <a:srgbClr val="3B82F6"/>
           </a:solidFill>
           <a:ln>
-            <a:solidFill>
-              <a:srgbClr val="A3E635"/>
-            </a:solidFill>
+            <a:noFill/>
           </a:ln>
+          <a:effectLst>
+            <a:outerShdw blurRad="190500" dist="63500" dir="5400000" rotWithShape="0">
+              <a:srgbClr val="000000">
+                <a:alpha val="40000"/>
+              </a:srgbClr>
+            </a:outerShdw>
+          </a:effectLst>
         </p:spPr>
         <p:style>
           <a:lnRef idx="1">
@@ -4125,16 +4138,7 @@
           <a:bodyPr rtlCol="0" anchor="ctr"/>
           <a:lstStyle/>
           <a:p>
-            <a:pPr algn="ctr">
-              <a:defRPr sz="1100" b="1">
-                <a:solidFill>
-                  <a:srgbClr val="A3E635"/>
-                </a:solidFill>
-              </a:defRPr>
-            </a:pPr>
-            <a:r>
-              <a:t>FINAL YEAR PROJECT (FYP) CAPSTONE DEFENSE • BSCS</a:t>
-            </a:r>
+            <a:pPr algn="ctr"/>
           </a:p>
         </p:txBody>
       </p:sp>
@@ -4147,7 +4151,7 @@
         <p:spPr>
           <a:xfrm>
             <a:off x="914400" y="1371600"/>
-            <a:ext cx="10360152" cy="1463040"/>
+            <a:ext cx="10360152" cy="1097280"/>
           </a:xfrm>
           <a:prstGeom prst="rect">
             <a:avLst/>
@@ -4161,379 +4165,29 @@
           <a:lstStyle/>
           <a:p>
             <a:pPr algn="ctr">
-              <a:defRPr sz="3600" b="1">
-                <a:solidFill>
-                  <a:srgbClr val="F8FAFC"/>
-                </a:solidFill>
-              </a:defRPr>
-            </a:pPr>
-            <a:r>
-              <a:t>Next-Generation Digital Asset Engineering Platform</a:t>
-            </a:r>
-          </a:p>
-          <a:p>
-            <a:pPr algn="ctr">
-              <a:spcBef>
-                <a:spcPts val="1000"/>
-              </a:spcBef>
-              <a:defRPr sz="1500">
-                <a:solidFill>
-                  <a:srgbClr val="94A3B8"/>
-                </a:solidFill>
-              </a:defRPr>
-            </a:pPr>
-            <a:r>
-              <a:t>A high-throughput, privacy-first MERN architecture unifying 114+ production tools for images, vector PDFs, and document AI.</a:t>
-            </a:r>
-          </a:p>
-        </p:txBody>
-      </p:sp>
-      <p:sp>
-        <p:nvSpPr>
-          <p:cNvPr id="4" name="Rounded Rectangle 3"/>
-          <p:cNvSpPr/>
+              <a:defRPr sz="5200" b="1">
+                <a:solidFill>
+                  <a:srgbClr val="FFFFFF"/>
+                </a:solidFill>
+                <a:latin typeface="Arial"/>
+              </a:defRPr>
+            </a:pPr>
+            <a:r>
+              <a:t>PixelForge</a:t>
+            </a:r>
+          </a:p>
+        </p:txBody>
+      </p:sp>
+      <p:sp>
+        <p:nvSpPr>
+          <p:cNvPr id="4" name="TextBox 3"/>
+          <p:cNvSpPr txBox="1"/>
           <p:nvPr/>
         </p:nvSpPr>
         <p:spPr>
           <a:xfrm>
-            <a:off x="731520" y="3291840"/>
-            <a:ext cx="2468880" cy="1645920"/>
-          </a:xfrm>
-          <a:prstGeom prst="roundRect">
-            <a:avLst/>
-          </a:prstGeom>
-          <a:solidFill>
-            <a:srgbClr val="141826"/>
-          </a:solidFill>
-          <a:ln>
-            <a:solidFill>
-              <a:srgbClr val="2D3750"/>
-            </a:solidFill>
-          </a:ln>
-        </p:spPr>
-        <p:style>
-          <a:lnRef idx="1">
-            <a:schemeClr val="accent1"/>
-          </a:lnRef>
-          <a:fillRef idx="3">
-            <a:schemeClr val="accent1"/>
-          </a:fillRef>
-          <a:effectRef idx="2">
-            <a:schemeClr val="accent1"/>
-          </a:effectRef>
-          <a:fontRef idx="minor">
-            <a:schemeClr val="lt1"/>
-          </a:fontRef>
-        </p:style>
-        <p:txBody>
-          <a:bodyPr rtlCol="0" anchor="ctr" wrap="square"/>
-          <a:lstStyle/>
-          <a:p>
-            <a:pPr algn="ctr">
-              <a:defRPr sz="2800" b="1">
-                <a:solidFill>
-                  <a:srgbClr val="A3E635"/>
-                </a:solidFill>
-              </a:defRPr>
-            </a:pPr>
-            <a:r>
-              <a:t>114+</a:t>
-            </a:r>
-          </a:p>
-          <a:p>
-            <a:pPr algn="ctr">
-              <a:spcBef>
-                <a:spcPts val="400"/>
-              </a:spcBef>
-              <a:defRPr sz="1200" b="1">
-                <a:solidFill>
-                  <a:srgbClr val="F8FAFC"/>
-                </a:solidFill>
-              </a:defRPr>
-            </a:pPr>
-            <a:r>
-              <a:t>Production Tools Built</a:t>
-            </a:r>
-          </a:p>
-          <a:p>
-            <a:pPr algn="ctr">
-              <a:spcBef>
-                <a:spcPts val="200"/>
-              </a:spcBef>
-              <a:defRPr sz="950">
-                <a:solidFill>
-                  <a:srgbClr val="94A3B8"/>
-                </a:solidFill>
-              </a:defRPr>
-            </a:pPr>
-            <a:r>
-              <a:t>88 Active • 26 Coming Soon</a:t>
-            </a:r>
-          </a:p>
-        </p:txBody>
-      </p:sp>
-      <p:sp>
-        <p:nvSpPr>
-          <p:cNvPr id="5" name="Rounded Rectangle 4"/>
-          <p:cNvSpPr/>
-          <p:nvPr/>
-        </p:nvSpPr>
-        <p:spPr>
-          <a:xfrm>
-            <a:off x="3474720" y="3291840"/>
-            <a:ext cx="2468880" cy="1645920"/>
-          </a:xfrm>
-          <a:prstGeom prst="roundRect">
-            <a:avLst/>
-          </a:prstGeom>
-          <a:solidFill>
-            <a:srgbClr val="141826"/>
-          </a:solidFill>
-          <a:ln>
-            <a:solidFill>
-              <a:srgbClr val="2D3750"/>
-            </a:solidFill>
-          </a:ln>
-        </p:spPr>
-        <p:style>
-          <a:lnRef idx="1">
-            <a:schemeClr val="accent1"/>
-          </a:lnRef>
-          <a:fillRef idx="3">
-            <a:schemeClr val="accent1"/>
-          </a:fillRef>
-          <a:effectRef idx="2">
-            <a:schemeClr val="accent1"/>
-          </a:effectRef>
-          <a:fontRef idx="minor">
-            <a:schemeClr val="lt1"/>
-          </a:fontRef>
-        </p:style>
-        <p:txBody>
-          <a:bodyPr rtlCol="0" anchor="ctr" wrap="square"/>
-          <a:lstStyle/>
-          <a:p>
-            <a:pPr algn="ctr">
-              <a:defRPr sz="2800" b="1">
-                <a:solidFill>
-                  <a:srgbClr val="38BDF8"/>
-                </a:solidFill>
-              </a:defRPr>
-            </a:pPr>
-            <a:r>
-              <a:t>5x Faster</a:t>
-            </a:r>
-          </a:p>
-          <a:p>
-            <a:pPr algn="ctr">
-              <a:spcBef>
-                <a:spcPts val="400"/>
-              </a:spcBef>
-              <a:defRPr sz="1200" b="1">
-                <a:solidFill>
-                  <a:srgbClr val="F8FAFC"/>
-                </a:solidFill>
-              </a:defRPr>
-            </a:pPr>
-            <a:r>
-              <a:t>Sharp Engine Speed</a:t>
-            </a:r>
-          </a:p>
-          <a:p>
-            <a:pPr algn="ctr">
-              <a:spcBef>
-                <a:spcPts val="200"/>
-              </a:spcBef>
-              <a:defRPr sz="950">
-                <a:solidFill>
-                  <a:srgbClr val="94A3B8"/>
-                </a:solidFill>
-              </a:defRPr>
-            </a:pPr>
-            <a:r>
-              <a:t>Compiled Native libvips</a:t>
-            </a:r>
-          </a:p>
-        </p:txBody>
-      </p:sp>
-      <p:sp>
-        <p:nvSpPr>
-          <p:cNvPr id="6" name="Rounded Rectangle 5"/>
-          <p:cNvSpPr/>
-          <p:nvPr/>
-        </p:nvSpPr>
-        <p:spPr>
-          <a:xfrm>
-            <a:off x="6217920" y="3291840"/>
-            <a:ext cx="2468880" cy="1645920"/>
-          </a:xfrm>
-          <a:prstGeom prst="roundRect">
-            <a:avLst/>
-          </a:prstGeom>
-          <a:solidFill>
-            <a:srgbClr val="141826"/>
-          </a:solidFill>
-          <a:ln>
-            <a:solidFill>
-              <a:srgbClr val="2D3750"/>
-            </a:solidFill>
-          </a:ln>
-        </p:spPr>
-        <p:style>
-          <a:lnRef idx="1">
-            <a:schemeClr val="accent1"/>
-          </a:lnRef>
-          <a:fillRef idx="3">
-            <a:schemeClr val="accent1"/>
-          </a:fillRef>
-          <a:effectRef idx="2">
-            <a:schemeClr val="accent1"/>
-          </a:effectRef>
-          <a:fontRef idx="minor">
-            <a:schemeClr val="lt1"/>
-          </a:fontRef>
-        </p:style>
-        <p:txBody>
-          <a:bodyPr rtlCol="0" anchor="ctr" wrap="square"/>
-          <a:lstStyle/>
-          <a:p>
-            <a:pPr algn="ctr">
-              <a:defRPr sz="2800" b="1">
-                <a:solidFill>
-                  <a:srgbClr val="6366F1"/>
-                </a:solidFill>
-              </a:defRPr>
-            </a:pPr>
-            <a:r>
-              <a:t>60 Min</a:t>
-            </a:r>
-          </a:p>
-          <a:p>
-            <a:pPr algn="ctr">
-              <a:spcBef>
-                <a:spcPts val="400"/>
-              </a:spcBef>
-              <a:defRPr sz="1200" b="1">
-                <a:solidFill>
-                  <a:srgbClr val="F8FAFC"/>
-                </a:solidFill>
-              </a:defRPr>
-            </a:pPr>
-            <a:r>
-              <a:t>Zero-Trust Auto-Purge</a:t>
-            </a:r>
-          </a:p>
-          <a:p>
-            <a:pPr algn="ctr">
-              <a:spcBef>
-                <a:spcPts val="200"/>
-              </a:spcBef>
-              <a:defRPr sz="950">
-                <a:solidFill>
-                  <a:srgbClr val="94A3B8"/>
-                </a:solidFill>
-              </a:defRPr>
-            </a:pPr>
-            <a:r>
-              <a:t>Cryptographic Ephemeral TTL</a:t>
-            </a:r>
-          </a:p>
-        </p:txBody>
-      </p:sp>
-      <p:sp>
-        <p:nvSpPr>
-          <p:cNvPr id="7" name="Rounded Rectangle 6"/>
-          <p:cNvSpPr/>
-          <p:nvPr/>
-        </p:nvSpPr>
-        <p:spPr>
-          <a:xfrm>
-            <a:off x="8961120" y="3291840"/>
-            <a:ext cx="2468880" cy="1645920"/>
-          </a:xfrm>
-          <a:prstGeom prst="roundRect">
-            <a:avLst/>
-          </a:prstGeom>
-          <a:solidFill>
-            <a:srgbClr val="141826"/>
-          </a:solidFill>
-          <a:ln>
-            <a:solidFill>
-              <a:srgbClr val="2D3750"/>
-            </a:solidFill>
-          </a:ln>
-        </p:spPr>
-        <p:style>
-          <a:lnRef idx="1">
-            <a:schemeClr val="accent1"/>
-          </a:lnRef>
-          <a:fillRef idx="3">
-            <a:schemeClr val="accent1"/>
-          </a:fillRef>
-          <a:effectRef idx="2">
-            <a:schemeClr val="accent1"/>
-          </a:effectRef>
-          <a:fontRef idx="minor">
-            <a:schemeClr val="lt1"/>
-          </a:fontRef>
-        </p:style>
-        <p:txBody>
-          <a:bodyPr rtlCol="0" anchor="ctr" wrap="square"/>
-          <a:lstStyle/>
-          <a:p>
-            <a:pPr algn="ctr">
-              <a:defRPr sz="2800" b="1">
-                <a:solidFill>
-                  <a:srgbClr val="A3E635"/>
-                </a:solidFill>
-              </a:defRPr>
-            </a:pPr>
-            <a:r>
-              <a:t>100% Free</a:t>
-            </a:r>
-          </a:p>
-          <a:p>
-            <a:pPr algn="ctr">
-              <a:spcBef>
-                <a:spcPts val="400"/>
-              </a:spcBef>
-              <a:defRPr sz="1200" b="1">
-                <a:solidFill>
-                  <a:srgbClr val="F8FAFC"/>
-                </a:solidFill>
-              </a:defRPr>
-            </a:pPr>
-            <a:r>
-              <a:t>Zero Paywalls or Ads</a:t>
-            </a:r>
-          </a:p>
-          <a:p>
-            <a:pPr algn="ctr">
-              <a:spcBef>
-                <a:spcPts val="200"/>
-              </a:spcBef>
-              <a:defRPr sz="950">
-                <a:solidFill>
-                  <a:srgbClr val="94A3B8"/>
-                </a:solidFill>
-              </a:defRPr>
-            </a:pPr>
-            <a:r>
-              <a:t>No Subscription Trap</a:t>
-            </a:r>
-          </a:p>
-        </p:txBody>
-      </p:sp>
-      <p:sp>
-        <p:nvSpPr>
-          <p:cNvPr id="8" name="TextBox 7"/>
-          <p:cNvSpPr txBox="1"/>
-          <p:nvPr/>
-        </p:nvSpPr>
-        <p:spPr>
-          <a:xfrm>
-            <a:off x="731520" y="5669280"/>
-            <a:ext cx="10698480" cy="548640"/>
+            <a:off x="1371600" y="2468880"/>
+            <a:ext cx="9445752" cy="548640"/>
           </a:xfrm>
           <a:prstGeom prst="rect">
             <a:avLst/>
@@ -4541,20 +4195,323 @@
           <a:noFill/>
         </p:spPr>
         <p:txBody>
-          <a:bodyPr wrap="none">
+          <a:bodyPr wrap="square">
             <a:spAutoFit/>
           </a:bodyPr>
           <a:lstStyle/>
           <a:p>
             <a:pPr algn="ctr">
-              <a:defRPr sz="1100">
-                <a:solidFill>
-                  <a:srgbClr val="94A3B8"/>
-                </a:solidFill>
-              </a:defRPr>
-            </a:pPr>
-            <a:r>
-              <a:t>Engineered by: Muhammad Ali Raza   |   Stack: React 19 + Express 4 + MongoDB 8 + Sharp + PDF-Lib   |   Status: Production Ready</a:t>
+              <a:defRPr sz="2400" b="0">
+                <a:solidFill>
+                  <a:srgbClr val="3B82F6"/>
+                </a:solidFill>
+                <a:latin typeface="Arial"/>
+              </a:defRPr>
+            </a:pPr>
+            <a:r>
+              <a:t>All-in-One Image &amp; PDF Processing Platform</a:t>
+            </a:r>
+          </a:p>
+        </p:txBody>
+      </p:sp>
+      <p:sp>
+        <p:nvSpPr>
+          <p:cNvPr id="5" name="Rectangle 4"/>
+          <p:cNvSpPr/>
+          <p:nvPr/>
+        </p:nvSpPr>
+        <p:spPr>
+          <a:xfrm>
+            <a:off x="4572000" y="3200400"/>
+            <a:ext cx="3017520" cy="36576"/>
+          </a:xfrm>
+          <a:prstGeom prst="rect">
+            <a:avLst/>
+          </a:prstGeom>
+          <a:solidFill>
+            <a:srgbClr val="8B5CF6"/>
+          </a:solidFill>
+          <a:ln>
+            <a:noFill/>
+          </a:ln>
+        </p:spPr>
+        <p:style>
+          <a:lnRef idx="1">
+            <a:schemeClr val="accent1"/>
+          </a:lnRef>
+          <a:fillRef idx="3">
+            <a:schemeClr val="accent1"/>
+          </a:fillRef>
+          <a:effectRef idx="2">
+            <a:schemeClr val="accent1"/>
+          </a:effectRef>
+          <a:fontRef idx="minor">
+            <a:schemeClr val="lt1"/>
+          </a:fontRef>
+        </p:style>
+        <p:txBody>
+          <a:bodyPr rtlCol="0" anchor="ctr"/>
+          <a:lstStyle/>
+          <a:p>
+            <a:pPr algn="ctr"/>
+          </a:p>
+        </p:txBody>
+      </p:sp>
+      <p:sp>
+        <p:nvSpPr>
+          <p:cNvPr id="6" name="TextBox 5"/>
+          <p:cNvSpPr txBox="1"/>
+          <p:nvPr/>
+        </p:nvSpPr>
+        <p:spPr>
+          <a:xfrm>
+            <a:off x="914400" y="3474720"/>
+            <a:ext cx="10360152" cy="457200"/>
+          </a:xfrm>
+          <a:prstGeom prst="rect">
+            <a:avLst/>
+          </a:prstGeom>
+          <a:noFill/>
+        </p:spPr>
+        <p:txBody>
+          <a:bodyPr wrap="square">
+            <a:spAutoFit/>
+          </a:bodyPr>
+          <a:lstStyle/>
+          <a:p>
+            <a:pPr algn="ctr">
+              <a:defRPr sz="1600" b="0">
+                <a:solidFill>
+                  <a:srgbClr val="CBD5E1"/>
+                </a:solidFill>
+                <a:latin typeface="Arial"/>
+              </a:defRPr>
+            </a:pPr>
+            <a:r>
+              <a:t>Presented By</a:t>
+            </a:r>
+          </a:p>
+        </p:txBody>
+      </p:sp>
+      <p:sp>
+        <p:nvSpPr>
+          <p:cNvPr id="7" name="TextBox 6"/>
+          <p:cNvSpPr txBox="1"/>
+          <p:nvPr/>
+        </p:nvSpPr>
+        <p:spPr>
+          <a:xfrm>
+            <a:off x="914400" y="3931920"/>
+            <a:ext cx="10360152" cy="548640"/>
+          </a:xfrm>
+          <a:prstGeom prst="rect">
+            <a:avLst/>
+          </a:prstGeom>
+          <a:noFill/>
+        </p:spPr>
+        <p:txBody>
+          <a:bodyPr wrap="square">
+            <a:spAutoFit/>
+          </a:bodyPr>
+          <a:lstStyle/>
+          <a:p>
+            <a:pPr algn="ctr">
+              <a:defRPr sz="3000" b="1">
+                <a:solidFill>
+                  <a:srgbClr val="FFFFFF"/>
+                </a:solidFill>
+                <a:latin typeface="Arial"/>
+              </a:defRPr>
+            </a:pPr>
+            <a:r>
+              <a:t>Muhammad Ali Raza</a:t>
+            </a:r>
+          </a:p>
+        </p:txBody>
+      </p:sp>
+      <p:sp>
+        <p:nvSpPr>
+          <p:cNvPr id="8" name="TextBox 7"/>
+          <p:cNvSpPr txBox="1"/>
+          <p:nvPr/>
+        </p:nvSpPr>
+        <p:spPr>
+          <a:xfrm>
+            <a:off x="914400" y="4572000"/>
+            <a:ext cx="10360152" cy="365760"/>
+          </a:xfrm>
+          <a:prstGeom prst="rect">
+            <a:avLst/>
+          </a:prstGeom>
+          <a:noFill/>
+        </p:spPr>
+        <p:txBody>
+          <a:bodyPr wrap="square">
+            <a:spAutoFit/>
+          </a:bodyPr>
+          <a:lstStyle/>
+          <a:p>
+            <a:pPr algn="ctr">
+              <a:defRPr sz="1400" b="0">
+                <a:solidFill>
+                  <a:srgbClr val="CBD5E1"/>
+                </a:solidFill>
+                <a:latin typeface="Arial"/>
+              </a:defRPr>
+            </a:pPr>
+            <a:r>
+              <a:t>BS Computer Science  •  Final Year Project (FYP)</a:t>
+            </a:r>
+          </a:p>
+        </p:txBody>
+      </p:sp>
+      <p:pic>
+        <p:nvPicPr>
+          <p:cNvPr id="9" name="Picture 8" descr="browser_mockup.png"/>
+          <p:cNvPicPr>
+            <a:picLocks noChangeAspect="1"/>
+          </p:cNvPicPr>
+          <p:nvPr/>
+        </p:nvPicPr>
+        <p:blipFill>
+          <a:blip r:embed="rId2"/>
+          <a:stretch>
+            <a:fillRect/>
+          </a:stretch>
+        </p:blipFill>
+        <p:spPr>
+          <a:xfrm>
+            <a:off x="8046720" y="4846320"/>
+            <a:ext cx="3840480" cy="2605543"/>
+          </a:xfrm>
+          <a:prstGeom prst="rect">
+            <a:avLst/>
+          </a:prstGeom>
+          <a:effectLst>
+            <a:outerShdw blurRad="190500" dist="63500" dir="5400000" rotWithShape="0">
+              <a:srgbClr val="000000">
+                <a:alpha val="40000"/>
+              </a:srgbClr>
+            </a:outerShdw>
+          </a:effectLst>
+        </p:spPr>
+      </p:pic>
+      <p:sp>
+        <p:nvSpPr>
+          <p:cNvPr id="10" name="Rounded Rectangle 9"/>
+          <p:cNvSpPr/>
+          <p:nvPr/>
+        </p:nvSpPr>
+        <p:spPr>
+          <a:xfrm>
+            <a:off x="3200400" y="5303520"/>
+            <a:ext cx="2286000" cy="347472"/>
+          </a:xfrm>
+          <a:prstGeom prst="roundRect">
+            <a:avLst/>
+          </a:prstGeom>
+          <a:solidFill>
+            <a:srgbClr val="3B82F6"/>
+          </a:solidFill>
+          <a:ln>
+            <a:noFill/>
+          </a:ln>
+          <a:effectLst>
+            <a:outerShdw blurRad="190500" dist="63500" dir="5400000" rotWithShape="0">
+              <a:srgbClr val="000000">
+                <a:alpha val="40000"/>
+              </a:srgbClr>
+            </a:outerShdw>
+          </a:effectLst>
+        </p:spPr>
+        <p:style>
+          <a:lnRef idx="1">
+            <a:schemeClr val="accent1"/>
+          </a:lnRef>
+          <a:fillRef idx="3">
+            <a:schemeClr val="accent1"/>
+          </a:fillRef>
+          <a:effectRef idx="2">
+            <a:schemeClr val="accent1"/>
+          </a:effectRef>
+          <a:fontRef idx="minor">
+            <a:schemeClr val="lt1"/>
+          </a:fontRef>
+        </p:style>
+        <p:txBody>
+          <a:bodyPr rtlCol="0" anchor="ctr"/>
+          <a:lstStyle/>
+          <a:p>
+            <a:pPr algn="ctr">
+              <a:defRPr sz="1100" b="1">
+                <a:solidFill>
+                  <a:srgbClr val="FFFFFF"/>
+                </a:solidFill>
+                <a:latin typeface="Arial"/>
+              </a:defRPr>
+            </a:pPr>
+            <a:r>
+              <a:t>MERN Stack Project</a:t>
+            </a:r>
+          </a:p>
+        </p:txBody>
+      </p:sp>
+      <p:sp>
+        <p:nvSpPr>
+          <p:cNvPr id="11" name="Rounded Rectangle 10"/>
+          <p:cNvSpPr/>
+          <p:nvPr/>
+        </p:nvSpPr>
+        <p:spPr>
+          <a:xfrm>
+            <a:off x="5760720" y="5303520"/>
+            <a:ext cx="2286000" cy="347472"/>
+          </a:xfrm>
+          <a:prstGeom prst="roundRect">
+            <a:avLst/>
+          </a:prstGeom>
+          <a:solidFill>
+            <a:srgbClr val="8B5CF6"/>
+          </a:solidFill>
+          <a:ln>
+            <a:noFill/>
+          </a:ln>
+          <a:effectLst>
+            <a:outerShdw blurRad="190500" dist="63500" dir="5400000" rotWithShape="0">
+              <a:srgbClr val="000000">
+                <a:alpha val="40000"/>
+              </a:srgbClr>
+            </a:outerShdw>
+          </a:effectLst>
+        </p:spPr>
+        <p:style>
+          <a:lnRef idx="1">
+            <a:schemeClr val="accent1"/>
+          </a:lnRef>
+          <a:fillRef idx="3">
+            <a:schemeClr val="accent1"/>
+          </a:fillRef>
+          <a:effectRef idx="2">
+            <a:schemeClr val="accent1"/>
+          </a:effectRef>
+          <a:fontRef idx="minor">
+            <a:schemeClr val="lt1"/>
+          </a:fontRef>
+        </p:style>
+        <p:txBody>
+          <a:bodyPr rtlCol="0" anchor="ctr"/>
+          <a:lstStyle/>
+          <a:p>
+            <a:pPr algn="ctr">
+              <a:defRPr sz="1100" b="1">
+                <a:solidFill>
+                  <a:srgbClr val="FFFFFF"/>
+                </a:solidFill>
+                <a:latin typeface="Arial"/>
+              </a:defRPr>
+            </a:pPr>
+            <a:r>
+              <a:t>114+ Online Tools</a:t>
             </a:r>
           </a:p>
         </p:txBody>
@@ -4564,8 +4521,8 @@
   <p:clrMapOvr>
     <a:masterClrMapping/>
   </p:clrMapOvr>
-  <p:transition spd="med">
-    <p:push dir="r"/>
+  <p:transition spd="med" advTm="0">
+    <p:fade/>
   </p:transition>
 </p:sld>
 </file>
@@ -4575,9 +4532,17 @@
   <p:cSld>
     <p:bg>
       <p:bgPr>
-        <a:solidFill>
-          <a:srgbClr val="0B0D14"/>
-        </a:solidFill>
+        <a:gradFill rotWithShape="1">
+          <a:gsLst>
+            <a:gs pos="0">
+              <a:srgbClr val="0F172A"/>
+            </a:gs>
+            <a:gs pos="100000">
+              <a:srgbClr val="1E2846"/>
+            </a:gs>
+          </a:gsLst>
+          <a:lin scaled="0"/>
+        </a:gradFill>
         <a:effectLst/>
       </p:bgPr>
     </p:bg>
@@ -4596,20 +4561,25 @@
         </p:nvSpPr>
         <p:spPr>
           <a:xfrm>
-            <a:off x="731520" y="365760"/>
-            <a:ext cx="2011680" cy="320040"/>
+            <a:off x="731520" y="457200"/>
+            <a:ext cx="2286000" cy="347472"/>
           </a:xfrm>
           <a:prstGeom prst="roundRect">
             <a:avLst/>
           </a:prstGeom>
           <a:solidFill>
-            <a:srgbClr val="19261C"/>
+            <a:srgbClr val="3B82F6"/>
           </a:solidFill>
-          <a:ln w="12700">
-            <a:solidFill>
-              <a:srgbClr val="A3E635"/>
-            </a:solidFill>
+          <a:ln>
+            <a:noFill/>
           </a:ln>
+          <a:effectLst>
+            <a:outerShdw blurRad="190500" dist="63500" dir="5400000" rotWithShape="0">
+              <a:srgbClr val="000000">
+                <a:alpha val="40000"/>
+              </a:srgbClr>
+            </a:outerShdw>
+          </a:effectLst>
         </p:spPr>
         <p:style>
           <a:lnRef idx="1">
@@ -4626,19 +4596,19 @@
           </a:fontRef>
         </p:style>
         <p:txBody>
-          <a:bodyPr rtlCol="0" anchor="ctr" wrap="square"/>
+          <a:bodyPr rtlCol="0" anchor="ctr"/>
           <a:lstStyle/>
           <a:p>
             <a:pPr algn="ctr">
-              <a:defRPr sz="1000" b="1">
-                <a:solidFill>
-                  <a:srgbClr val="A3E635"/>
-                </a:solidFill>
-                <a:latin typeface="Arial"/>
-              </a:defRPr>
-            </a:pPr>
-            <a:r>
-              <a:t>PROBLEM STATEMENT</a:t>
+              <a:defRPr sz="1100" b="1">
+                <a:solidFill>
+                  <a:srgbClr val="FFFFFF"/>
+                </a:solidFill>
+                <a:latin typeface="Arial"/>
+              </a:defRPr>
+            </a:pPr>
+            <a:r>
+              <a:t>INTRODUCTION</a:t>
             </a:r>
           </a:p>
         </p:txBody>
@@ -4651,8 +4621,8 @@
         </p:nvSpPr>
         <p:spPr>
           <a:xfrm>
-            <a:off x="731520" y="731520"/>
-            <a:ext cx="8686800" cy="640080"/>
+            <a:off x="731520" y="914400"/>
+            <a:ext cx="10698480" cy="548640"/>
           </a:xfrm>
           <a:prstGeom prst="rect">
             <a:avLst/>
@@ -4665,78 +4635,55 @@
           </a:bodyPr>
           <a:lstStyle/>
           <a:p>
-            <a:pPr>
-              <a:defRPr sz="2400" b="1">
-                <a:solidFill>
-                  <a:srgbClr val="F8FAFC"/>
-                </a:solidFill>
-                <a:latin typeface="Arial"/>
-              </a:defRPr>
-            </a:pPr>
-            <a:r>
-              <a:t>The Fragmentation of Online Utilities</a:t>
-            </a:r>
-          </a:p>
-        </p:txBody>
-      </p:sp>
-      <p:sp>
-        <p:nvSpPr>
-          <p:cNvPr id="4" name="TextBox 3"/>
-          <p:cNvSpPr txBox="1"/>
+            <a:pPr algn="l">
+              <a:defRPr sz="3000" b="1">
+                <a:solidFill>
+                  <a:srgbClr val="FFFFFF"/>
+                </a:solidFill>
+                <a:latin typeface="Arial"/>
+              </a:defRPr>
+            </a:pPr>
+            <a:r>
+              <a:t>What is PixelForge?</a:t>
+            </a:r>
+          </a:p>
+        </p:txBody>
+      </p:sp>
+      <p:sp>
+        <p:nvSpPr>
+          <p:cNvPr id="4" name="Rounded Rectangle 3"/>
+          <p:cNvSpPr/>
           <p:nvPr/>
         </p:nvSpPr>
         <p:spPr>
           <a:xfrm>
-            <a:off x="10515600" y="365760"/>
-            <a:ext cx="1097280" cy="365760"/>
-          </a:xfrm>
-          <a:prstGeom prst="rect">
-            <a:avLst/>
-          </a:prstGeom>
-          <a:noFill/>
-        </p:spPr>
-        <p:txBody>
-          <a:bodyPr wrap="none">
-            <a:spAutoFit/>
-          </a:bodyPr>
-          <a:lstStyle/>
-          <a:p>
-            <a:pPr algn="r">
-              <a:defRPr sz="1200" b="1">
-                <a:solidFill>
-                  <a:srgbClr val="A3E635"/>
-                </a:solidFill>
-                <a:latin typeface="Arial"/>
-              </a:defRPr>
-            </a:pPr>
-            <a:r>
-              <a:t>02 / 09</a:t>
-            </a:r>
-          </a:p>
-        </p:txBody>
-      </p:sp>
-      <p:sp>
-        <p:nvSpPr>
-          <p:cNvPr id="5" name="Rounded Rectangle 4"/>
-          <p:cNvSpPr/>
-          <p:nvPr/>
-        </p:nvSpPr>
-        <p:spPr>
-          <a:xfrm>
-            <a:off x="731520" y="1554480"/>
-            <a:ext cx="5120640" cy="2194560"/>
+            <a:off x="731520" y="1645920"/>
+            <a:ext cx="5029200" cy="4389120"/>
           </a:xfrm>
           <a:prstGeom prst="roundRect">
             <a:avLst/>
           </a:prstGeom>
           <a:solidFill>
-            <a:srgbClr val="141826"/>
+            <a:srgbClr val="1E293B"/>
           </a:solidFill>
           <a:ln w="12700">
             <a:solidFill>
-              <a:srgbClr val="2D3750"/>
+              <a:srgbClr val="334155"/>
             </a:solidFill>
           </a:ln>
+          <a:effectLst>
+            <a:outerShdw blurRad="190500" dist="63500" dir="5400000" rotWithShape="0">
+              <a:srgbClr val="000000">
+                <a:alpha val="40000"/>
+              </a:srgbClr>
+            </a:outerShdw>
+          </a:effectLst>
+          <a:sp3d extrusionH="25400">
+            <a:bevelT w="63500" h="25400" prst="relaxedInset"/>
+            <a:contourClr>
+              <a:srgbClr val="3B82F6"/>
+            </a:contourClr>
+          </a:sp3d>
         </p:spPr>
         <p:style>
           <a:lnRef idx="1">
@@ -4753,119 +4700,204 @@
           </a:fontRef>
         </p:style>
         <p:txBody>
-          <a:bodyPr rtlCol="0" anchor="ctr" wrap="square" lIns="228600" rIns="228600" tIns="182880" bIns="182880"/>
+          <a:bodyPr rtlCol="0" anchor="ctr" wrap="square" lIns="274320" rIns="228600" tIns="182880" bIns="182880"/>
           <a:lstStyle/>
           <a:p>
             <a:pPr algn="ctr">
-              <a:defRPr sz="1300" b="1">
-                <a:solidFill>
-                  <a:srgbClr val="F43F5E"/>
-                </a:solidFill>
-                <a:latin typeface="Arial"/>
-              </a:defRPr>
-            </a:pPr>
-            <a:r>
-              <a:t>1. Ecosystem Fragmentation</a:t>
+              <a:spcAft>
+                <a:spcPts val="800"/>
+              </a:spcAft>
+              <a:defRPr sz="1600" b="1">
+                <a:solidFill>
+                  <a:srgbClr val="3B82F6"/>
+                </a:solidFill>
+                <a:latin typeface="Arial"/>
+              </a:defRPr>
+            </a:pPr>
+            <a:r>
+              <a:t>A Free Online Platform</a:t>
             </a:r>
           </a:p>
           <a:p>
             <a:pPr>
               <a:spcBef>
-                <a:spcPts val="400"/>
+                <a:spcPts val="500"/>
               </a:spcBef>
-              <a:defRPr sz="1050">
-                <a:solidFill>
-                  <a:srgbClr val="94A3B8"/>
-                </a:solidFill>
-                <a:latin typeface="Arial"/>
-              </a:defRPr>
-            </a:pPr>
-            <a:r>
-              <a:t>Users are forced to juggle 4–6 single-purpose websites:</a:t>
+              <a:defRPr sz="1200">
+                <a:solidFill>
+                  <a:srgbClr val="FFFFFF"/>
+                </a:solidFill>
+                <a:latin typeface="Arial"/>
+              </a:defRPr>
+            </a:pPr>
+            <a:r>
+              <a:t>• One website for ALL your image &amp; PDF needs</a:t>
             </a:r>
           </a:p>
           <a:p>
             <a:pPr>
               <a:spcBef>
-                <a:spcPts val="400"/>
+                <a:spcPts val="500"/>
               </a:spcBef>
-              <a:defRPr sz="1050">
-                <a:solidFill>
-                  <a:srgbClr val="F8FAFC"/>
-                </a:solidFill>
-                <a:latin typeface="Arial"/>
-              </a:defRPr>
-            </a:pPr>
-            <a:r>
-              <a:t>• iLovePDF for merging and splitting</a:t>
+              <a:defRPr sz="1200">
+                <a:solidFill>
+                  <a:srgbClr val="FFFFFF"/>
+                </a:solidFill>
+                <a:latin typeface="Arial"/>
+              </a:defRPr>
+            </a:pPr>
+            <a:r>
+              <a:t>• 114+ tools — no downloads, no signups</a:t>
             </a:r>
           </a:p>
           <a:p>
             <a:pPr>
               <a:spcBef>
-                <a:spcPts val="400"/>
+                <a:spcPts val="500"/>
               </a:spcBef>
-              <a:defRPr sz="1050">
-                <a:solidFill>
-                  <a:srgbClr val="F8FAFC"/>
-                </a:solidFill>
-                <a:latin typeface="Arial"/>
-              </a:defRPr>
-            </a:pPr>
-            <a:r>
-              <a:t>• TinyPNG for image compression</a:t>
+              <a:defRPr sz="1200">
+                <a:solidFill>
+                  <a:srgbClr val="FFFFFF"/>
+                </a:solidFill>
+                <a:latin typeface="Arial"/>
+              </a:defRPr>
+            </a:pPr>
+            <a:r>
+              <a:t>• Works right in your browser</a:t>
             </a:r>
           </a:p>
           <a:p>
             <a:pPr>
               <a:spcBef>
-                <a:spcPts val="400"/>
+                <a:spcPts val="500"/>
               </a:spcBef>
-              <a:defRPr sz="1050">
-                <a:solidFill>
-                  <a:srgbClr val="F8FAFC"/>
-                </a:solidFill>
-                <a:latin typeface="Arial"/>
-              </a:defRPr>
-            </a:pPr>
-            <a:r>
-              <a:t>• Remove.bg for portrait cutouts</a:t>
+              <a:defRPr sz="1200">
+                <a:solidFill>
+                  <a:srgbClr val="FFFFFF"/>
+                </a:solidFill>
+                <a:latin typeface="Arial"/>
+              </a:defRPr>
+            </a:pPr>
+            <a:r>
+              <a:t>• Completely free — no hidden charges</a:t>
             </a:r>
           </a:p>
           <a:p>
             <a:pPr>
               <a:spcBef>
-                <a:spcPts val="400"/>
+                <a:spcPts val="500"/>
               </a:spcBef>
-              <a:defRPr sz="1050">
-                <a:solidFill>
-                  <a:srgbClr val="F8FAFC"/>
-                </a:solidFill>
-                <a:latin typeface="Arial"/>
-              </a:defRPr>
-            </a:pPr>
-            <a:r>
-              <a:t>• CloudConvert for format conversions</a:t>
+              <a:defRPr sz="1200">
+                <a:solidFill>
+                  <a:srgbClr val="FFFFFF"/>
+                </a:solidFill>
+                <a:latin typeface="Arial"/>
+              </a:defRPr>
+            </a:pPr>
+            <a:r>
+              <a:t>• Your files are auto-deleted after 60 minutes</a:t>
             </a:r>
           </a:p>
           <a:p>
             <a:pPr>
               <a:spcBef>
-                <a:spcPts val="400"/>
+                <a:spcPts val="500"/>
               </a:spcBef>
-              <a:defRPr sz="1050">
-                <a:solidFill>
-                  <a:srgbClr val="94A3B8"/>
-                </a:solidFill>
-                <a:latin typeface="Arial"/>
-              </a:defRPr>
-            </a:pPr>
-            <a:r>
-              <a:t>Result: Broken workflows, duplicated uploads, and lost productivity.</a:t>
-            </a:r>
-          </a:p>
-        </p:txBody>
-      </p:sp>
+              <a:defRPr sz="1200">
+                <a:solidFill>
+                  <a:srgbClr val="FFFFFF"/>
+                </a:solidFill>
+                <a:latin typeface="Arial"/>
+              </a:defRPr>
+            </a:pPr>
+            <a:r>
+              <a:t>• No annoying ads or popups</a:t>
+            </a:r>
+          </a:p>
+          <a:p>
+            <a:pPr>
+              <a:spcBef>
+                <a:spcPts val="500"/>
+              </a:spcBef>
+              <a:defRPr sz="1200">
+                <a:solidFill>
+                  <a:srgbClr val="FFFFFF"/>
+                </a:solidFill>
+                <a:latin typeface="Arial"/>
+              </a:defRPr>
+            </a:pPr>
+          </a:p>
+          <a:p>
+            <a:pPr>
+              <a:spcBef>
+                <a:spcPts val="500"/>
+              </a:spcBef>
+              <a:defRPr sz="1200">
+                <a:solidFill>
+                  <a:srgbClr val="FFFFFF"/>
+                </a:solidFill>
+                <a:latin typeface="Arial"/>
+              </a:defRPr>
+            </a:pPr>
+            <a:r>
+              <a:t>Think of it like iLovePDF + TinyPNG + Remove.bg</a:t>
+            </a:r>
+          </a:p>
+          <a:p>
+            <a:pPr>
+              <a:spcBef>
+                <a:spcPts val="500"/>
+              </a:spcBef>
+              <a:defRPr sz="1200">
+                <a:solidFill>
+                  <a:srgbClr val="FFFFFF"/>
+                </a:solidFill>
+                <a:latin typeface="Arial"/>
+              </a:defRPr>
+            </a:pPr>
+            <a:r>
+              <a:t>all combined into one single website!</a:t>
+            </a:r>
+          </a:p>
+        </p:txBody>
+      </p:sp>
+      <p:pic>
+        <p:nvPicPr>
+          <p:cNvPr id="5" name="Picture 4" descr="browser_mockup.png"/>
+          <p:cNvPicPr>
+            <a:picLocks noChangeAspect="1"/>
+          </p:cNvPicPr>
+          <p:nvPr/>
+        </p:nvPicPr>
+        <p:blipFill>
+          <a:blip r:embed="rId2"/>
+          <a:stretch>
+            <a:fillRect/>
+          </a:stretch>
+        </p:blipFill>
+        <p:spPr>
+          <a:xfrm>
+            <a:off x="6217920" y="1645920"/>
+            <a:ext cx="5212080" cy="3536094"/>
+          </a:xfrm>
+          <a:prstGeom prst="rect">
+            <a:avLst/>
+          </a:prstGeom>
+          <a:effectLst>
+            <a:outerShdw blurRad="190500" dist="63500" dir="5400000" rotWithShape="0">
+              <a:srgbClr val="000000">
+                <a:alpha val="40000"/>
+              </a:srgbClr>
+            </a:outerShdw>
+          </a:effectLst>
+          <a:sp3d extrusionH="12700">
+            <a:bevelT w="63500" h="25400" prst="relaxedInset"/>
+            <a:contourClr>
+              <a:srgbClr val="3B82F6"/>
+            </a:contourClr>
+          </a:sp3d>
+        </p:spPr>
+      </p:pic>
       <p:sp>
         <p:nvSpPr>
           <p:cNvPr id="6" name="Rounded Rectangle 5"/>
@@ -4874,20 +4906,27 @@
         </p:nvSpPr>
         <p:spPr>
           <a:xfrm>
-            <a:off x="6309360" y="1554480"/>
-            <a:ext cx="5120640" cy="2194560"/>
+            <a:off x="731520" y="6035040"/>
+            <a:ext cx="10698480" cy="457200"/>
           </a:xfrm>
           <a:prstGeom prst="roundRect">
             <a:avLst/>
           </a:prstGeom>
           <a:solidFill>
-            <a:srgbClr val="141826"/>
+            <a:srgbClr val="141E32"/>
           </a:solidFill>
           <a:ln w="12700">
             <a:solidFill>
-              <a:srgbClr val="2D3750"/>
+              <a:srgbClr val="3B82F6"/>
             </a:solidFill>
           </a:ln>
+          <a:effectLst>
+            <a:outerShdw blurRad="190500" dist="63500" dir="5400000" rotWithShape="0">
+              <a:srgbClr val="000000">
+                <a:alpha val="40000"/>
+              </a:srgbClr>
+            </a:outerShdw>
+          </a:effectLst>
         </p:spPr>
         <p:style>
           <a:lnRef idx="1">
@@ -4904,337 +4943,19 @@
           </a:fontRef>
         </p:style>
         <p:txBody>
-          <a:bodyPr rtlCol="0" anchor="ctr" wrap="square" lIns="228600" rIns="228600" tIns="182880" bIns="182880"/>
+          <a:bodyPr rtlCol="0" anchor="ctr"/>
           <a:lstStyle/>
           <a:p>
             <a:pPr algn="ctr">
-              <a:defRPr sz="1300" b="1">
-                <a:solidFill>
-                  <a:srgbClr val="F59E0B"/>
-                </a:solidFill>
-                <a:latin typeface="Arial"/>
-              </a:defRPr>
-            </a:pPr>
-            <a:r>
-              <a:t>2. Aggressive Paywalls &amp; Restrictions</a:t>
-            </a:r>
-          </a:p>
-          <a:p>
-            <a:pPr>
-              <a:spcBef>
-                <a:spcPts val="400"/>
-              </a:spcBef>
-              <a:defRPr sz="1050">
-                <a:solidFill>
-                  <a:srgbClr val="94A3B8"/>
-                </a:solidFill>
-                <a:latin typeface="Arial"/>
-              </a:defRPr>
-            </a:pPr>
-            <a:r>
-              <a:t>Free tiers have been aggressively throttled across the web:</a:t>
-            </a:r>
-          </a:p>
-          <a:p>
-            <a:pPr>
-              <a:spcBef>
-                <a:spcPts val="400"/>
-              </a:spcBef>
-              <a:defRPr sz="1050">
-                <a:solidFill>
-                  <a:srgbClr val="F8FAFC"/>
-                </a:solidFill>
-                <a:latin typeface="Arial"/>
-              </a:defRPr>
-            </a:pPr>
-            <a:r>
-              <a:t>• SmallPDF restricts users to only 2 tasks per day.</a:t>
-            </a:r>
-          </a:p>
-          <a:p>
-            <a:pPr>
-              <a:spcBef>
-                <a:spcPts val="400"/>
-              </a:spcBef>
-              <a:defRPr sz="1050">
-                <a:solidFill>
-                  <a:srgbClr val="F8FAFC"/>
-                </a:solidFill>
-                <a:latin typeface="Arial"/>
-              </a:defRPr>
-            </a:pPr>
-            <a:r>
-              <a:t>• File sizes are capped below 5MB without paid plans.</a:t>
-            </a:r>
-          </a:p>
-          <a:p>
-            <a:pPr>
-              <a:spcBef>
-                <a:spcPts val="400"/>
-              </a:spcBef>
-              <a:defRPr sz="1050">
-                <a:solidFill>
-                  <a:srgbClr val="F8FAFC"/>
-                </a:solidFill>
-                <a:latin typeface="Arial"/>
-              </a:defRPr>
-            </a:pPr>
-            <a:r>
-              <a:t>• Essential OCR &amp; Word-to-PDF locked behind $7–$12/month fees.</a:t>
-            </a:r>
-          </a:p>
-          <a:p>
-            <a:pPr>
-              <a:spcBef>
-                <a:spcPts val="400"/>
-              </a:spcBef>
-              <a:defRPr sz="1050">
-                <a:solidFill>
-                  <a:srgbClr val="94A3B8"/>
-                </a:solidFill>
-                <a:latin typeface="Arial"/>
-              </a:defRPr>
-            </a:pPr>
-            <a:r>
-              <a:t>Students and professionals are trapped in recurring subscriptions.</a:t>
-            </a:r>
-          </a:p>
-        </p:txBody>
-      </p:sp>
-      <p:sp>
-        <p:nvSpPr>
-          <p:cNvPr id="7" name="Rounded Rectangle 6"/>
-          <p:cNvSpPr/>
-          <p:nvPr/>
-        </p:nvSpPr>
-        <p:spPr>
-          <a:xfrm>
-            <a:off x="731520" y="4023360"/>
-            <a:ext cx="5120640" cy="2194560"/>
-          </a:xfrm>
-          <a:prstGeom prst="roundRect">
-            <a:avLst/>
-          </a:prstGeom>
-          <a:solidFill>
-            <a:srgbClr val="141826"/>
-          </a:solidFill>
-          <a:ln w="12700">
-            <a:solidFill>
-              <a:srgbClr val="2D3750"/>
-            </a:solidFill>
-          </a:ln>
-        </p:spPr>
-        <p:style>
-          <a:lnRef idx="1">
-            <a:schemeClr val="accent1"/>
-          </a:lnRef>
-          <a:fillRef idx="3">
-            <a:schemeClr val="accent1"/>
-          </a:fillRef>
-          <a:effectRef idx="2">
-            <a:schemeClr val="accent1"/>
-          </a:effectRef>
-          <a:fontRef idx="minor">
-            <a:schemeClr val="lt1"/>
-          </a:fontRef>
-        </p:style>
-        <p:txBody>
-          <a:bodyPr rtlCol="0" anchor="ctr" wrap="square" lIns="228600" rIns="228600" tIns="182880" bIns="182880"/>
-          <a:lstStyle/>
-          <a:p>
-            <a:pPr algn="ctr">
-              <a:defRPr sz="1300" b="1">
-                <a:solidFill>
-                  <a:srgbClr val="A855F7"/>
-                </a:solidFill>
-                <a:latin typeface="Arial"/>
-              </a:defRPr>
-            </a:pPr>
-            <a:r>
-              <a:t>3. Data Privacy &amp; Retention Risks</a:t>
-            </a:r>
-          </a:p>
-          <a:p>
-            <a:pPr>
-              <a:spcBef>
-                <a:spcPts val="400"/>
-              </a:spcBef>
-              <a:defRPr sz="1050">
-                <a:solidFill>
-                  <a:srgbClr val="94A3B8"/>
-                </a:solidFill>
-                <a:latin typeface="Arial"/>
-              </a:defRPr>
-            </a:pPr>
-            <a:r>
-              <a:t>Confidential documents are exposed to serious vulnerabilities:</a:t>
-            </a:r>
-          </a:p>
-          <a:p>
-            <a:pPr>
-              <a:spcBef>
-                <a:spcPts val="400"/>
-              </a:spcBef>
-              <a:defRPr sz="1050">
-                <a:solidFill>
-                  <a:srgbClr val="F8FAFC"/>
-                </a:solidFill>
-                <a:latin typeface="Arial"/>
-              </a:defRPr>
-            </a:pPr>
-            <a:r>
-              <a:t>• Legal contracts, invoices, and academic records uploaded to unknown cloud silos.</a:t>
-            </a:r>
-          </a:p>
-          <a:p>
-            <a:pPr>
-              <a:spcBef>
-                <a:spcPts val="400"/>
-              </a:spcBef>
-              <a:defRPr sz="1050">
-                <a:solidFill>
-                  <a:srgbClr val="F8FAFC"/>
-                </a:solidFill>
-                <a:latin typeface="Arial"/>
-              </a:defRPr>
-            </a:pPr>
-            <a:r>
-              <a:t>• No verifiable cryptographic lifecycle guarantees.</a:t>
-            </a:r>
-          </a:p>
-          <a:p>
-            <a:pPr>
-              <a:spcBef>
-                <a:spcPts val="400"/>
-              </a:spcBef>
-              <a:defRPr sz="1050">
-                <a:solidFill>
-                  <a:srgbClr val="F8FAFC"/>
-                </a:solidFill>
-                <a:latin typeface="Arial"/>
-              </a:defRPr>
-            </a:pPr>
-            <a:r>
-              <a:t>• No instant manual self-destruction options for processed files.</a:t>
-            </a:r>
-          </a:p>
-        </p:txBody>
-      </p:sp>
-      <p:sp>
-        <p:nvSpPr>
-          <p:cNvPr id="8" name="Rounded Rectangle 7"/>
-          <p:cNvSpPr/>
-          <p:nvPr/>
-        </p:nvSpPr>
-        <p:spPr>
-          <a:xfrm>
-            <a:off x="6309360" y="4023360"/>
-            <a:ext cx="5120640" cy="2194560"/>
-          </a:xfrm>
-          <a:prstGeom prst="roundRect">
-            <a:avLst/>
-          </a:prstGeom>
-          <a:solidFill>
-            <a:srgbClr val="141826"/>
-          </a:solidFill>
-          <a:ln w="12700">
-            <a:solidFill>
-              <a:srgbClr val="2D3750"/>
-            </a:solidFill>
-          </a:ln>
-        </p:spPr>
-        <p:style>
-          <a:lnRef idx="1">
-            <a:schemeClr val="accent1"/>
-          </a:lnRef>
-          <a:fillRef idx="3">
-            <a:schemeClr val="accent1"/>
-          </a:fillRef>
-          <a:effectRef idx="2">
-            <a:schemeClr val="accent1"/>
-          </a:effectRef>
-          <a:fontRef idx="minor">
-            <a:schemeClr val="lt1"/>
-          </a:fontRef>
-        </p:style>
-        <p:txBody>
-          <a:bodyPr rtlCol="0" anchor="ctr" wrap="square" lIns="228600" rIns="228600" tIns="182880" bIns="182880"/>
-          <a:lstStyle/>
-          <a:p>
-            <a:pPr algn="ctr">
-              <a:defRPr sz="1300" b="1">
-                <a:solidFill>
-                  <a:srgbClr val="F43F5E"/>
-                </a:solidFill>
-                <a:latin typeface="Arial"/>
-              </a:defRPr>
-            </a:pPr>
-            <a:r>
-              <a:t>4. Heavy Ad Clutter &amp; Security Hazards</a:t>
-            </a:r>
-          </a:p>
-          <a:p>
-            <a:pPr>
-              <a:spcBef>
-                <a:spcPts val="400"/>
-              </a:spcBef>
-              <a:defRPr sz="1050">
-                <a:solidFill>
-                  <a:srgbClr val="94A3B8"/>
-                </a:solidFill>
-                <a:latin typeface="Arial"/>
-              </a:defRPr>
-            </a:pPr>
-            <a:r>
-              <a:t>Ad-driven utility portals compromise security and performance:</a:t>
-            </a:r>
-          </a:p>
-          <a:p>
-            <a:pPr>
-              <a:spcBef>
-                <a:spcPts val="400"/>
-              </a:spcBef>
-              <a:defRPr sz="1050">
-                <a:solidFill>
-                  <a:srgbClr val="F8FAFC"/>
-                </a:solidFill>
-                <a:latin typeface="Arial"/>
-              </a:defRPr>
-            </a:pPr>
-            <a:r>
-              <a:t>• Deceptive 'Download' bait banners lead to malware.</a:t>
-            </a:r>
-          </a:p>
-          <a:p>
-            <a:pPr>
-              <a:spcBef>
-                <a:spcPts val="400"/>
-              </a:spcBef>
-              <a:defRPr sz="1050">
-                <a:solidFill>
-                  <a:srgbClr val="F8FAFC"/>
-                </a:solidFill>
-                <a:latin typeface="Arial"/>
-              </a:defRPr>
-            </a:pPr>
-            <a:r>
-              <a:t>• 15+ external tracker scripts degrade browser speed.</a:t>
-            </a:r>
-          </a:p>
-          <a:p>
-            <a:pPr>
-              <a:spcBef>
-                <a:spcPts val="400"/>
-              </a:spcBef>
-              <a:defRPr sz="1050">
-                <a:solidFill>
-                  <a:srgbClr val="F8FAFC"/>
-                </a:solidFill>
-                <a:latin typeface="Arial"/>
-              </a:defRPr>
-            </a:pPr>
-            <a:r>
-              <a:t>• Frequent phishing redirects and telemetry harvesting.</a:t>
+              <a:defRPr sz="1100" b="1">
+                <a:solidFill>
+                  <a:srgbClr val="3B82F6"/>
+                </a:solidFill>
+                <a:latin typeface="Arial"/>
+              </a:defRPr>
+            </a:pPr>
+            <a:r>
+              <a:t>PixelForge — One Platform, All Your Tools, 100% Free</a:t>
             </a:r>
           </a:p>
         </p:txBody>
@@ -5244,8 +4965,8 @@
   <p:clrMapOvr>
     <a:masterClrMapping/>
   </p:clrMapOvr>
-  <p:transition spd="med">
-    <p:push dir="r"/>
+  <p:transition spd="med" advTm="0">
+    <p:push dir="l"/>
   </p:transition>
 </p:sld>
 </file>
@@ -5255,9 +4976,17 @@
   <p:cSld>
     <p:bg>
       <p:bgPr>
-        <a:solidFill>
-          <a:srgbClr val="0B0D14"/>
-        </a:solidFill>
+        <a:gradFill rotWithShape="1">
+          <a:gsLst>
+            <a:gs pos="0">
+              <a:srgbClr val="0F172A"/>
+            </a:gs>
+            <a:gs pos="100000">
+              <a:srgbClr val="1E2846"/>
+            </a:gs>
+          </a:gsLst>
+          <a:lin scaled="0"/>
+        </a:gradFill>
         <a:effectLst/>
       </p:bgPr>
     </p:bg>
@@ -5276,20 +5005,25 @@
         </p:nvSpPr>
         <p:spPr>
           <a:xfrm>
-            <a:off x="731520" y="365760"/>
-            <a:ext cx="2011680" cy="320040"/>
+            <a:off x="731520" y="457200"/>
+            <a:ext cx="2286000" cy="347472"/>
           </a:xfrm>
           <a:prstGeom prst="roundRect">
             <a:avLst/>
           </a:prstGeom>
           <a:solidFill>
-            <a:srgbClr val="19261C"/>
+            <a:srgbClr val="EF4444"/>
           </a:solidFill>
-          <a:ln w="12700">
-            <a:solidFill>
-              <a:srgbClr val="A3E635"/>
-            </a:solidFill>
+          <a:ln>
+            <a:noFill/>
           </a:ln>
+          <a:effectLst>
+            <a:outerShdw blurRad="190500" dist="63500" dir="5400000" rotWithShape="0">
+              <a:srgbClr val="000000">
+                <a:alpha val="40000"/>
+              </a:srgbClr>
+            </a:outerShdw>
+          </a:effectLst>
         </p:spPr>
         <p:style>
           <a:lnRef idx="1">
@@ -5306,19 +5040,19 @@
           </a:fontRef>
         </p:style>
         <p:txBody>
-          <a:bodyPr rtlCol="0" anchor="ctr" wrap="square"/>
+          <a:bodyPr rtlCol="0" anchor="ctr"/>
           <a:lstStyle/>
           <a:p>
             <a:pPr algn="ctr">
-              <a:defRPr sz="1000" b="1">
-                <a:solidFill>
-                  <a:srgbClr val="A3E635"/>
-                </a:solidFill>
-                <a:latin typeface="Arial"/>
-              </a:defRPr>
-            </a:pPr>
-            <a:r>
-              <a:t>THE SOLUTION</a:t>
+              <a:defRPr sz="1100" b="1">
+                <a:solidFill>
+                  <a:srgbClr val="FFFFFF"/>
+                </a:solidFill>
+                <a:latin typeface="Arial"/>
+              </a:defRPr>
+            </a:pPr>
+            <a:r>
+              <a:t>THE PROBLEM</a:t>
             </a:r>
           </a:p>
         </p:txBody>
@@ -5331,8 +5065,8 @@
         </p:nvSpPr>
         <p:spPr>
           <a:xfrm>
-            <a:off x="731520" y="731520"/>
-            <a:ext cx="8686800" cy="640080"/>
+            <a:off x="731520" y="914400"/>
+            <a:ext cx="10698480" cy="548640"/>
           </a:xfrm>
           <a:prstGeom prst="rect">
             <a:avLst/>
@@ -5345,78 +5079,55 @@
           </a:bodyPr>
           <a:lstStyle/>
           <a:p>
-            <a:pPr>
-              <a:defRPr sz="2400" b="1">
-                <a:solidFill>
-                  <a:srgbClr val="F8FAFC"/>
-                </a:solidFill>
-                <a:latin typeface="Arial"/>
-              </a:defRPr>
-            </a:pPr>
-            <a:r>
-              <a:t>PixelForge: The Unified All-in-One Paradigm</a:t>
-            </a:r>
-          </a:p>
-        </p:txBody>
-      </p:sp>
-      <p:sp>
-        <p:nvSpPr>
-          <p:cNvPr id="4" name="TextBox 3"/>
-          <p:cNvSpPr txBox="1"/>
-          <p:nvPr/>
-        </p:nvSpPr>
-        <p:spPr>
-          <a:xfrm>
-            <a:off x="10515600" y="365760"/>
-            <a:ext cx="1097280" cy="365760"/>
-          </a:xfrm>
-          <a:prstGeom prst="rect">
-            <a:avLst/>
-          </a:prstGeom>
-          <a:noFill/>
-        </p:spPr>
-        <p:txBody>
-          <a:bodyPr wrap="none">
-            <a:spAutoFit/>
-          </a:bodyPr>
-          <a:lstStyle/>
-          <a:p>
-            <a:pPr algn="r">
-              <a:defRPr sz="1200" b="1">
-                <a:solidFill>
-                  <a:srgbClr val="A3E635"/>
-                </a:solidFill>
-                <a:latin typeface="Arial"/>
-              </a:defRPr>
-            </a:pPr>
-            <a:r>
-              <a:t>03 / 09</a:t>
-            </a:r>
-          </a:p>
-        </p:txBody>
-      </p:sp>
-      <p:sp>
-        <p:nvSpPr>
-          <p:cNvPr id="5" name="Rounded Rectangle 4"/>
+            <a:pPr algn="l">
+              <a:defRPr sz="3000" b="1">
+                <a:solidFill>
+                  <a:srgbClr val="FFFFFF"/>
+                </a:solidFill>
+                <a:latin typeface="Arial"/>
+              </a:defRPr>
+            </a:pPr>
+            <a:r>
+              <a:t>Why We Built PixelForge</a:t>
+            </a:r>
+          </a:p>
+        </p:txBody>
+      </p:sp>
+      <p:sp>
+        <p:nvSpPr>
+          <p:cNvPr id="4" name="Rounded Rectangle 3"/>
           <p:cNvSpPr/>
           <p:nvPr/>
         </p:nvSpPr>
         <p:spPr>
           <a:xfrm>
             <a:off x="731520" y="1645920"/>
-            <a:ext cx="3328416" cy="3840480"/>
+            <a:ext cx="3520440" cy="3291840"/>
           </a:xfrm>
           <a:prstGeom prst="roundRect">
             <a:avLst/>
           </a:prstGeom>
           <a:solidFill>
-            <a:srgbClr val="141826"/>
+            <a:srgbClr val="1E293B"/>
           </a:solidFill>
           <a:ln w="12700">
             <a:solidFill>
-              <a:srgbClr val="2D3750"/>
+              <a:srgbClr val="334155"/>
             </a:solidFill>
           </a:ln>
+          <a:effectLst>
+            <a:outerShdw blurRad="190500" dist="63500" dir="5400000" rotWithShape="0">
+              <a:srgbClr val="000000">
+                <a:alpha val="40000"/>
+              </a:srgbClr>
+            </a:outerShdw>
+          </a:effectLst>
+          <a:sp3d extrusionH="25400">
+            <a:bevelT w="63500" h="25400" prst="relaxedInset"/>
+            <a:contourClr>
+              <a:srgbClr val="3B82F6"/>
+            </a:contourClr>
+          </a:sp3d>
         </p:spPr>
         <p:style>
           <a:lnRef idx="1">
@@ -5433,141 +5144,125 @@
           </a:fontRef>
         </p:style>
         <p:txBody>
-          <a:bodyPr rtlCol="0" anchor="ctr" wrap="square" lIns="228600" rIns="228600" tIns="182880" bIns="182880"/>
+          <a:bodyPr rtlCol="0" anchor="ctr" wrap="square" lIns="274320" rIns="228600" tIns="182880" bIns="182880"/>
           <a:lstStyle/>
           <a:p>
             <a:pPr algn="ctr">
-              <a:defRPr sz="1300" b="1">
-                <a:solidFill>
-                  <a:srgbClr val="A3E635"/>
-                </a:solidFill>
-                <a:latin typeface="Arial"/>
-              </a:defRPr>
-            </a:pPr>
-            <a:r>
-              <a:t>Unified 114+ Suite</a:t>
+              <a:spcAft>
+                <a:spcPts val="800"/>
+              </a:spcAft>
+              <a:defRPr sz="1600" b="1">
+                <a:solidFill>
+                  <a:srgbClr val="EF4444"/>
+                </a:solidFill>
+                <a:latin typeface="Arial"/>
+              </a:defRPr>
+            </a:pPr>
+            <a:r>
+              <a:t>Too Many Websites</a:t>
             </a:r>
           </a:p>
           <a:p>
             <a:pPr>
               <a:spcBef>
-                <a:spcPts val="400"/>
+                <a:spcPts val="500"/>
               </a:spcBef>
-              <a:defRPr sz="1050">
-                <a:solidFill>
-                  <a:srgbClr val="94A3B8"/>
-                </a:solidFill>
-                <a:latin typeface="Arial"/>
-              </a:defRPr>
-            </a:pPr>
-            <a:r>
-              <a:t>Consolidates all tools under a single seamless web UI:</a:t>
+              <a:defRPr sz="1200">
+                <a:solidFill>
+                  <a:srgbClr val="FFFFFF"/>
+                </a:solidFill>
+                <a:latin typeface="Arial"/>
+              </a:defRPr>
+            </a:pPr>
+            <a:r>
+              <a:t>• Need iLovePDF for merging PDFs</a:t>
             </a:r>
           </a:p>
           <a:p>
             <a:pPr>
               <a:spcBef>
-                <a:spcPts val="400"/>
+                <a:spcPts val="500"/>
               </a:spcBef>
-              <a:defRPr sz="1050">
-                <a:solidFill>
-                  <a:srgbClr val="F8FAFC"/>
-                </a:solidFill>
-                <a:latin typeface="Arial"/>
-              </a:defRPr>
-            </a:pPr>
-            <a:r>
-              <a:t>• 62 Image processing &amp; conversion tools</a:t>
+              <a:defRPr sz="1200">
+                <a:solidFill>
+                  <a:srgbClr val="FFFFFF"/>
+                </a:solidFill>
+                <a:latin typeface="Arial"/>
+              </a:defRPr>
+            </a:pPr>
+            <a:r>
+              <a:t>• Need TinyPNG for compressing images</a:t>
             </a:r>
           </a:p>
           <a:p>
             <a:pPr>
               <a:spcBef>
-                <a:spcPts val="400"/>
+                <a:spcPts val="500"/>
               </a:spcBef>
-              <a:defRPr sz="1050">
-                <a:solidFill>
-                  <a:srgbClr val="F8FAFC"/>
-                </a:solidFill>
-                <a:latin typeface="Arial"/>
-              </a:defRPr>
-            </a:pPr>
-            <a:r>
-              <a:t>• 19 Vector PDF manipulation utilities</a:t>
+              <a:defRPr sz="1200">
+                <a:solidFill>
+                  <a:srgbClr val="FFFFFF"/>
+                </a:solidFill>
+                <a:latin typeface="Arial"/>
+              </a:defRPr>
+            </a:pPr>
+            <a:r>
+              <a:t>• Need Remove.bg for background removal</a:t>
             </a:r>
           </a:p>
           <a:p>
             <a:pPr>
               <a:spcBef>
-                <a:spcPts val="400"/>
+                <a:spcPts val="500"/>
               </a:spcBef>
-              <a:defRPr sz="1050">
-                <a:solidFill>
-                  <a:srgbClr val="F8FAFC"/>
-                </a:solidFill>
-                <a:latin typeface="Arial"/>
-              </a:defRPr>
-            </a:pPr>
-            <a:r>
-              <a:t>• 7 Document AI &amp; smart developer tools</a:t>
-            </a:r>
-          </a:p>
-          <a:p>
-            <a:pPr>
-              <a:spcBef>
-                <a:spcPts val="400"/>
-              </a:spcBef>
-              <a:defRPr sz="1050">
-                <a:solidFill>
-                  <a:srgbClr val="F8FAFC"/>
-                </a:solidFill>
-                <a:latin typeface="Arial"/>
-              </a:defRPr>
-            </a:pPr>
-            <a:r>
-              <a:t>• 26 Future-ready coming soon modules</a:t>
-            </a:r>
-          </a:p>
-          <a:p>
-            <a:pPr>
-              <a:spcBef>
-                <a:spcPts val="400"/>
-              </a:spcBef>
-              <a:defRPr sz="1050">
-                <a:solidFill>
-                  <a:srgbClr val="F8FAFC"/>
-                </a:solidFill>
-                <a:latin typeface="Arial"/>
-              </a:defRPr>
-            </a:pPr>
-            <a:r>
-              <a:t>✓ Single URL, persistent workspace, zero tab hopping.</a:t>
-            </a:r>
-          </a:p>
-        </p:txBody>
-      </p:sp>
-      <p:sp>
-        <p:nvSpPr>
-          <p:cNvPr id="6" name="Rounded Rectangle 5"/>
+              <a:defRPr sz="1200">
+                <a:solidFill>
+                  <a:srgbClr val="FFFFFF"/>
+                </a:solidFill>
+                <a:latin typeface="Arial"/>
+              </a:defRPr>
+            </a:pPr>
+            <a:r>
+              <a:t>• Users waste time switching between sites</a:t>
+            </a:r>
+          </a:p>
+        </p:txBody>
+      </p:sp>
+      <p:sp>
+        <p:nvSpPr>
+          <p:cNvPr id="5" name="Rounded Rectangle 4"/>
           <p:cNvSpPr/>
           <p:nvPr/>
         </p:nvSpPr>
         <p:spPr>
           <a:xfrm>
-            <a:off x="4425696" y="1645920"/>
-            <a:ext cx="3328416" cy="3840480"/>
+            <a:off x="4526280" y="1645920"/>
+            <a:ext cx="3520440" cy="3291840"/>
           </a:xfrm>
           <a:prstGeom prst="roundRect">
             <a:avLst/>
           </a:prstGeom>
           <a:solidFill>
-            <a:srgbClr val="141826"/>
+            <a:srgbClr val="1E293B"/>
           </a:solidFill>
           <a:ln w="12700">
             <a:solidFill>
-              <a:srgbClr val="2D3750"/>
+              <a:srgbClr val="334155"/>
             </a:solidFill>
           </a:ln>
+          <a:effectLst>
+            <a:outerShdw blurRad="190500" dist="63500" dir="5400000" rotWithShape="0">
+              <a:srgbClr val="000000">
+                <a:alpha val="40000"/>
+              </a:srgbClr>
+            </a:outerShdw>
+          </a:effectLst>
+          <a:sp3d extrusionH="25400">
+            <a:bevelT w="63500" h="25400" prst="relaxedInset"/>
+            <a:contourClr>
+              <a:srgbClr val="3B82F6"/>
+            </a:contourClr>
+          </a:sp3d>
         </p:spPr>
         <p:style>
           <a:lnRef idx="1">
@@ -5584,141 +5279,125 @@
           </a:fontRef>
         </p:style>
         <p:txBody>
-          <a:bodyPr rtlCol="0" anchor="ctr" wrap="square" lIns="228600" rIns="228600" tIns="182880" bIns="182880"/>
+          <a:bodyPr rtlCol="0" anchor="ctr" wrap="square" lIns="274320" rIns="228600" tIns="182880" bIns="182880"/>
           <a:lstStyle/>
           <a:p>
             <a:pPr algn="ctr">
-              <a:defRPr sz="1300" b="1">
-                <a:solidFill>
-                  <a:srgbClr val="38BDF8"/>
-                </a:solidFill>
-                <a:latin typeface="Arial"/>
-              </a:defRPr>
-            </a:pPr>
-            <a:r>
-              <a:t>Zero-Trust Ephemeral Privacy</a:t>
+              <a:spcAft>
+                <a:spcPts val="800"/>
+              </a:spcAft>
+              <a:defRPr sz="1600" b="1">
+                <a:solidFill>
+                  <a:srgbClr val="F97316"/>
+                </a:solidFill>
+                <a:latin typeface="Arial"/>
+              </a:defRPr>
+            </a:pPr>
+            <a:r>
+              <a:t>Expensive Subscriptions</a:t>
             </a:r>
           </a:p>
           <a:p>
             <a:pPr>
               <a:spcBef>
-                <a:spcPts val="400"/>
+                <a:spcPts val="500"/>
               </a:spcBef>
-              <a:defRPr sz="1050">
-                <a:solidFill>
-                  <a:srgbClr val="94A3B8"/>
-                </a:solidFill>
-                <a:latin typeface="Arial"/>
-              </a:defRPr>
-            </a:pPr>
-            <a:r>
-              <a:t>Strict cryptographic data protection lifecycle:</a:t>
+              <a:defRPr sz="1200">
+                <a:solidFill>
+                  <a:srgbClr val="FFFFFF"/>
+                </a:solidFill>
+                <a:latin typeface="Arial"/>
+              </a:defRPr>
+            </a:pPr>
+            <a:r>
+              <a:t>• SmallPDF charges $12/month</a:t>
             </a:r>
           </a:p>
           <a:p>
             <a:pPr>
               <a:spcBef>
-                <a:spcPts val="400"/>
+                <a:spcPts val="500"/>
               </a:spcBef>
-              <a:defRPr sz="1050">
-                <a:solidFill>
-                  <a:srgbClr val="F8FAFC"/>
-                </a:solidFill>
-                <a:latin typeface="Arial"/>
-              </a:defRPr>
-            </a:pPr>
-            <a:r>
-              <a:t>• Every output gets an unguessable UUIDv4 token.</a:t>
+              <a:defRPr sz="1200">
+                <a:solidFill>
+                  <a:srgbClr val="FFFFFF"/>
+                </a:solidFill>
+                <a:latin typeface="Arial"/>
+              </a:defRPr>
+            </a:pPr>
+            <a:r>
+              <a:t>• iLovePDF charges $7/month</a:t>
             </a:r>
           </a:p>
           <a:p>
             <a:pPr>
               <a:spcBef>
-                <a:spcPts val="400"/>
+                <a:spcPts val="500"/>
               </a:spcBef>
-              <a:defRPr sz="1050">
-                <a:solidFill>
-                  <a:srgbClr val="F8FAFC"/>
-                </a:solidFill>
-                <a:latin typeface="Arial"/>
-              </a:defRPr>
-            </a:pPr>
-            <a:r>
-              <a:t>• Automated disk daemon purges files after 60 minutes.</a:t>
+              <a:defRPr sz="1200">
+                <a:solidFill>
+                  <a:srgbClr val="FFFFFF"/>
+                </a:solidFill>
+                <a:latin typeface="Arial"/>
+              </a:defRPr>
+            </a:pPr>
+            <a:r>
+              <a:t>• TinyPNG costs $39/year</a:t>
             </a:r>
           </a:p>
           <a:p>
             <a:pPr>
               <a:spcBef>
-                <a:spcPts val="400"/>
+                <a:spcPts val="500"/>
               </a:spcBef>
-              <a:defRPr sz="1050">
-                <a:solidFill>
-                  <a:srgbClr val="F8FAFC"/>
-                </a:solidFill>
-                <a:latin typeface="Arial"/>
-              </a:defRPr>
-            </a:pPr>
-            <a:r>
-              <a:t>• Instant 1-click manual self-destruction button.</a:t>
-            </a:r>
-          </a:p>
-          <a:p>
-            <a:pPr>
-              <a:spcBef>
-                <a:spcPts val="400"/>
-              </a:spcBef>
-              <a:defRPr sz="1050">
-                <a:solidFill>
-                  <a:srgbClr val="F8FAFC"/>
-                </a:solidFill>
-                <a:latin typeface="Arial"/>
-              </a:defRPr>
-            </a:pPr>
-            <a:r>
-              <a:t>• Files never stored on permanent third-party cloud lakes.</a:t>
-            </a:r>
-          </a:p>
-          <a:p>
-            <a:pPr>
-              <a:spcBef>
-                <a:spcPts val="400"/>
-              </a:spcBef>
-              <a:defRPr sz="1050">
-                <a:solidFill>
-                  <a:srgbClr val="F8FAFC"/>
-                </a:solidFill>
-                <a:latin typeface="Arial"/>
-              </a:defRPr>
-            </a:pPr>
-            <a:r>
-              <a:t>✓ 100% private, anonymous, and unindexed.</a:t>
-            </a:r>
-          </a:p>
-        </p:txBody>
-      </p:sp>
-      <p:sp>
-        <p:nvSpPr>
-          <p:cNvPr id="7" name="Rounded Rectangle 6"/>
+              <a:defRPr sz="1200">
+                <a:solidFill>
+                  <a:srgbClr val="FFFFFF"/>
+                </a:solidFill>
+                <a:latin typeface="Arial"/>
+              </a:defRPr>
+            </a:pPr>
+            <a:r>
+              <a:t>• Students and freelancers can't afford this</a:t>
+            </a:r>
+          </a:p>
+        </p:txBody>
+      </p:sp>
+      <p:sp>
+        <p:nvSpPr>
+          <p:cNvPr id="6" name="Rounded Rectangle 5"/>
           <p:cNvSpPr/>
           <p:nvPr/>
         </p:nvSpPr>
         <p:spPr>
           <a:xfrm>
-            <a:off x="8119872" y="1645920"/>
-            <a:ext cx="3328416" cy="3840480"/>
+            <a:off x="8321040" y="1645920"/>
+            <a:ext cx="3520440" cy="3291840"/>
           </a:xfrm>
           <a:prstGeom prst="roundRect">
             <a:avLst/>
           </a:prstGeom>
           <a:solidFill>
-            <a:srgbClr val="141826"/>
+            <a:srgbClr val="1E293B"/>
           </a:solidFill>
           <a:ln w="12700">
             <a:solidFill>
-              <a:srgbClr val="2D3750"/>
+              <a:srgbClr val="334155"/>
             </a:solidFill>
           </a:ln>
+          <a:effectLst>
+            <a:outerShdw blurRad="190500" dist="63500" dir="5400000" rotWithShape="0">
+              <a:srgbClr val="000000">
+                <a:alpha val="40000"/>
+              </a:srgbClr>
+            </a:outerShdw>
+          </a:effectLst>
+          <a:sp3d extrusionH="25400">
+            <a:bevelT w="63500" h="25400" prst="relaxedInset"/>
+            <a:contourClr>
+              <a:srgbClr val="3B82F6"/>
+            </a:contourClr>
+          </a:sp3d>
         </p:spPr>
         <p:style>
           <a:lnRef idx="1">
@@ -5735,141 +5414,119 @@
           </a:fontRef>
         </p:style>
         <p:txBody>
-          <a:bodyPr rtlCol="0" anchor="ctr" wrap="square" lIns="228600" rIns="228600" tIns="182880" bIns="182880"/>
+          <a:bodyPr rtlCol="0" anchor="ctr" wrap="square" lIns="274320" rIns="228600" tIns="182880" bIns="182880"/>
           <a:lstStyle/>
           <a:p>
             <a:pPr algn="ctr">
-              <a:defRPr sz="1300" b="1">
-                <a:solidFill>
-                  <a:srgbClr val="6366F1"/>
-                </a:solidFill>
-                <a:latin typeface="Arial"/>
-              </a:defRPr>
-            </a:pPr>
-            <a:r>
-              <a:t>Compiled Native Engine Speed</a:t>
+              <a:spcAft>
+                <a:spcPts val="800"/>
+              </a:spcAft>
+              <a:defRPr sz="1600" b="1">
+                <a:solidFill>
+                  <a:srgbClr val="8B5CF6"/>
+                </a:solidFill>
+                <a:latin typeface="Arial"/>
+              </a:defRPr>
+            </a:pPr>
+            <a:r>
+              <a:t>Privacy Concerns</a:t>
             </a:r>
           </a:p>
           <a:p>
             <a:pPr>
               <a:spcBef>
-                <a:spcPts val="400"/>
+                <a:spcPts val="500"/>
               </a:spcBef>
-              <a:defRPr sz="1050">
-                <a:solidFill>
-                  <a:srgbClr val="94A3B8"/>
-                </a:solidFill>
-                <a:latin typeface="Arial"/>
-              </a:defRPr>
-            </a:pPr>
-            <a:r>
-              <a:t>Replaces slow interpreted script wrappers:</a:t>
+              <a:defRPr sz="1200">
+                <a:solidFill>
+                  <a:srgbClr val="FFFFFF"/>
+                </a:solidFill>
+                <a:latin typeface="Arial"/>
+              </a:defRPr>
+            </a:pPr>
+            <a:r>
+              <a:t>• Your files sit on their servers for days</a:t>
             </a:r>
           </a:p>
           <a:p>
             <a:pPr>
               <a:spcBef>
-                <a:spcPts val="400"/>
+                <a:spcPts val="500"/>
               </a:spcBef>
-              <a:defRPr sz="1050">
-                <a:solidFill>
-                  <a:srgbClr val="F8FAFC"/>
-                </a:solidFill>
-                <a:latin typeface="Arial"/>
-              </a:defRPr>
-            </a:pPr>
-            <a:r>
-              <a:t>• Multi-threaded libvips C++ engine via Sharp 0.35.</a:t>
+              <a:defRPr sz="1200">
+                <a:solidFill>
+                  <a:srgbClr val="FFFFFF"/>
+                </a:solidFill>
+                <a:latin typeface="Arial"/>
+              </a:defRPr>
+            </a:pPr>
+            <a:r>
+              <a:t>• No guarantee your data is deleted</a:t>
             </a:r>
           </a:p>
           <a:p>
             <a:pPr>
               <a:spcBef>
-                <a:spcPts val="400"/>
+                <a:spcPts val="500"/>
               </a:spcBef>
-              <a:defRPr sz="1050">
-                <a:solidFill>
-                  <a:srgbClr val="F8FAFC"/>
-                </a:solidFill>
-                <a:latin typeface="Arial"/>
-              </a:defRPr>
-            </a:pPr>
-            <a:r>
-              <a:t>• Sub-120ms execution for image transformations.</a:t>
+              <a:defRPr sz="1200">
+                <a:solidFill>
+                  <a:srgbClr val="FFFFFF"/>
+                </a:solidFill>
+                <a:latin typeface="Arial"/>
+              </a:defRPr>
+            </a:pPr>
+            <a:r>
+              <a:t>• Sensitive documents at risk</a:t>
             </a:r>
           </a:p>
           <a:p>
             <a:pPr>
               <a:spcBef>
-                <a:spcPts val="400"/>
+                <a:spcPts val="500"/>
               </a:spcBef>
-              <a:defRPr sz="1050">
-                <a:solidFill>
-                  <a:srgbClr val="F8FAFC"/>
-                </a:solidFill>
-                <a:latin typeface="Arial"/>
-              </a:defRPr>
-            </a:pPr>
-            <a:r>
-              <a:t>• Direct vector PDF buffer manipulations via PDF-Lib.</a:t>
-            </a:r>
-          </a:p>
-          <a:p>
-            <a:pPr>
-              <a:spcBef>
-                <a:spcPts val="400"/>
-              </a:spcBef>
-              <a:defRPr sz="1050">
-                <a:solidFill>
-                  <a:srgbClr val="F8FAFC"/>
-                </a:solidFill>
-                <a:latin typeface="Arial"/>
-              </a:defRPr>
-            </a:pPr>
-            <a:r>
-              <a:t>• Zero shell execution vulnerabilities.</a:t>
-            </a:r>
-          </a:p>
-          <a:p>
-            <a:pPr>
-              <a:spcBef>
-                <a:spcPts val="400"/>
-              </a:spcBef>
-              <a:defRPr sz="1050">
-                <a:solidFill>
-                  <a:srgbClr val="F8FAFC"/>
-                </a:solidFill>
-                <a:latin typeface="Arial"/>
-              </a:defRPr>
-            </a:pPr>
-            <a:r>
-              <a:t>✓ Enterprise-grade throughput at zero consumer cost.</a:t>
-            </a:r>
-          </a:p>
-        </p:txBody>
-      </p:sp>
-      <p:sp>
-        <p:nvSpPr>
-          <p:cNvPr id="8" name="Rounded Rectangle 7"/>
+              <a:defRPr sz="1200">
+                <a:solidFill>
+                  <a:srgbClr val="FFFFFF"/>
+                </a:solidFill>
+                <a:latin typeface="Arial"/>
+              </a:defRPr>
+            </a:pPr>
+            <a:r>
+              <a:t>• Heavy tracking and ads everywhere</a:t>
+            </a:r>
+          </a:p>
+        </p:txBody>
+      </p:sp>
+      <p:sp>
+        <p:nvSpPr>
+          <p:cNvPr id="7" name="Rounded Rectangle 6"/>
           <p:cNvSpPr/>
           <p:nvPr/>
         </p:nvSpPr>
         <p:spPr>
           <a:xfrm>
-            <a:off x="731520" y="5669280"/>
-            <a:ext cx="10698480" cy="548640"/>
+            <a:off x="731520" y="5120640"/>
+            <a:ext cx="10698480" cy="1005840"/>
           </a:xfrm>
           <a:prstGeom prst="roundRect">
             <a:avLst/>
           </a:prstGeom>
           <a:solidFill>
-            <a:srgbClr val="142319"/>
+            <a:srgbClr val="1E293B"/>
           </a:solidFill>
-          <a:ln>
+          <a:ln w="12700">
             <a:solidFill>
-              <a:srgbClr val="A3E635"/>
+              <a:srgbClr val="334155"/>
             </a:solidFill>
           </a:ln>
+          <a:effectLst>
+            <a:outerShdw blurRad="190500" dist="63500" dir="5400000" rotWithShape="0">
+              <a:srgbClr val="000000">
+                <a:alpha val="40000"/>
+              </a:srgbClr>
+            </a:outerShdw>
+          </a:effectLst>
         </p:spPr>
         <p:style>
           <a:lnRef idx="1">
@@ -5886,18 +5543,38 @@
           </a:fontRef>
         </p:style>
         <p:txBody>
-          <a:bodyPr rtlCol="0" anchor="ctr"/>
+          <a:bodyPr rtlCol="0" anchor="ctr" wrap="square" lIns="274320" rIns="228600" tIns="182880" bIns="182880"/>
           <a:lstStyle/>
           <a:p>
             <a:pPr algn="ctr">
-              <a:defRPr sz="1100" b="1">
-                <a:solidFill>
-                  <a:srgbClr val="A3E635"/>
-                </a:solidFill>
-              </a:defRPr>
-            </a:pPr>
-            <a:r>
-              <a:t>CORE ADVANTAGE: 100% Free Forever  •  No Account Needed  •  No Credit Cards  •  Zero Ad Banners</a:t>
+              <a:spcAft>
+                <a:spcPts val="800"/>
+              </a:spcAft>
+              <a:defRPr sz="1600" b="1">
+                <a:solidFill>
+                  <a:srgbClr val="EF4444"/>
+                </a:solidFill>
+                <a:latin typeface="Arial"/>
+              </a:defRPr>
+            </a:pPr>
+            <a:r>
+              <a:t>The Core Problem:</a:t>
+            </a:r>
+          </a:p>
+          <a:p>
+            <a:pPr>
+              <a:spcBef>
+                <a:spcPts val="500"/>
+              </a:spcBef>
+              <a:defRPr sz="1200">
+                <a:solidFill>
+                  <a:srgbClr val="FFFFFF"/>
+                </a:solidFill>
+                <a:latin typeface="Arial"/>
+              </a:defRPr>
+            </a:pPr>
+            <a:r>
+              <a:t>Students and professionals are forced to use 5-6 expensive, ad-heavy websites that don't protect their data.</a:t>
             </a:r>
           </a:p>
         </p:txBody>
@@ -5907,8 +5584,8 @@
   <p:clrMapOvr>
     <a:masterClrMapping/>
   </p:clrMapOvr>
-  <p:transition spd="med">
-    <p:push dir="r"/>
+  <p:transition spd="med" advTm="0">
+    <p:cover dir="l"/>
   </p:transition>
 </p:sld>
 </file>
@@ -5918,9 +5595,17 @@
   <p:cSld>
     <p:bg>
       <p:bgPr>
-        <a:solidFill>
-          <a:srgbClr val="0B0D14"/>
-        </a:solidFill>
+        <a:gradFill rotWithShape="1">
+          <a:gsLst>
+            <a:gs pos="0">
+              <a:srgbClr val="0F172A"/>
+            </a:gs>
+            <a:gs pos="100000">
+              <a:srgbClr val="1E2846"/>
+            </a:gs>
+          </a:gsLst>
+          <a:lin scaled="0"/>
+        </a:gradFill>
         <a:effectLst/>
       </p:bgPr>
     </p:bg>
@@ -5939,20 +5624,25 @@
         </p:nvSpPr>
         <p:spPr>
           <a:xfrm>
-            <a:off x="731520" y="365760"/>
-            <a:ext cx="2011680" cy="320040"/>
+            <a:off x="731520" y="457200"/>
+            <a:ext cx="2286000" cy="347472"/>
           </a:xfrm>
           <a:prstGeom prst="roundRect">
             <a:avLst/>
           </a:prstGeom>
           <a:solidFill>
-            <a:srgbClr val="19261C"/>
+            <a:srgbClr val="22C55E"/>
           </a:solidFill>
-          <a:ln w="12700">
-            <a:solidFill>
-              <a:srgbClr val="A3E635"/>
-            </a:solidFill>
+          <a:ln>
+            <a:noFill/>
           </a:ln>
+          <a:effectLst>
+            <a:outerShdw blurRad="190500" dist="63500" dir="5400000" rotWithShape="0">
+              <a:srgbClr val="000000">
+                <a:alpha val="40000"/>
+              </a:srgbClr>
+            </a:outerShdw>
+          </a:effectLst>
         </p:spPr>
         <p:style>
           <a:lnRef idx="1">
@@ -5969,19 +5659,19 @@
           </a:fontRef>
         </p:style>
         <p:txBody>
-          <a:bodyPr rtlCol="0" anchor="ctr" wrap="square"/>
+          <a:bodyPr rtlCol="0" anchor="ctr"/>
           <a:lstStyle/>
           <a:p>
             <a:pPr algn="ctr">
-              <a:defRPr sz="1000" b="1">
-                <a:solidFill>
-                  <a:srgbClr val="A3E635"/>
-                </a:solidFill>
-                <a:latin typeface="Arial"/>
-              </a:defRPr>
-            </a:pPr>
-            <a:r>
-              <a:t>TECHNICAL ARCHITECTURE</a:t>
+              <a:defRPr sz="1100" b="1">
+                <a:solidFill>
+                  <a:srgbClr val="FFFFFF"/>
+                </a:solidFill>
+                <a:latin typeface="Arial"/>
+              </a:defRPr>
+            </a:pPr>
+            <a:r>
+              <a:t>KEY FEATURES</a:t>
             </a:r>
           </a:p>
         </p:txBody>
@@ -5994,8 +5684,8 @@
         </p:nvSpPr>
         <p:spPr>
           <a:xfrm>
-            <a:off x="731520" y="731520"/>
-            <a:ext cx="8686800" cy="640080"/>
+            <a:off x="731520" y="914400"/>
+            <a:ext cx="10698480" cy="548640"/>
           </a:xfrm>
           <a:prstGeom prst="rect">
             <a:avLst/>
@@ -6008,78 +5698,55 @@
           </a:bodyPr>
           <a:lstStyle/>
           <a:p>
-            <a:pPr>
-              <a:defRPr sz="2400" b="1">
-                <a:solidFill>
-                  <a:srgbClr val="F8FAFC"/>
-                </a:solidFill>
-                <a:latin typeface="Arial"/>
-              </a:defRPr>
-            </a:pPr>
-            <a:r>
-              <a:t>Full-Stack MERN + Native C++ Processing Tier</a:t>
-            </a:r>
-          </a:p>
-        </p:txBody>
-      </p:sp>
-      <p:sp>
-        <p:nvSpPr>
-          <p:cNvPr id="4" name="TextBox 3"/>
-          <p:cNvSpPr txBox="1"/>
-          <p:nvPr/>
-        </p:nvSpPr>
-        <p:spPr>
-          <a:xfrm>
-            <a:off x="10515600" y="365760"/>
-            <a:ext cx="1097280" cy="365760"/>
-          </a:xfrm>
-          <a:prstGeom prst="rect">
-            <a:avLst/>
-          </a:prstGeom>
-          <a:noFill/>
-        </p:spPr>
-        <p:txBody>
-          <a:bodyPr wrap="none">
-            <a:spAutoFit/>
-          </a:bodyPr>
-          <a:lstStyle/>
-          <a:p>
-            <a:pPr algn="r">
-              <a:defRPr sz="1200" b="1">
-                <a:solidFill>
-                  <a:srgbClr val="A3E635"/>
-                </a:solidFill>
-                <a:latin typeface="Arial"/>
-              </a:defRPr>
-            </a:pPr>
-            <a:r>
-              <a:t>04 / 09</a:t>
-            </a:r>
-          </a:p>
-        </p:txBody>
-      </p:sp>
-      <p:sp>
-        <p:nvSpPr>
-          <p:cNvPr id="5" name="Rounded Rectangle 4"/>
+            <a:pPr algn="l">
+              <a:defRPr sz="3000" b="1">
+                <a:solidFill>
+                  <a:srgbClr val="FFFFFF"/>
+                </a:solidFill>
+                <a:latin typeface="Arial"/>
+              </a:defRPr>
+            </a:pPr>
+            <a:r>
+              <a:t>What Makes PixelForge Special?</a:t>
+            </a:r>
+          </a:p>
+        </p:txBody>
+      </p:sp>
+      <p:sp>
+        <p:nvSpPr>
+          <p:cNvPr id="4" name="Rounded Rectangle 3"/>
           <p:cNvSpPr/>
           <p:nvPr/>
         </p:nvSpPr>
         <p:spPr>
           <a:xfrm>
             <a:off x="731520" y="1645920"/>
-            <a:ext cx="2468880" cy="3840480"/>
+            <a:ext cx="5349240" cy="1828800"/>
           </a:xfrm>
           <a:prstGeom prst="roundRect">
             <a:avLst/>
           </a:prstGeom>
           <a:solidFill>
-            <a:srgbClr val="141826"/>
+            <a:srgbClr val="1E293B"/>
           </a:solidFill>
           <a:ln w="12700">
             <a:solidFill>
-              <a:srgbClr val="2D3750"/>
+              <a:srgbClr val="334155"/>
             </a:solidFill>
           </a:ln>
+          <a:effectLst>
+            <a:outerShdw blurRad="190500" dist="63500" dir="5400000" rotWithShape="0">
+              <a:srgbClr val="000000">
+                <a:alpha val="40000"/>
+              </a:srgbClr>
+            </a:outerShdw>
+          </a:effectLst>
+          <a:sp3d extrusionH="25400">
+            <a:bevelT w="63500" h="25400" prst="relaxedInset"/>
+            <a:contourClr>
+              <a:srgbClr val="3B82F6"/>
+            </a:contourClr>
+          </a:sp3d>
         </p:spPr>
         <p:style>
           <a:lnRef idx="1">
@@ -6096,141 +5763,109 @@
           </a:fontRef>
         </p:style>
         <p:txBody>
-          <a:bodyPr rtlCol="0" anchor="ctr" wrap="square" lIns="228600" rIns="228600" tIns="182880" bIns="182880"/>
+          <a:bodyPr rtlCol="0" anchor="ctr" wrap="square" lIns="274320" rIns="228600" tIns="182880" bIns="182880"/>
           <a:lstStyle/>
           <a:p>
             <a:pPr algn="ctr">
-              <a:defRPr sz="1300" b="1">
-                <a:solidFill>
-                  <a:srgbClr val="A3E635"/>
-                </a:solidFill>
-                <a:latin typeface="Arial"/>
-              </a:defRPr>
-            </a:pPr>
-            <a:r>
-              <a:t>Tier 1: Client Layer</a:t>
+              <a:spcAft>
+                <a:spcPts val="800"/>
+              </a:spcAft>
+              <a:defRPr sz="1600" b="1">
+                <a:solidFill>
+                  <a:srgbClr val="3B82F6"/>
+                </a:solidFill>
+                <a:latin typeface="Arial"/>
+              </a:defRPr>
+            </a:pPr>
+            <a:r>
+              <a:t>114+ Tools in One Place</a:t>
             </a:r>
           </a:p>
           <a:p>
             <a:pPr>
               <a:spcBef>
-                <a:spcPts val="400"/>
+                <a:spcPts val="500"/>
               </a:spcBef>
-              <a:defRPr sz="1050">
-                <a:solidFill>
-                  <a:srgbClr val="94A3B8"/>
-                </a:solidFill>
-                <a:latin typeface="Arial"/>
-              </a:defRPr>
-            </a:pPr>
-            <a:r>
-              <a:t>React 19 + Vite 8 Architecture:</a:t>
+              <a:defRPr sz="1200">
+                <a:solidFill>
+                  <a:srgbClr val="FFFFFF"/>
+                </a:solidFill>
+                <a:latin typeface="Arial"/>
+              </a:defRPr>
+            </a:pPr>
+            <a:r>
+              <a:t>• Image tools: compress, convert, resize, crop</a:t>
             </a:r>
           </a:p>
           <a:p>
             <a:pPr>
               <a:spcBef>
-                <a:spcPts val="400"/>
+                <a:spcPts val="500"/>
               </a:spcBef>
-              <a:defRPr sz="1050">
-                <a:solidFill>
-                  <a:srgbClr val="F8FAFC"/>
-                </a:solidFill>
-                <a:latin typeface="Arial"/>
-              </a:defRPr>
-            </a:pPr>
-            <a:r>
-              <a:t>• Route-based lazy code splitting</a:t>
+              <a:defRPr sz="1200">
+                <a:solidFill>
+                  <a:srgbClr val="FFFFFF"/>
+                </a:solidFill>
+                <a:latin typeface="Arial"/>
+              </a:defRPr>
+            </a:pPr>
+            <a:r>
+              <a:t>• PDF tools: merge, split, encrypt, convert</a:t>
             </a:r>
           </a:p>
           <a:p>
             <a:pPr>
               <a:spcBef>
-                <a:spcPts val="400"/>
+                <a:spcPts val="500"/>
               </a:spcBef>
-              <a:defRPr sz="1050">
-                <a:solidFill>
-                  <a:srgbClr val="F8FAFC"/>
-                </a:solidFill>
-                <a:latin typeface="Arial"/>
-              </a:defRPr>
-            </a:pPr>
-            <a:r>
-              <a:t>• Initial bundle size: Only 24 kB</a:t>
-            </a:r>
-          </a:p>
-          <a:p>
-            <a:pPr>
-              <a:spcBef>
-                <a:spcPts val="400"/>
-              </a:spcBef>
-              <a:defRPr sz="1050">
-                <a:solidFill>
-                  <a:srgbClr val="F8FAFC"/>
-                </a:solidFill>
-                <a:latin typeface="Arial"/>
-              </a:defRPr>
-            </a:pPr>
-            <a:r>
-              <a:t>• Three.js WebGL 3D particle background</a:t>
-            </a:r>
-          </a:p>
-          <a:p>
-            <a:pPr>
-              <a:spcBef>
-                <a:spcPts val="400"/>
-              </a:spcBef>
-              <a:defRPr sz="1050">
-                <a:solidFill>
-                  <a:srgbClr val="F8FAFC"/>
-                </a:solidFill>
-                <a:latin typeface="Arial"/>
-              </a:defRPr>
-            </a:pPr>
-            <a:r>
-              <a:t>• Framer Motion 14 interactive physics</a:t>
-            </a:r>
-          </a:p>
-          <a:p>
-            <a:pPr>
-              <a:spcBef>
-                <a:spcPts val="400"/>
-              </a:spcBef>
-              <a:defRPr sz="1050">
-                <a:solidFill>
-                  <a:srgbClr val="F8FAFC"/>
-                </a:solidFill>
-                <a:latin typeface="Arial"/>
-              </a:defRPr>
-            </a:pPr>
-            <a:r>
-              <a:t>• Zustand lightweight reactive state</a:t>
-            </a:r>
-          </a:p>
-        </p:txBody>
-      </p:sp>
-      <p:sp>
-        <p:nvSpPr>
-          <p:cNvPr id="6" name="Rounded Rectangle 5"/>
+              <a:defRPr sz="1200">
+                <a:solidFill>
+                  <a:srgbClr val="FFFFFF"/>
+                </a:solidFill>
+                <a:latin typeface="Arial"/>
+              </a:defRPr>
+            </a:pPr>
+            <a:r>
+              <a:t>• AI tools: OCR, background removal, QR codes</a:t>
+            </a:r>
+          </a:p>
+        </p:txBody>
+      </p:sp>
+      <p:sp>
+        <p:nvSpPr>
+          <p:cNvPr id="5" name="Rounded Rectangle 4"/>
           <p:cNvSpPr/>
           <p:nvPr/>
         </p:nvSpPr>
         <p:spPr>
           <a:xfrm>
-            <a:off x="3474720" y="1645920"/>
-            <a:ext cx="2468880" cy="3840480"/>
+            <a:off x="6355080" y="1645920"/>
+            <a:ext cx="5349240" cy="1828800"/>
           </a:xfrm>
           <a:prstGeom prst="roundRect">
             <a:avLst/>
           </a:prstGeom>
           <a:solidFill>
-            <a:srgbClr val="141826"/>
+            <a:srgbClr val="1E293B"/>
           </a:solidFill>
           <a:ln w="12700">
             <a:solidFill>
-              <a:srgbClr val="2D3750"/>
+              <a:srgbClr val="334155"/>
             </a:solidFill>
           </a:ln>
+          <a:effectLst>
+            <a:outerShdw blurRad="190500" dist="63500" dir="5400000" rotWithShape="0">
+              <a:srgbClr val="000000">
+                <a:alpha val="40000"/>
+              </a:srgbClr>
+            </a:outerShdw>
+          </a:effectLst>
+          <a:sp3d extrusionH="25400">
+            <a:bevelT w="63500" h="25400" prst="relaxedInset"/>
+            <a:contourClr>
+              <a:srgbClr val="3B82F6"/>
+            </a:contourClr>
+          </a:sp3d>
         </p:spPr>
         <p:style>
           <a:lnRef idx="1">
@@ -6247,141 +5882,109 @@
           </a:fontRef>
         </p:style>
         <p:txBody>
-          <a:bodyPr rtlCol="0" anchor="ctr" wrap="square" lIns="228600" rIns="228600" tIns="182880" bIns="182880"/>
+          <a:bodyPr rtlCol="0" anchor="ctr" wrap="square" lIns="274320" rIns="228600" tIns="182880" bIns="182880"/>
           <a:lstStyle/>
           <a:p>
             <a:pPr algn="ctr">
-              <a:defRPr sz="1300" b="1">
-                <a:solidFill>
-                  <a:srgbClr val="38BDF8"/>
-                </a:solidFill>
-                <a:latin typeface="Arial"/>
-              </a:defRPr>
-            </a:pPr>
-            <a:r>
-              <a:t>Tier 2: API Gateway</a:t>
+              <a:spcAft>
+                <a:spcPts val="800"/>
+              </a:spcAft>
+              <a:defRPr sz="1600" b="1">
+                <a:solidFill>
+                  <a:srgbClr val="22C55E"/>
+                </a:solidFill>
+                <a:latin typeface="Arial"/>
+              </a:defRPr>
+            </a:pPr>
+            <a:r>
+              <a:t>100% Free — No Paywalls</a:t>
             </a:r>
           </a:p>
           <a:p>
             <a:pPr>
               <a:spcBef>
-                <a:spcPts val="400"/>
+                <a:spcPts val="500"/>
               </a:spcBef>
-              <a:defRPr sz="1050">
-                <a:solidFill>
-                  <a:srgbClr val="94A3B8"/>
-                </a:solidFill>
-                <a:latin typeface="Arial"/>
-              </a:defRPr>
-            </a:pPr>
-            <a:r>
-              <a:t>Express 4 REST Gateway:</a:t>
+              <a:defRPr sz="1200">
+                <a:solidFill>
+                  <a:srgbClr val="FFFFFF"/>
+                </a:solidFill>
+                <a:latin typeface="Arial"/>
+              </a:defRPr>
+            </a:pPr>
+            <a:r>
+              <a:t>• No subscriptions, no hidden charges</a:t>
             </a:r>
           </a:p>
           <a:p>
             <a:pPr>
               <a:spcBef>
-                <a:spcPts val="400"/>
+                <a:spcPts val="500"/>
               </a:spcBef>
-              <a:defRPr sz="1050">
-                <a:solidFill>
-                  <a:srgbClr val="F8FAFC"/>
-                </a:solidFill>
-                <a:latin typeface="Arial"/>
-              </a:defRPr>
-            </a:pPr>
-            <a:r>
-              <a:t>• Strict CORS whitelisting logic</a:t>
+              <a:defRPr sz="1200">
+                <a:solidFill>
+                  <a:srgbClr val="FFFFFF"/>
+                </a:solidFill>
+                <a:latin typeface="Arial"/>
+              </a:defRPr>
+            </a:pPr>
+            <a:r>
+              <a:t>• No daily limits or file size caps</a:t>
             </a:r>
           </a:p>
           <a:p>
             <a:pPr>
               <a:spcBef>
-                <a:spcPts val="400"/>
+                <a:spcPts val="500"/>
               </a:spcBef>
-              <a:defRPr sz="1050">
-                <a:solidFill>
-                  <a:srgbClr val="F8FAFC"/>
-                </a:solidFill>
-                <a:latin typeface="Arial"/>
-              </a:defRPr>
-            </a:pPr>
-            <a:r>
-              <a:t>• Multer flexible field normalizer</a:t>
-            </a:r>
-          </a:p>
-          <a:p>
-            <a:pPr>
-              <a:spcBef>
-                <a:spcPts val="400"/>
-              </a:spcBef>
-              <a:defRPr sz="1050">
-                <a:solidFill>
-                  <a:srgbClr val="F8FAFC"/>
-                </a:solidFill>
-                <a:latin typeface="Arial"/>
-              </a:defRPr>
-            </a:pPr>
-            <a:r>
-              <a:t>• Rate-limiting: 200 req / 15 min</a:t>
-            </a:r>
-          </a:p>
-          <a:p>
-            <a:pPr>
-              <a:spcBef>
-                <a:spcPts val="400"/>
-              </a:spcBef>
-              <a:defRPr sz="1050">
-                <a:solidFill>
-                  <a:srgbClr val="F8FAFC"/>
-                </a:solidFill>
-                <a:latin typeface="Arial"/>
-              </a:defRPr>
-            </a:pPr>
-            <a:r>
-              <a:t>• Helmet HTTP security headers</a:t>
-            </a:r>
-          </a:p>
-          <a:p>
-            <a:pPr>
-              <a:spcBef>
-                <a:spcPts val="400"/>
-              </a:spcBef>
-              <a:defRPr sz="1050">
-                <a:solidFill>
-                  <a:srgbClr val="F8FAFC"/>
-                </a:solidFill>
-                <a:latin typeface="Arial"/>
-              </a:defRPr>
-            </a:pPr>
-            <a:r>
-              <a:t>• Unified JSON error reporting</a:t>
-            </a:r>
-          </a:p>
-        </p:txBody>
-      </p:sp>
-      <p:sp>
-        <p:nvSpPr>
-          <p:cNvPr id="7" name="Rounded Rectangle 6"/>
+              <a:defRPr sz="1200">
+                <a:solidFill>
+                  <a:srgbClr val="FFFFFF"/>
+                </a:solidFill>
+                <a:latin typeface="Arial"/>
+              </a:defRPr>
+            </a:pPr>
+            <a:r>
+              <a:t>• All tools available to everyone</a:t>
+            </a:r>
+          </a:p>
+        </p:txBody>
+      </p:sp>
+      <p:sp>
+        <p:nvSpPr>
+          <p:cNvPr id="6" name="Rounded Rectangle 5"/>
           <p:cNvSpPr/>
           <p:nvPr/>
         </p:nvSpPr>
         <p:spPr>
           <a:xfrm>
-            <a:off x="6217920" y="1645920"/>
-            <a:ext cx="2468880" cy="3840480"/>
+            <a:off x="731520" y="3749040"/>
+            <a:ext cx="5349240" cy="1828800"/>
           </a:xfrm>
           <a:prstGeom prst="roundRect">
             <a:avLst/>
           </a:prstGeom>
           <a:solidFill>
-            <a:srgbClr val="141826"/>
+            <a:srgbClr val="1E293B"/>
           </a:solidFill>
           <a:ln w="12700">
             <a:solidFill>
-              <a:srgbClr val="2D3750"/>
+              <a:srgbClr val="334155"/>
             </a:solidFill>
           </a:ln>
+          <a:effectLst>
+            <a:outerShdw blurRad="190500" dist="63500" dir="5400000" rotWithShape="0">
+              <a:srgbClr val="000000">
+                <a:alpha val="40000"/>
+              </a:srgbClr>
+            </a:outerShdw>
+          </a:effectLst>
+          <a:sp3d extrusionH="25400">
+            <a:bevelT w="63500" h="25400" prst="relaxedInset"/>
+            <a:contourClr>
+              <a:srgbClr val="3B82F6"/>
+            </a:contourClr>
+          </a:sp3d>
         </p:spPr>
         <p:style>
           <a:lnRef idx="1">
@@ -6398,141 +6001,109 @@
           </a:fontRef>
         </p:style>
         <p:txBody>
-          <a:bodyPr rtlCol="0" anchor="ctr" wrap="square" lIns="228600" rIns="228600" tIns="182880" bIns="182880"/>
+          <a:bodyPr rtlCol="0" anchor="ctr" wrap="square" lIns="274320" rIns="228600" tIns="182880" bIns="182880"/>
           <a:lstStyle/>
           <a:p>
             <a:pPr algn="ctr">
-              <a:defRPr sz="1300" b="1">
-                <a:solidFill>
-                  <a:srgbClr val="A855F7"/>
-                </a:solidFill>
-                <a:latin typeface="Arial"/>
-              </a:defRPr>
-            </a:pPr>
-            <a:r>
-              <a:t>Tier 3: Native Engines</a:t>
+              <a:spcAft>
+                <a:spcPts val="800"/>
+              </a:spcAft>
+              <a:defRPr sz="1600" b="1">
+                <a:solidFill>
+                  <a:srgbClr val="8B5CF6"/>
+                </a:solidFill>
+                <a:latin typeface="Arial"/>
+              </a:defRPr>
+            </a:pPr>
+            <a:r>
+              <a:t>Fast &amp; Secure Processing</a:t>
             </a:r>
           </a:p>
           <a:p>
             <a:pPr>
               <a:spcBef>
-                <a:spcPts val="400"/>
+                <a:spcPts val="500"/>
               </a:spcBef>
-              <a:defRPr sz="1050">
-                <a:solidFill>
-                  <a:srgbClr val="94A3B8"/>
-                </a:solidFill>
-                <a:latin typeface="Arial"/>
-              </a:defRPr>
-            </a:pPr>
-            <a:r>
-              <a:t>Compiled Binary Processors:</a:t>
+              <a:defRPr sz="1200">
+                <a:solidFill>
+                  <a:srgbClr val="FFFFFF"/>
+                </a:solidFill>
+                <a:latin typeface="Arial"/>
+              </a:defRPr>
+            </a:pPr>
+            <a:r>
+              <a:t>• Uses native C++ engines for speed</a:t>
             </a:r>
           </a:p>
           <a:p>
             <a:pPr>
               <a:spcBef>
-                <a:spcPts val="400"/>
+                <a:spcPts val="500"/>
               </a:spcBef>
-              <a:defRPr sz="1050">
-                <a:solidFill>
-                  <a:srgbClr val="F8FAFC"/>
-                </a:solidFill>
-                <a:latin typeface="Arial"/>
-              </a:defRPr>
-            </a:pPr>
-            <a:r>
-              <a:t>• Sharp 0.35 (libvips multi-threaded)</a:t>
+              <a:defRPr sz="1200">
+                <a:solidFill>
+                  <a:srgbClr val="FFFFFF"/>
+                </a:solidFill>
+                <a:latin typeface="Arial"/>
+              </a:defRPr>
+            </a:pPr>
+            <a:r>
+              <a:t>• 5x faster than JavaScript-based tools</a:t>
             </a:r>
           </a:p>
           <a:p>
             <a:pPr>
               <a:spcBef>
-                <a:spcPts val="400"/>
+                <a:spcPts val="500"/>
               </a:spcBef>
-              <a:defRPr sz="1050">
-                <a:solidFill>
-                  <a:srgbClr val="F8FAFC"/>
-                </a:solidFill>
-                <a:latin typeface="Arial"/>
-              </a:defRPr>
-            </a:pPr>
-            <a:r>
-              <a:t>• PDF-Lib (Vector DOM manipulation)</a:t>
-            </a:r>
-          </a:p>
-          <a:p>
-            <a:pPr>
-              <a:spcBef>
-                <a:spcPts val="400"/>
-              </a:spcBef>
-              <a:defRPr sz="1050">
-                <a:solidFill>
-                  <a:srgbClr val="F8FAFC"/>
-                </a:solidFill>
-                <a:latin typeface="Arial"/>
-              </a:defRPr>
-            </a:pPr>
-            <a:r>
-              <a:t>• Mammoth (DOCX AST parser)</a:t>
-            </a:r>
-          </a:p>
-          <a:p>
-            <a:pPr>
-              <a:spcBef>
-                <a:spcPts val="400"/>
-              </a:spcBef>
-              <a:defRPr sz="1050">
-                <a:solidFill>
-                  <a:srgbClr val="F8FAFC"/>
-                </a:solidFill>
-                <a:latin typeface="Arial"/>
-              </a:defRPr>
-            </a:pPr>
-            <a:r>
-              <a:t>• Tesseract.js (Neural OCR engine)</a:t>
-            </a:r>
-          </a:p>
-          <a:p>
-            <a:pPr>
-              <a:spcBef>
-                <a:spcPts val="400"/>
-              </a:spcBef>
-              <a:defRPr sz="1050">
-                <a:solidFill>
-                  <a:srgbClr val="F8FAFC"/>
-                </a:solidFill>
-                <a:latin typeface="Arial"/>
-              </a:defRPr>
-            </a:pPr>
-            <a:r>
-              <a:t>• Direct in-memory buffer streaming</a:t>
-            </a:r>
-          </a:p>
-        </p:txBody>
-      </p:sp>
-      <p:sp>
-        <p:nvSpPr>
-          <p:cNvPr id="8" name="Rounded Rectangle 7"/>
+              <a:defRPr sz="1200">
+                <a:solidFill>
+                  <a:srgbClr val="FFFFFF"/>
+                </a:solidFill>
+                <a:latin typeface="Arial"/>
+              </a:defRPr>
+            </a:pPr>
+            <a:r>
+              <a:t>• Files auto-deleted after 60 minutes</a:t>
+            </a:r>
+          </a:p>
+        </p:txBody>
+      </p:sp>
+      <p:sp>
+        <p:nvSpPr>
+          <p:cNvPr id="7" name="Rounded Rectangle 6"/>
           <p:cNvSpPr/>
           <p:nvPr/>
         </p:nvSpPr>
         <p:spPr>
           <a:xfrm>
-            <a:off x="8961120" y="1645920"/>
-            <a:ext cx="2468880" cy="3840480"/>
+            <a:off x="6355080" y="3749040"/>
+            <a:ext cx="5349240" cy="1828800"/>
           </a:xfrm>
           <a:prstGeom prst="roundRect">
             <a:avLst/>
           </a:prstGeom>
           <a:solidFill>
-            <a:srgbClr val="141826"/>
+            <a:srgbClr val="1E293B"/>
           </a:solidFill>
           <a:ln w="12700">
             <a:solidFill>
-              <a:srgbClr val="2D3750"/>
+              <a:srgbClr val="334155"/>
             </a:solidFill>
           </a:ln>
+          <a:effectLst>
+            <a:outerShdw blurRad="190500" dist="63500" dir="5400000" rotWithShape="0">
+              <a:srgbClr val="000000">
+                <a:alpha val="40000"/>
+              </a:srgbClr>
+            </a:outerShdw>
+          </a:effectLst>
+          <a:sp3d extrusionH="25400">
+            <a:bevelT w="63500" h="25400" prst="relaxedInset"/>
+            <a:contourClr>
+              <a:srgbClr val="3B82F6"/>
+            </a:contourClr>
+          </a:sp3d>
         </p:spPr>
         <p:style>
           <a:lnRef idx="1">
@@ -6549,141 +6120,103 @@
           </a:fontRef>
         </p:style>
         <p:txBody>
-          <a:bodyPr rtlCol="0" anchor="ctr" wrap="square" lIns="228600" rIns="228600" tIns="182880" bIns="182880"/>
+          <a:bodyPr rtlCol="0" anchor="ctr" wrap="square" lIns="274320" rIns="228600" tIns="182880" bIns="182880"/>
           <a:lstStyle/>
           <a:p>
             <a:pPr algn="ctr">
-              <a:defRPr sz="1300" b="1">
-                <a:solidFill>
-                  <a:srgbClr val="6366F1"/>
-                </a:solidFill>
-                <a:latin typeface="Arial"/>
-              </a:defRPr>
-            </a:pPr>
-            <a:r>
-              <a:t>Tier 4: Dual Persistence</a:t>
+              <a:spcAft>
+                <a:spcPts val="800"/>
+              </a:spcAft>
+              <a:defRPr sz="1600" b="1">
+                <a:solidFill>
+                  <a:srgbClr val="F97316"/>
+                </a:solidFill>
+                <a:latin typeface="Arial"/>
+              </a:defRPr>
+            </a:pPr>
+            <a:r>
+              <a:t>Modern 3D Animated UI</a:t>
             </a:r>
           </a:p>
           <a:p>
             <a:pPr>
               <a:spcBef>
-                <a:spcPts val="400"/>
+                <a:spcPts val="500"/>
               </a:spcBef>
-              <a:defRPr sz="1050">
-                <a:solidFill>
-                  <a:srgbClr val="94A3B8"/>
-                </a:solidFill>
-                <a:latin typeface="Arial"/>
-              </a:defRPr>
-            </a:pPr>
-            <a:r>
-              <a:t>Fault-Tolerant Storage:</a:t>
+              <a:defRPr sz="1200">
+                <a:solidFill>
+                  <a:srgbClr val="FFFFFF"/>
+                </a:solidFill>
+                <a:latin typeface="Arial"/>
+              </a:defRPr>
+            </a:pPr>
+            <a:r>
+              <a:t>• Beautiful dark theme with animations</a:t>
             </a:r>
           </a:p>
           <a:p>
             <a:pPr>
               <a:spcBef>
-                <a:spcPts val="400"/>
+                <a:spcPts val="500"/>
               </a:spcBef>
-              <a:defRPr sz="1050">
-                <a:solidFill>
-                  <a:srgbClr val="F8FAFC"/>
-                </a:solidFill>
-                <a:latin typeface="Arial"/>
-              </a:defRPr>
-            </a:pPr>
-            <a:r>
-              <a:t>• MongoDB 8 with 24h TTL purge index</a:t>
+              <a:defRPr sz="1200">
+                <a:solidFill>
+                  <a:srgbClr val="FFFFFF"/>
+                </a:solidFill>
+                <a:latin typeface="Arial"/>
+              </a:defRPr>
+            </a:pPr>
+            <a:r>
+              <a:t>• Three.js 3D particle backgrounds</a:t>
             </a:r>
           </a:p>
           <a:p>
             <a:pPr>
               <a:spcBef>
-                <a:spcPts val="400"/>
+                <a:spcPts val="500"/>
               </a:spcBef>
-              <a:defRPr sz="1050">
-                <a:solidFill>
-                  <a:srgbClr val="F8FAFC"/>
-                </a:solidFill>
-                <a:latin typeface="Arial"/>
-              </a:defRPr>
-            </a:pPr>
-            <a:r>
-              <a:t>• Standalone disk-resilient mode</a:t>
-            </a:r>
-          </a:p>
-          <a:p>
-            <a:pPr>
-              <a:spcBef>
-                <a:spcPts val="400"/>
-              </a:spcBef>
-              <a:defRPr sz="1050">
-                <a:solidFill>
-                  <a:srgbClr val="F8FAFC"/>
-                </a:solidFill>
-                <a:latin typeface="Arial"/>
-              </a:defRPr>
-            </a:pPr>
-            <a:r>
-              <a:t>• Multi-worker registry synchronization</a:t>
-            </a:r>
-          </a:p>
-          <a:p>
-            <a:pPr>
-              <a:spcBef>
-                <a:spcPts val="400"/>
-              </a:spcBef>
-              <a:defRPr sz="1050">
-                <a:solidFill>
-                  <a:srgbClr val="F8FAFC"/>
-                </a:solidFill>
-                <a:latin typeface="Arial"/>
-              </a:defRPr>
-            </a:pPr>
-            <a:r>
-              <a:t>• Atomic .registry.json fallback sync</a:t>
-            </a:r>
-          </a:p>
-          <a:p>
-            <a:pPr>
-              <a:spcBef>
-                <a:spcPts val="400"/>
-              </a:spcBef>
-              <a:defRPr sz="1050">
-                <a:solidFill>
-                  <a:srgbClr val="F8FAFC"/>
-                </a:solidFill>
-                <a:latin typeface="Arial"/>
-              </a:defRPr>
-            </a:pPr>
-            <a:r>
-              <a:t>• Automated 30-min sweep daemon</a:t>
-            </a:r>
-          </a:p>
-        </p:txBody>
-      </p:sp>
-      <p:sp>
-        <p:nvSpPr>
-          <p:cNvPr id="9" name="Rounded Rectangle 8"/>
+              <a:defRPr sz="1200">
+                <a:solidFill>
+                  <a:srgbClr val="FFFFFF"/>
+                </a:solidFill>
+                <a:latin typeface="Arial"/>
+              </a:defRPr>
+            </a:pPr>
+            <a:r>
+              <a:t>• Smooth drag-and-drop file uploads</a:t>
+            </a:r>
+          </a:p>
+        </p:txBody>
+      </p:sp>
+      <p:sp>
+        <p:nvSpPr>
+          <p:cNvPr id="8" name="Rounded Rectangle 7"/>
           <p:cNvSpPr/>
           <p:nvPr/>
         </p:nvSpPr>
         <p:spPr>
           <a:xfrm>
-            <a:off x="731520" y="5669280"/>
-            <a:ext cx="10698480" cy="548640"/>
+            <a:off x="731520" y="6035040"/>
+            <a:ext cx="10698480" cy="457200"/>
           </a:xfrm>
           <a:prstGeom prst="roundRect">
             <a:avLst/>
           </a:prstGeom>
           <a:solidFill>
-            <a:srgbClr val="141826"/>
+            <a:srgbClr val="141E32"/>
           </a:solidFill>
-          <a:ln>
+          <a:ln w="12700">
             <a:solidFill>
-              <a:srgbClr val="2D3750"/>
+              <a:srgbClr val="3B82F6"/>
             </a:solidFill>
           </a:ln>
+          <a:effectLst>
+            <a:outerShdw blurRad="190500" dist="63500" dir="5400000" rotWithShape="0">
+              <a:srgbClr val="000000">
+                <a:alpha val="40000"/>
+              </a:srgbClr>
+            </a:outerShdw>
+          </a:effectLst>
         </p:spPr>
         <p:style>
           <a:lnRef idx="1">
@@ -6704,14 +6237,15 @@
           <a:lstStyle/>
           <a:p>
             <a:pPr algn="ctr">
-              <a:defRPr sz="1050" b="1">
-                <a:solidFill>
-                  <a:srgbClr val="F8FAFC"/>
-                </a:solidFill>
-              </a:defRPr>
-            </a:pPr>
-            <a:r>
-              <a:t>PIPELINE FLOW:  Client Drag &amp; Drop  ➔  Multer Normalizer  ➔  Native Buffer Stream  ➔  UUIDv4 Registry  ➔  60-Min TTL Purge</a:t>
+              <a:defRPr sz="1100" b="1">
+                <a:solidFill>
+                  <a:srgbClr val="3B82F6"/>
+                </a:solidFill>
+                <a:latin typeface="Arial"/>
+              </a:defRPr>
+            </a:pPr>
+            <a:r>
+              <a:t>All features work directly in your browser — no downloads or installations needed!</a:t>
             </a:r>
           </a:p>
         </p:txBody>
@@ -6721,8 +6255,8 @@
   <p:clrMapOvr>
     <a:masterClrMapping/>
   </p:clrMapOvr>
-  <p:transition spd="med">
-    <p:push dir="r"/>
+  <p:transition spd="med" advTm="0">
+    <p:push dir="l"/>
   </p:transition>
 </p:sld>
 </file>
@@ -6732,9 +6266,17 @@
   <p:cSld>
     <p:bg>
       <p:bgPr>
-        <a:solidFill>
-          <a:srgbClr val="0B0D14"/>
-        </a:solidFill>
+        <a:gradFill rotWithShape="1">
+          <a:gsLst>
+            <a:gs pos="0">
+              <a:srgbClr val="0F172A"/>
+            </a:gs>
+            <a:gs pos="100000">
+              <a:srgbClr val="1E2846"/>
+            </a:gs>
+          </a:gsLst>
+          <a:lin scaled="0"/>
+        </a:gradFill>
         <a:effectLst/>
       </p:bgPr>
     </p:bg>
@@ -6753,20 +6295,25 @@
         </p:nvSpPr>
         <p:spPr>
           <a:xfrm>
-            <a:off x="731520" y="365760"/>
-            <a:ext cx="2011680" cy="320040"/>
+            <a:off x="731520" y="457200"/>
+            <a:ext cx="2286000" cy="347472"/>
           </a:xfrm>
           <a:prstGeom prst="roundRect">
             <a:avLst/>
           </a:prstGeom>
           <a:solidFill>
-            <a:srgbClr val="19261C"/>
+            <a:srgbClr val="3B82F6"/>
           </a:solidFill>
-          <a:ln w="12700">
-            <a:solidFill>
-              <a:srgbClr val="A3E635"/>
-            </a:solidFill>
+          <a:ln>
+            <a:noFill/>
           </a:ln>
+          <a:effectLst>
+            <a:outerShdw blurRad="190500" dist="63500" dir="5400000" rotWithShape="0">
+              <a:srgbClr val="000000">
+                <a:alpha val="40000"/>
+              </a:srgbClr>
+            </a:outerShdw>
+          </a:effectLst>
         </p:spPr>
         <p:style>
           <a:lnRef idx="1">
@@ -6783,19 +6330,19 @@
           </a:fontRef>
         </p:style>
         <p:txBody>
-          <a:bodyPr rtlCol="0" anchor="ctr" wrap="square"/>
+          <a:bodyPr rtlCol="0" anchor="ctr"/>
           <a:lstStyle/>
           <a:p>
             <a:pPr algn="ctr">
-              <a:defRPr sz="1000" b="1">
-                <a:solidFill>
-                  <a:srgbClr val="A3E635"/>
-                </a:solidFill>
-                <a:latin typeface="Arial"/>
-              </a:defRPr>
-            </a:pPr>
-            <a:r>
-              <a:t>OPERATIONAL LIFECYCLE</a:t>
+              <a:defRPr sz="1100" b="1">
+                <a:solidFill>
+                  <a:srgbClr val="FFFFFF"/>
+                </a:solidFill>
+                <a:latin typeface="Arial"/>
+              </a:defRPr>
+            </a:pPr>
+            <a:r>
+              <a:t>TECHNOLOGY</a:t>
             </a:r>
           </a:p>
         </p:txBody>
@@ -6808,8 +6355,8 @@
         </p:nvSpPr>
         <p:spPr>
           <a:xfrm>
-            <a:off x="731520" y="731520"/>
-            <a:ext cx="8686800" cy="640080"/>
+            <a:off x="731520" y="914400"/>
+            <a:ext cx="10698480" cy="548640"/>
           </a:xfrm>
           <a:prstGeom prst="rect">
             <a:avLst/>
@@ -6822,16 +6369,16 @@
           </a:bodyPr>
           <a:lstStyle/>
           <a:p>
-            <a:pPr>
-              <a:defRPr sz="2400" b="1">
-                <a:solidFill>
-                  <a:srgbClr val="F8FAFC"/>
-                </a:solidFill>
-                <a:latin typeface="Arial"/>
-              </a:defRPr>
-            </a:pPr>
-            <a:r>
-              <a:t>End-to-End Processing &amp; Zero-Trust Ephemeral Privacy</a:t>
+            <a:pPr algn="l">
+              <a:defRPr sz="3000" b="1">
+                <a:solidFill>
+                  <a:srgbClr val="FFFFFF"/>
+                </a:solidFill>
+                <a:latin typeface="Arial"/>
+              </a:defRPr>
+            </a:pPr>
+            <a:r>
+              <a:t>Built on MERN Stack</a:t>
             </a:r>
           </a:p>
         </p:txBody>
@@ -6844,8 +6391,8 @@
         </p:nvSpPr>
         <p:spPr>
           <a:xfrm>
-            <a:off x="10515600" y="365760"/>
-            <a:ext cx="1097280" cy="365760"/>
+            <a:off x="731520" y="1417320"/>
+            <a:ext cx="10698480" cy="365760"/>
           </a:xfrm>
           <a:prstGeom prst="rect">
             <a:avLst/>
@@ -6853,47 +6400,91 @@
           <a:noFill/>
         </p:spPr>
         <p:txBody>
-          <a:bodyPr wrap="none">
+          <a:bodyPr wrap="square">
             <a:spAutoFit/>
           </a:bodyPr>
           <a:lstStyle/>
           <a:p>
-            <a:pPr algn="r">
-              <a:defRPr sz="1200" b="1">
-                <a:solidFill>
-                  <a:srgbClr val="A3E635"/>
-                </a:solidFill>
-                <a:latin typeface="Arial"/>
-              </a:defRPr>
-            </a:pPr>
-            <a:r>
-              <a:t>05 / 09</a:t>
-            </a:r>
-          </a:p>
-        </p:txBody>
-      </p:sp>
-      <p:sp>
-        <p:nvSpPr>
-          <p:cNvPr id="5" name="Rounded Rectangle 4"/>
+            <a:pPr algn="l">
+              <a:defRPr sz="1300" b="0">
+                <a:solidFill>
+                  <a:srgbClr val="CBD5E1"/>
+                </a:solidFill>
+                <a:latin typeface="Arial"/>
+              </a:defRPr>
+            </a:pPr>
+            <a:r>
+              <a:t>A powerful full-stack JavaScript framework used by Netflix, Instagram &amp; Uber</a:t>
+            </a:r>
+          </a:p>
+        </p:txBody>
+      </p:sp>
+      <p:pic>
+        <p:nvPicPr>
+          <p:cNvPr id="5" name="Picture 4" descr="mern_stack.png"/>
+          <p:cNvPicPr>
+            <a:picLocks noChangeAspect="1"/>
+          </p:cNvPicPr>
+          <p:nvPr/>
+        </p:nvPicPr>
+        <p:blipFill>
+          <a:blip r:embed="rId2"/>
+          <a:stretch>
+            <a:fillRect/>
+          </a:stretch>
+        </p:blipFill>
+        <p:spPr>
+          <a:xfrm>
+            <a:off x="731520" y="1920240"/>
+            <a:ext cx="6858000" cy="3474720"/>
+          </a:xfrm>
+          <a:prstGeom prst="rect">
+            <a:avLst/>
+          </a:prstGeom>
+          <a:effectLst>
+            <a:outerShdw blurRad="190500" dist="63500" dir="5400000" rotWithShape="0">
+              <a:srgbClr val="000000">
+                <a:alpha val="40000"/>
+              </a:srgbClr>
+            </a:outerShdw>
+          </a:effectLst>
+        </p:spPr>
+      </p:pic>
+      <p:sp>
+        <p:nvSpPr>
+          <p:cNvPr id="6" name="Rounded Rectangle 5"/>
           <p:cNvSpPr/>
           <p:nvPr/>
         </p:nvSpPr>
         <p:spPr>
           <a:xfrm>
-            <a:off x="731520" y="1645920"/>
-            <a:ext cx="10698480" cy="868680"/>
+            <a:off x="7863840" y="1920240"/>
+            <a:ext cx="3657600" cy="2743200"/>
           </a:xfrm>
           <a:prstGeom prst="roundRect">
             <a:avLst/>
           </a:prstGeom>
           <a:solidFill>
-            <a:srgbClr val="141826"/>
+            <a:srgbClr val="1E293B"/>
           </a:solidFill>
-          <a:ln>
+          <a:ln w="12700">
             <a:solidFill>
-              <a:srgbClr val="2D3750"/>
+              <a:srgbClr val="334155"/>
             </a:solidFill>
           </a:ln>
+          <a:effectLst>
+            <a:outerShdw blurRad="190500" dist="63500" dir="5400000" rotWithShape="0">
+              <a:srgbClr val="000000">
+                <a:alpha val="40000"/>
+              </a:srgbClr>
+            </a:outerShdw>
+          </a:effectLst>
+          <a:sp3d extrusionH="25400">
+            <a:bevelT w="63500" h="25400" prst="relaxedInset"/>
+            <a:contourClr>
+              <a:srgbClr val="3B82F6"/>
+            </a:contourClr>
+          </a:sp3d>
         </p:spPr>
         <p:style>
           <a:lnRef idx="1">
@@ -6910,74 +6501,125 @@
           </a:fontRef>
         </p:style>
         <p:txBody>
-          <a:bodyPr rtlCol="0" anchor="ctr" wrap="square"/>
+          <a:bodyPr rtlCol="0" anchor="ctr" wrap="square" lIns="274320" rIns="228600" tIns="182880" bIns="182880"/>
           <a:lstStyle/>
           <a:p>
             <a:pPr algn="ctr">
-              <a:defRPr sz="1200" b="1">
-                <a:solidFill>
-                  <a:srgbClr val="A3E635"/>
-                </a:solidFill>
-              </a:defRPr>
-            </a:pPr>
-            <a:r>
-              <a:t>Step 01: Client-Side Intake &amp; Verification</a:t>
+              <a:spcAft>
+                <a:spcPts val="800"/>
+              </a:spcAft>
+              <a:defRPr sz="1600" b="1">
+                <a:solidFill>
+                  <a:srgbClr val="8B5CF6"/>
+                </a:solidFill>
+                <a:latin typeface="Arial"/>
+              </a:defRPr>
+            </a:pPr>
+            <a:r>
+              <a:t>Extra Power Tools:</a:t>
             </a:r>
           </a:p>
           <a:p>
             <a:pPr>
               <a:spcBef>
-                <a:spcPts val="200"/>
+                <a:spcPts val="500"/>
               </a:spcBef>
-              <a:defRPr sz="1000">
-                <a:solidFill>
-                  <a:srgbClr val="94A3B8"/>
-                </a:solidFill>
-              </a:defRPr>
-            </a:pPr>
-            <a:r>
-              <a:t>Drag-and-drop workspace validates MIME magic numbers and file extensions (JPG, PNG, WebP, PDF, DOCX) in the browser before network transmission.</a:t>
+              <a:defRPr sz="1200">
+                <a:solidFill>
+                  <a:srgbClr val="FFFFFF"/>
+                </a:solidFill>
+                <a:latin typeface="Arial"/>
+              </a:defRPr>
+            </a:pPr>
+            <a:r>
+              <a:t>• Sharp — C++ image engine (5x faster)</a:t>
             </a:r>
           </a:p>
           <a:p>
             <a:pPr>
               <a:spcBef>
-                <a:spcPts val="200"/>
+                <a:spcPts val="500"/>
               </a:spcBef>
-              <a:defRPr sz="1000">
-                <a:solidFill>
-                  <a:srgbClr val="94A3B8"/>
-                </a:solidFill>
-              </a:defRPr>
-            </a:pPr>
-            <a:r>
-              <a:t>Prevents malformed payloads and malicious binary uploads at the edge.</a:t>
-            </a:r>
-          </a:p>
-        </p:txBody>
-      </p:sp>
-      <p:sp>
-        <p:nvSpPr>
-          <p:cNvPr id="6" name="Rounded Rectangle 5"/>
+              <a:defRPr sz="1200">
+                <a:solidFill>
+                  <a:srgbClr val="FFFFFF"/>
+                </a:solidFill>
+                <a:latin typeface="Arial"/>
+              </a:defRPr>
+            </a:pPr>
+            <a:r>
+              <a:t>• PDF-Lib — vector PDF manipulation</a:t>
+            </a:r>
+          </a:p>
+          <a:p>
+            <a:pPr>
+              <a:spcBef>
+                <a:spcPts val="500"/>
+              </a:spcBef>
+              <a:defRPr sz="1200">
+                <a:solidFill>
+                  <a:srgbClr val="FFFFFF"/>
+                </a:solidFill>
+                <a:latin typeface="Arial"/>
+              </a:defRPr>
+            </a:pPr>
+            <a:r>
+              <a:t>• Tesseract.js — AI text recognition</a:t>
+            </a:r>
+          </a:p>
+          <a:p>
+            <a:pPr>
+              <a:spcBef>
+                <a:spcPts val="500"/>
+              </a:spcBef>
+              <a:defRPr sz="1200">
+                <a:solidFill>
+                  <a:srgbClr val="FFFFFF"/>
+                </a:solidFill>
+                <a:latin typeface="Arial"/>
+              </a:defRPr>
+            </a:pPr>
+            <a:r>
+              <a:t>• Mammoth — Word to PDF converter</a:t>
+            </a:r>
+          </a:p>
+        </p:txBody>
+      </p:sp>
+      <p:sp>
+        <p:nvSpPr>
+          <p:cNvPr id="7" name="Rounded Rectangle 6"/>
           <p:cNvSpPr/>
           <p:nvPr/>
         </p:nvSpPr>
         <p:spPr>
           <a:xfrm>
-            <a:off x="731520" y="2679192"/>
-            <a:ext cx="10698480" cy="868680"/>
+            <a:off x="7863840" y="4846320"/>
+            <a:ext cx="3657600" cy="1371600"/>
           </a:xfrm>
           <a:prstGeom prst="roundRect">
             <a:avLst/>
           </a:prstGeom>
           <a:solidFill>
-            <a:srgbClr val="141826"/>
+            <a:srgbClr val="1E293B"/>
           </a:solidFill>
-          <a:ln>
+          <a:ln w="12700">
             <a:solidFill>
-              <a:srgbClr val="2D3750"/>
+              <a:srgbClr val="334155"/>
             </a:solidFill>
           </a:ln>
+          <a:effectLst>
+            <a:outerShdw blurRad="190500" dist="63500" dir="5400000" rotWithShape="0">
+              <a:srgbClr val="000000">
+                <a:alpha val="40000"/>
+              </a:srgbClr>
+            </a:outerShdw>
+          </a:effectLst>
+          <a:sp3d extrusionH="25400">
+            <a:bevelT w="63500" h="25400" prst="relaxedInset"/>
+            <a:contourClr>
+              <a:srgbClr val="3B82F6"/>
+            </a:contourClr>
+          </a:sp3d>
         </p:spPr>
         <p:style>
           <a:lnRef idx="1">
@@ -6994,74 +6636,103 @@
           </a:fontRef>
         </p:style>
         <p:txBody>
-          <a:bodyPr rtlCol="0" anchor="ctr" wrap="square"/>
+          <a:bodyPr rtlCol="0" anchor="ctr" wrap="square" lIns="274320" rIns="228600" tIns="182880" bIns="182880"/>
           <a:lstStyle/>
           <a:p>
             <a:pPr algn="ctr">
-              <a:defRPr sz="1200" b="1">
-                <a:solidFill>
-                  <a:srgbClr val="38BDF8"/>
-                </a:solidFill>
-              </a:defRPr>
-            </a:pPr>
-            <a:r>
-              <a:t>Step 02: Normalized Stream Processing</a:t>
+              <a:spcAft>
+                <a:spcPts val="800"/>
+              </a:spcAft>
+              <a:defRPr sz="1600" b="1">
+                <a:solidFill>
+                  <a:srgbClr val="22C55E"/>
+                </a:solidFill>
+                <a:latin typeface="Arial"/>
+              </a:defRPr>
+            </a:pPr>
+            <a:r>
+              <a:t>Security Built-In:</a:t>
             </a:r>
           </a:p>
           <a:p>
             <a:pPr>
               <a:spcBef>
-                <a:spcPts val="200"/>
+                <a:spcPts val="500"/>
               </a:spcBef>
-              <a:defRPr sz="1000">
-                <a:solidFill>
-                  <a:srgbClr val="94A3B8"/>
-                </a:solidFill>
-              </a:defRPr>
-            </a:pPr>
-            <a:r>
-              <a:t>Express gateway normalizes both single-file ('file') and multi-file ('files') form payloads seamlessly.</a:t>
+              <a:defRPr sz="1200">
+                <a:solidFill>
+                  <a:srgbClr val="FFFFFF"/>
+                </a:solidFill>
+                <a:latin typeface="Arial"/>
+              </a:defRPr>
+            </a:pPr>
+            <a:r>
+              <a:t>• Helmet headers, CORS protection</a:t>
             </a:r>
           </a:p>
           <a:p>
             <a:pPr>
               <a:spcBef>
-                <a:spcPts val="200"/>
+                <a:spcPts val="500"/>
               </a:spcBef>
-              <a:defRPr sz="1000">
-                <a:solidFill>
-                  <a:srgbClr val="94A3B8"/>
-                </a:solidFill>
-              </a:defRPr>
-            </a:pPr>
-            <a:r>
-              <a:t>Sanitizes filenames to prevent path traversal directory escaping vulnerabilities.</a:t>
-            </a:r>
-          </a:p>
-        </p:txBody>
-      </p:sp>
-      <p:sp>
-        <p:nvSpPr>
-          <p:cNvPr id="7" name="Rounded Rectangle 6"/>
+              <a:defRPr sz="1200">
+                <a:solidFill>
+                  <a:srgbClr val="FFFFFF"/>
+                </a:solidFill>
+                <a:latin typeface="Arial"/>
+              </a:defRPr>
+            </a:pPr>
+            <a:r>
+              <a:t>• Rate limiting: 200 requests/15min</a:t>
+            </a:r>
+          </a:p>
+          <a:p>
+            <a:pPr>
+              <a:spcBef>
+                <a:spcPts val="500"/>
+              </a:spcBef>
+              <a:defRPr sz="1200">
+                <a:solidFill>
+                  <a:srgbClr val="FFFFFF"/>
+                </a:solidFill>
+                <a:latin typeface="Arial"/>
+              </a:defRPr>
+            </a:pPr>
+            <a:r>
+              <a:t>• Strict file type validation</a:t>
+            </a:r>
+          </a:p>
+        </p:txBody>
+      </p:sp>
+      <p:sp>
+        <p:nvSpPr>
+          <p:cNvPr id="8" name="Rounded Rectangle 7"/>
           <p:cNvSpPr/>
           <p:nvPr/>
         </p:nvSpPr>
         <p:spPr>
           <a:xfrm>
-            <a:off x="731520" y="3712464"/>
-            <a:ext cx="10698480" cy="868680"/>
+            <a:off x="731520" y="6035040"/>
+            <a:ext cx="10698480" cy="457200"/>
           </a:xfrm>
           <a:prstGeom prst="roundRect">
             <a:avLst/>
           </a:prstGeom>
           <a:solidFill>
-            <a:srgbClr val="141826"/>
+            <a:srgbClr val="141E32"/>
           </a:solidFill>
-          <a:ln>
+          <a:ln w="12700">
             <a:solidFill>
-              <a:srgbClr val="2D3750"/>
+              <a:srgbClr val="3B82F6"/>
             </a:solidFill>
           </a:ln>
+          <a:effectLst>
+            <a:outerShdw blurRad="190500" dist="63500" dir="5400000" rotWithShape="0">
+              <a:srgbClr val="000000">
+                <a:alpha val="40000"/>
+              </a:srgbClr>
+            </a:outerShdw>
+          </a:effectLst>
         </p:spPr>
         <p:style>
           <a:lnRef idx="1">
@@ -7078,186 +6749,19 @@
           </a:fontRef>
         </p:style>
         <p:txBody>
-          <a:bodyPr rtlCol="0" anchor="ctr" wrap="square"/>
+          <a:bodyPr rtlCol="0" anchor="ctr"/>
           <a:lstStyle/>
           <a:p>
             <a:pPr algn="ctr">
-              <a:defRPr sz="1200" b="1">
-                <a:solidFill>
-                  <a:srgbClr val="A855F7"/>
-                </a:solidFill>
-              </a:defRPr>
-            </a:pPr>
-            <a:r>
-              <a:t>Step 03: Direct Buffer Transformations</a:t>
-            </a:r>
-          </a:p>
-          <a:p>
-            <a:pPr>
-              <a:spcBef>
-                <a:spcPts val="200"/>
-              </a:spcBef>
-              <a:defRPr sz="1000">
-                <a:solidFill>
-                  <a:srgbClr val="94A3B8"/>
-                </a:solidFill>
-              </a:defRPr>
-            </a:pPr>
-            <a:r>
-              <a:t>Streams files directly into native memory buffers via libvips or PDF-Lib without executing external OS shell commands.</a:t>
-            </a:r>
-          </a:p>
-          <a:p>
-            <a:pPr>
-              <a:spcBef>
-                <a:spcPts val="200"/>
-              </a:spcBef>
-              <a:defRPr sz="1000">
-                <a:solidFill>
-                  <a:srgbClr val="94A3B8"/>
-                </a:solidFill>
-              </a:defRPr>
-            </a:pPr>
-            <a:r>
-              <a:t>Complete immunity against shell injection attacks.</a:t>
-            </a:r>
-          </a:p>
-        </p:txBody>
-      </p:sp>
-      <p:sp>
-        <p:nvSpPr>
-          <p:cNvPr id="8" name="Rounded Rectangle 7"/>
-          <p:cNvSpPr/>
-          <p:nvPr/>
-        </p:nvSpPr>
-        <p:spPr>
-          <a:xfrm>
-            <a:off x="731520" y="4745736"/>
-            <a:ext cx="10698480" cy="868680"/>
-          </a:xfrm>
-          <a:prstGeom prst="roundRect">
-            <a:avLst/>
-          </a:prstGeom>
-          <a:solidFill>
-            <a:srgbClr val="141826"/>
-          </a:solidFill>
-          <a:ln>
-            <a:solidFill>
-              <a:srgbClr val="2D3750"/>
-            </a:solidFill>
-          </a:ln>
-        </p:spPr>
-        <p:style>
-          <a:lnRef idx="1">
-            <a:schemeClr val="accent1"/>
-          </a:lnRef>
-          <a:fillRef idx="3">
-            <a:schemeClr val="accent1"/>
-          </a:fillRef>
-          <a:effectRef idx="2">
-            <a:schemeClr val="accent1"/>
-          </a:effectRef>
-          <a:fontRef idx="minor">
-            <a:schemeClr val="lt1"/>
-          </a:fontRef>
-        </p:style>
-        <p:txBody>
-          <a:bodyPr rtlCol="0" anchor="ctr" wrap="square"/>
-          <a:lstStyle/>
-          <a:p>
-            <a:pPr algn="ctr">
-              <a:defRPr sz="1200" b="1">
-                <a:solidFill>
-                  <a:srgbClr val="6366F1"/>
-                </a:solidFill>
-              </a:defRPr>
-            </a:pPr>
-            <a:r>
-              <a:t>Step 04: UUIDv4 Tokenization &amp; Ephemeral Purge</a:t>
-            </a:r>
-          </a:p>
-          <a:p>
-            <a:pPr>
-              <a:spcBef>
-                <a:spcPts val="200"/>
-              </a:spcBef>
-              <a:defRPr sz="1000">
-                <a:solidFill>
-                  <a:srgbClr val="94A3B8"/>
-                </a:solidFill>
-              </a:defRPr>
-            </a:pPr>
-            <a:r>
-              <a:t>Output file is registered with an unguessable UUIDv4 token stored in atomic disk registry.</a:t>
-            </a:r>
-          </a:p>
-          <a:p>
-            <a:pPr>
-              <a:spcBef>
-                <a:spcPts val="200"/>
-              </a:spcBef>
-              <a:defRPr sz="1000">
-                <a:solidFill>
-                  <a:srgbClr val="94A3B8"/>
-                </a:solidFill>
-              </a:defRPr>
-            </a:pPr>
-            <a:r>
-              <a:t>A background daemon automatically destroys processed files after 60 minutes, with an immediate 1-click self-destruction option.</a:t>
-            </a:r>
-          </a:p>
-        </p:txBody>
-      </p:sp>
-      <p:sp>
-        <p:nvSpPr>
-          <p:cNvPr id="9" name="Rounded Rectangle 8"/>
-          <p:cNvSpPr/>
-          <p:nvPr/>
-        </p:nvSpPr>
-        <p:spPr>
-          <a:xfrm>
-            <a:off x="731520" y="5669280"/>
-            <a:ext cx="10698480" cy="502920"/>
-          </a:xfrm>
-          <a:prstGeom prst="roundRect">
-            <a:avLst/>
-          </a:prstGeom>
-          <a:solidFill>
-            <a:srgbClr val="1E1428"/>
-          </a:solidFill>
-          <a:ln>
-            <a:solidFill>
-              <a:srgbClr val="A855F7"/>
-            </a:solidFill>
-          </a:ln>
-        </p:spPr>
-        <p:style>
-          <a:lnRef idx="1">
-            <a:schemeClr val="accent1"/>
-          </a:lnRef>
-          <a:fillRef idx="3">
-            <a:schemeClr val="accent1"/>
-          </a:fillRef>
-          <a:effectRef idx="2">
-            <a:schemeClr val="accent1"/>
-          </a:effectRef>
-          <a:fontRef idx="minor">
-            <a:schemeClr val="lt1"/>
-          </a:fontRef>
-        </p:style>
-        <p:txBody>
-          <a:bodyPr rtlCol="0" anchor="ctr"/>
-          <a:lstStyle/>
-          <a:p>
-            <a:pPr algn="ctr">
-              <a:defRPr sz="1050" b="1">
-                <a:solidFill>
-                  <a:srgbClr val="F8FAFC"/>
-                </a:solidFill>
-              </a:defRPr>
-            </a:pPr>
-            <a:r>
-              <a:t>PRIVACY GUARANTEE: User documents are NEVER permanently stored, never shared, and never used to train AI models.</a:t>
+              <a:defRPr sz="1100" b="1">
+                <a:solidFill>
+                  <a:srgbClr val="3B82F6"/>
+                </a:solidFill>
+                <a:latin typeface="Arial"/>
+              </a:defRPr>
+            </a:pPr>
+            <a:r>
+              <a:t>MERN = MongoDB + Express.js + React.js + Node.js</a:t>
             </a:r>
           </a:p>
         </p:txBody>
@@ -7267,8 +6771,8 @@
   <p:clrMapOvr>
     <a:masterClrMapping/>
   </p:clrMapOvr>
-  <p:transition spd="med">
-    <p:push dir="r"/>
+  <p:transition spd="med" advTm="0">
+    <p:wipe dir="d"/>
   </p:transition>
 </p:sld>
 </file>
@@ -7278,9 +6782,17 @@
   <p:cSld>
     <p:bg>
       <p:bgPr>
-        <a:solidFill>
-          <a:srgbClr val="0B0D14"/>
-        </a:solidFill>
+        <a:gradFill rotWithShape="1">
+          <a:gsLst>
+            <a:gs pos="0">
+              <a:srgbClr val="0F172A"/>
+            </a:gs>
+            <a:gs pos="100000">
+              <a:srgbClr val="1E2846"/>
+            </a:gs>
+          </a:gsLst>
+          <a:lin scaled="0"/>
+        </a:gradFill>
         <a:effectLst/>
       </p:bgPr>
     </p:bg>
@@ -7299,20 +6811,25 @@
         </p:nvSpPr>
         <p:spPr>
           <a:xfrm>
-            <a:off x="731520" y="365760"/>
-            <a:ext cx="2011680" cy="320040"/>
+            <a:off x="731520" y="457200"/>
+            <a:ext cx="2286000" cy="347472"/>
           </a:xfrm>
           <a:prstGeom prst="roundRect">
             <a:avLst/>
           </a:prstGeom>
           <a:solidFill>
-            <a:srgbClr val="19261C"/>
+            <a:srgbClr val="3B82F6"/>
           </a:solidFill>
-          <a:ln w="12700">
-            <a:solidFill>
-              <a:srgbClr val="A3E635"/>
-            </a:solidFill>
+          <a:ln>
+            <a:noFill/>
           </a:ln>
+          <a:effectLst>
+            <a:outerShdw blurRad="190500" dist="63500" dir="5400000" rotWithShape="0">
+              <a:srgbClr val="000000">
+                <a:alpha val="40000"/>
+              </a:srgbClr>
+            </a:outerShdw>
+          </a:effectLst>
         </p:spPr>
         <p:style>
           <a:lnRef idx="1">
@@ -7329,19 +6846,19 @@
           </a:fontRef>
         </p:style>
         <p:txBody>
-          <a:bodyPr rtlCol="0" anchor="ctr" wrap="square"/>
+          <a:bodyPr rtlCol="0" anchor="ctr"/>
           <a:lstStyle/>
           <a:p>
             <a:pPr algn="ctr">
-              <a:defRPr sz="1000" b="1">
-                <a:solidFill>
-                  <a:srgbClr val="A3E635"/>
-                </a:solidFill>
-                <a:latin typeface="Arial"/>
-              </a:defRPr>
-            </a:pPr>
-            <a:r>
-              <a:t>CAPABILITIES MATRIX</a:t>
+              <a:defRPr sz="1100" b="1">
+                <a:solidFill>
+                  <a:srgbClr val="FFFFFF"/>
+                </a:solidFill>
+                <a:latin typeface="Arial"/>
+              </a:defRPr>
+            </a:pPr>
+            <a:r>
+              <a:t>OUR TOOLS</a:t>
             </a:r>
           </a:p>
         </p:txBody>
@@ -7354,8 +6871,8 @@
         </p:nvSpPr>
         <p:spPr>
           <a:xfrm>
-            <a:off x="731520" y="731520"/>
-            <a:ext cx="8686800" cy="640080"/>
+            <a:off x="731520" y="914400"/>
+            <a:ext cx="10698480" cy="548640"/>
           </a:xfrm>
           <a:prstGeom prst="rect">
             <a:avLst/>
@@ -7368,56 +6885,51 @@
           </a:bodyPr>
           <a:lstStyle/>
           <a:p>
-            <a:pPr>
-              <a:defRPr sz="2400" b="1">
-                <a:solidFill>
-                  <a:srgbClr val="F8FAFC"/>
-                </a:solidFill>
-                <a:latin typeface="Arial"/>
-              </a:defRPr>
-            </a:pPr>
-            <a:r>
-              <a:t>Core Feature Suites (88 Active Tools Inventory)</a:t>
-            </a:r>
-          </a:p>
-        </p:txBody>
-      </p:sp>
-      <p:sp>
-        <p:nvSpPr>
-          <p:cNvPr id="4" name="TextBox 3"/>
-          <p:cNvSpPr txBox="1"/>
+            <a:pPr algn="l">
+              <a:defRPr sz="3000" b="1">
+                <a:solidFill>
+                  <a:srgbClr val="FFFFFF"/>
+                </a:solidFill>
+                <a:latin typeface="Arial"/>
+              </a:defRPr>
+            </a:pPr>
+            <a:r>
+              <a:t>114+ Tools — Everything You Need</a:t>
+            </a:r>
+          </a:p>
+        </p:txBody>
+      </p:sp>
+      <p:pic>
+        <p:nvPicPr>
+          <p:cNvPr id="4" name="Picture 3" descr="tools_grid.png"/>
+          <p:cNvPicPr>
+            <a:picLocks noChangeAspect="1"/>
+          </p:cNvPicPr>
           <p:nvPr/>
-        </p:nvSpPr>
+        </p:nvPicPr>
+        <p:blipFill>
+          <a:blip r:embed="rId2"/>
+          <a:stretch>
+            <a:fillRect/>
+          </a:stretch>
+        </p:blipFill>
         <p:spPr>
           <a:xfrm>
-            <a:off x="10515600" y="365760"/>
-            <a:ext cx="1097280" cy="365760"/>
+            <a:off x="731520" y="1737360"/>
+            <a:ext cx="10698480" cy="4114800"/>
           </a:xfrm>
           <a:prstGeom prst="rect">
             <a:avLst/>
           </a:prstGeom>
-          <a:noFill/>
+          <a:effectLst>
+            <a:outerShdw blurRad="190500" dist="63500" dir="5400000" rotWithShape="0">
+              <a:srgbClr val="000000">
+                <a:alpha val="40000"/>
+              </a:srgbClr>
+            </a:outerShdw>
+          </a:effectLst>
         </p:spPr>
-        <p:txBody>
-          <a:bodyPr wrap="none">
-            <a:spAutoFit/>
-          </a:bodyPr>
-          <a:lstStyle/>
-          <a:p>
-            <a:pPr algn="r">
-              <a:defRPr sz="1200" b="1">
-                <a:solidFill>
-                  <a:srgbClr val="A3E635"/>
-                </a:solidFill>
-                <a:latin typeface="Arial"/>
-              </a:defRPr>
-            </a:pPr>
-            <a:r>
-              <a:t>06 / 09</a:t>
-            </a:r>
-          </a:p>
-        </p:txBody>
-      </p:sp>
+      </p:pic>
       <p:sp>
         <p:nvSpPr>
           <p:cNvPr id="5" name="Rounded Rectangle 4"/>
@@ -7426,20 +6938,27 @@
         </p:nvSpPr>
         <p:spPr>
           <a:xfrm>
-            <a:off x="731520" y="1645920"/>
-            <a:ext cx="3328416" cy="3840480"/>
+            <a:off x="731520" y="6035040"/>
+            <a:ext cx="10698480" cy="457200"/>
           </a:xfrm>
           <a:prstGeom prst="roundRect">
             <a:avLst/>
           </a:prstGeom>
           <a:solidFill>
-            <a:srgbClr val="141826"/>
+            <a:srgbClr val="141E32"/>
           </a:solidFill>
           <a:ln w="12700">
             <a:solidFill>
-              <a:srgbClr val="2D3750"/>
+              <a:srgbClr val="3B82F6"/>
             </a:solidFill>
           </a:ln>
+          <a:effectLst>
+            <a:outerShdw blurRad="190500" dist="63500" dir="5400000" rotWithShape="0">
+              <a:srgbClr val="000000">
+                <a:alpha val="40000"/>
+              </a:srgbClr>
+            </a:outerShdw>
+          </a:effectLst>
         </p:spPr>
         <p:style>
           <a:lnRef idx="1">
@@ -7456,471 +6975,19 @@
           </a:fontRef>
         </p:style>
         <p:txBody>
-          <a:bodyPr rtlCol="0" anchor="ctr" wrap="square" lIns="228600" rIns="228600" tIns="182880" bIns="182880"/>
+          <a:bodyPr rtlCol="0" anchor="ctr"/>
           <a:lstStyle/>
           <a:p>
             <a:pPr algn="ctr">
-              <a:defRPr sz="1300" b="1">
-                <a:solidFill>
-                  <a:srgbClr val="A3E635"/>
-                </a:solidFill>
-                <a:latin typeface="Arial"/>
-              </a:defRPr>
-            </a:pPr>
-            <a:r>
-              <a:t>Image Suite (62 Tools)</a:t>
-            </a:r>
-          </a:p>
-          <a:p>
-            <a:pPr>
-              <a:spcBef>
-                <a:spcPts val="400"/>
-              </a:spcBef>
-              <a:defRPr sz="1050">
-                <a:solidFill>
-                  <a:srgbClr val="F8FAFC"/>
-                </a:solidFill>
-                <a:latin typeface="Arial"/>
-              </a:defRPr>
-            </a:pPr>
-            <a:r>
-              <a:t>✓ Universal Format Conversion (WebP, JPG, PNG, AVIF, HEIC, SVG)</a:t>
-            </a:r>
-          </a:p>
-          <a:p>
-            <a:pPr>
-              <a:spcBef>
-                <a:spcPts val="400"/>
-              </a:spcBef>
-              <a:defRPr sz="1050">
-                <a:solidFill>
-                  <a:srgbClr val="F8FAFC"/>
-                </a:solidFill>
-                <a:latin typeface="Arial"/>
-              </a:defRPr>
-            </a:pPr>
-            <a:r>
-              <a:t>✓ Bulk Image Compression with automatic ZIP bundling</a:t>
-            </a:r>
-          </a:p>
-          <a:p>
-            <a:pPr>
-              <a:spcBef>
-                <a:spcPts val="400"/>
-              </a:spcBef>
-              <a:defRPr sz="1050">
-                <a:solidFill>
-                  <a:srgbClr val="F8FAFC"/>
-                </a:solidFill>
-                <a:latin typeface="Arial"/>
-              </a:defRPr>
-            </a:pPr>
-            <a:r>
-              <a:t>✓ Official Exam &amp; Passport Resize (35x45mm, 2x2 inch, SSC/UPSC)</a:t>
-            </a:r>
-          </a:p>
-          <a:p>
-            <a:pPr>
-              <a:spcBef>
-                <a:spcPts val="400"/>
-              </a:spcBef>
-              <a:defRPr sz="1050">
-                <a:solidFill>
-                  <a:srgbClr val="F8FAFC"/>
-                </a:solidFill>
-                <a:latin typeface="Arial"/>
-              </a:defRPr>
-            </a:pPr>
-            <a:r>
-              <a:t>✓ AI Portrait Background Removal &amp; Edge Masking</a:t>
-            </a:r>
-          </a:p>
-          <a:p>
-            <a:pPr>
-              <a:spcBef>
-                <a:spcPts val="400"/>
-              </a:spcBef>
-              <a:defRPr sz="1050">
-                <a:solidFill>
-                  <a:srgbClr val="F8FAFC"/>
-                </a:solidFill>
-                <a:latin typeface="Arial"/>
-              </a:defRPr>
-            </a:pPr>
-            <a:r>
-              <a:t>✓ Social Media Crop &amp; 9-Grid Splitters (YouTube, Instagram, X)</a:t>
-            </a:r>
-          </a:p>
-          <a:p>
-            <a:pPr>
-              <a:spcBef>
-                <a:spcPts val="400"/>
-              </a:spcBef>
-              <a:defRPr sz="1050">
-                <a:solidFill>
-                  <a:srgbClr val="F8FAFC"/>
-                </a:solidFill>
-                <a:latin typeface="Arial"/>
-              </a:defRPr>
-            </a:pPr>
-            <a:r>
-              <a:t>✓ EXIF Metadata Extraction &amp; Privacy Stripping</a:t>
-            </a:r>
-          </a:p>
-        </p:txBody>
-      </p:sp>
-      <p:sp>
-        <p:nvSpPr>
-          <p:cNvPr id="6" name="Rounded Rectangle 5"/>
-          <p:cNvSpPr/>
-          <p:nvPr/>
-        </p:nvSpPr>
-        <p:spPr>
-          <a:xfrm>
-            <a:off x="4425696" y="1645920"/>
-            <a:ext cx="3328416" cy="3840480"/>
-          </a:xfrm>
-          <a:prstGeom prst="roundRect">
-            <a:avLst/>
-          </a:prstGeom>
-          <a:solidFill>
-            <a:srgbClr val="141826"/>
-          </a:solidFill>
-          <a:ln w="12700">
-            <a:solidFill>
-              <a:srgbClr val="2D3750"/>
-            </a:solidFill>
-          </a:ln>
-        </p:spPr>
-        <p:style>
-          <a:lnRef idx="1">
-            <a:schemeClr val="accent1"/>
-          </a:lnRef>
-          <a:fillRef idx="3">
-            <a:schemeClr val="accent1"/>
-          </a:fillRef>
-          <a:effectRef idx="2">
-            <a:schemeClr val="accent1"/>
-          </a:effectRef>
-          <a:fontRef idx="minor">
-            <a:schemeClr val="lt1"/>
-          </a:fontRef>
-        </p:style>
-        <p:txBody>
-          <a:bodyPr rtlCol="0" anchor="ctr" wrap="square" lIns="228600" rIns="228600" tIns="182880" bIns="182880"/>
-          <a:lstStyle/>
-          <a:p>
-            <a:pPr algn="ctr">
-              <a:defRPr sz="1300" b="1">
-                <a:solidFill>
-                  <a:srgbClr val="38BDF8"/>
-                </a:solidFill>
-                <a:latin typeface="Arial"/>
-              </a:defRPr>
-            </a:pPr>
-            <a:r>
-              <a:t>PDF Engineering (19 Tools)</a:t>
-            </a:r>
-          </a:p>
-          <a:p>
-            <a:pPr>
-              <a:spcBef>
-                <a:spcPts val="400"/>
-              </a:spcBef>
-              <a:defRPr sz="1050">
-                <a:solidFill>
-                  <a:srgbClr val="F8FAFC"/>
-                </a:solidFill>
-                <a:latin typeface="Arial"/>
-              </a:defRPr>
-            </a:pPr>
-            <a:r>
-              <a:t>✓ High-Performance Vector Merge, Split &amp; Range Extract</a:t>
-            </a:r>
-          </a:p>
-          <a:p>
-            <a:pPr>
-              <a:spcBef>
-                <a:spcPts val="400"/>
-              </a:spcBef>
-              <a:defRPr sz="1050">
-                <a:solidFill>
-                  <a:srgbClr val="F8FAFC"/>
-                </a:solidFill>
-                <a:latin typeface="Arial"/>
-              </a:defRPr>
-            </a:pPr>
-            <a:r>
-              <a:t>✓ Selective Page Reordering &amp; Visual Page Deletion</a:t>
-            </a:r>
-          </a:p>
-          <a:p>
-            <a:pPr>
-              <a:spcBef>
-                <a:spcPts val="400"/>
-              </a:spcBef>
-              <a:defRPr sz="1050">
-                <a:solidFill>
-                  <a:srgbClr val="F8FAFC"/>
-                </a:solidFill>
-                <a:latin typeface="Arial"/>
-              </a:defRPr>
-            </a:pPr>
-            <a:r>
-              <a:t>✓ 128-Bit AES Password Encryption, Decryption &amp; Permissions</a:t>
-            </a:r>
-          </a:p>
-          <a:p>
-            <a:pPr>
-              <a:spcBef>
-                <a:spcPts val="400"/>
-              </a:spcBef>
-              <a:defRPr sz="1050">
-                <a:solidFill>
-                  <a:srgbClr val="F8FAFC"/>
-                </a:solidFill>
-                <a:latin typeface="Arial"/>
-              </a:defRPr>
-            </a:pPr>
-            <a:r>
-              <a:t>✓ Bi-Directional Word-to-PDF &amp; PDF-to-DOCX Parsing</a:t>
-            </a:r>
-          </a:p>
-          <a:p>
-            <a:pPr>
-              <a:spcBef>
-                <a:spcPts val="400"/>
-              </a:spcBef>
-              <a:defRPr sz="1050">
-                <a:solidFill>
-                  <a:srgbClr val="F8FAFC"/>
-                </a:solidFill>
-                <a:latin typeface="Arial"/>
-              </a:defRPr>
-            </a:pPr>
-            <a:r>
-              <a:t>✓ Vector Redaction &amp; Cryptographic Watermarking</a:t>
-            </a:r>
-          </a:p>
-          <a:p>
-            <a:pPr>
-              <a:spcBef>
-                <a:spcPts val="400"/>
-              </a:spcBef>
-              <a:defRPr sz="1050">
-                <a:solidFill>
-                  <a:srgbClr val="F8FAFC"/>
-                </a:solidFill>
-                <a:latin typeface="Arial"/>
-              </a:defRPr>
-            </a:pPr>
-            <a:r>
-              <a:t>✓ PDF Page Numbering &amp; Multi-Page Rotation</a:t>
-            </a:r>
-          </a:p>
-        </p:txBody>
-      </p:sp>
-      <p:sp>
-        <p:nvSpPr>
-          <p:cNvPr id="7" name="Rounded Rectangle 6"/>
-          <p:cNvSpPr/>
-          <p:nvPr/>
-        </p:nvSpPr>
-        <p:spPr>
-          <a:xfrm>
-            <a:off x="8119872" y="1645920"/>
-            <a:ext cx="3328416" cy="3840480"/>
-          </a:xfrm>
-          <a:prstGeom prst="roundRect">
-            <a:avLst/>
-          </a:prstGeom>
-          <a:solidFill>
-            <a:srgbClr val="141826"/>
-          </a:solidFill>
-          <a:ln w="12700">
-            <a:solidFill>
-              <a:srgbClr val="2D3750"/>
-            </a:solidFill>
-          </a:ln>
-        </p:spPr>
-        <p:style>
-          <a:lnRef idx="1">
-            <a:schemeClr val="accent1"/>
-          </a:lnRef>
-          <a:fillRef idx="3">
-            <a:schemeClr val="accent1"/>
-          </a:fillRef>
-          <a:effectRef idx="2">
-            <a:schemeClr val="accent1"/>
-          </a:effectRef>
-          <a:fontRef idx="minor">
-            <a:schemeClr val="lt1"/>
-          </a:fontRef>
-        </p:style>
-        <p:txBody>
-          <a:bodyPr rtlCol="0" anchor="ctr" wrap="square" lIns="228600" rIns="228600" tIns="182880" bIns="182880"/>
-          <a:lstStyle/>
-          <a:p>
-            <a:pPr algn="ctr">
-              <a:defRPr sz="1300" b="1">
-                <a:solidFill>
-                  <a:srgbClr val="6366F1"/>
-                </a:solidFill>
-                <a:latin typeface="Arial"/>
-              </a:defRPr>
-            </a:pPr>
-            <a:r>
-              <a:t>AI &amp; Smart Utilities (7 Tools)</a:t>
-            </a:r>
-          </a:p>
-          <a:p>
-            <a:pPr>
-              <a:spcBef>
-                <a:spcPts val="400"/>
-              </a:spcBef>
-              <a:defRPr sz="1050">
-                <a:solidFill>
-                  <a:srgbClr val="F8FAFC"/>
-                </a:solidFill>
-                <a:latin typeface="Arial"/>
-              </a:defRPr>
-            </a:pPr>
-            <a:r>
-              <a:t>✓ Neural Optical Character Recognition (OCR via Tesseract)</a:t>
-            </a:r>
-          </a:p>
-          <a:p>
-            <a:pPr>
-              <a:spcBef>
-                <a:spcPts val="400"/>
-              </a:spcBef>
-              <a:defRPr sz="1050">
-                <a:solidFill>
-                  <a:srgbClr val="F8FAFC"/>
-                </a:solidFill>
-                <a:latin typeface="Arial"/>
-              </a:defRPr>
-            </a:pPr>
-            <a:r>
-              <a:t>✓ AI Document Bullet-Point Summarizer &amp; Key Insights</a:t>
-            </a:r>
-          </a:p>
-          <a:p>
-            <a:pPr>
-              <a:spcBef>
-                <a:spcPts val="400"/>
-              </a:spcBef>
-              <a:defRPr sz="1050">
-                <a:solidFill>
-                  <a:srgbClr val="F8FAFC"/>
-                </a:solidFill>
-                <a:latin typeface="Arial"/>
-              </a:defRPr>
-            </a:pPr>
-            <a:r>
-              <a:t>✓ Multi-Lingual Document Translation Engine</a:t>
-            </a:r>
-          </a:p>
-          <a:p>
-            <a:pPr>
-              <a:spcBef>
-                <a:spcPts val="400"/>
-              </a:spcBef>
-              <a:defRPr sz="1050">
-                <a:solidFill>
-                  <a:srgbClr val="F8FAFC"/>
-                </a:solidFill>
-                <a:latin typeface="Arial"/>
-              </a:defRPr>
-            </a:pPr>
-            <a:r>
-              <a:t>✓ PDF to Markdown Technical Documentation Converter</a:t>
-            </a:r>
-          </a:p>
-          <a:p>
-            <a:pPr>
-              <a:spcBef>
-                <a:spcPts val="400"/>
-              </a:spcBef>
-              <a:defRPr sz="1050">
-                <a:solidFill>
-                  <a:srgbClr val="F8FAFC"/>
-                </a:solidFill>
-                <a:latin typeface="Arial"/>
-              </a:defRPr>
-            </a:pPr>
-            <a:r>
-              <a:t>✓ Dynamic SVG/PNG QR Code Generator</a:t>
-            </a:r>
-          </a:p>
-          <a:p>
-            <a:pPr>
-              <a:spcBef>
-                <a:spcPts val="400"/>
-              </a:spcBef>
-              <a:defRPr sz="1050">
-                <a:solidFill>
-                  <a:srgbClr val="F8FAFC"/>
-                </a:solidFill>
-                <a:latin typeface="Arial"/>
-              </a:defRPr>
-            </a:pPr>
-            <a:r>
-              <a:t>✓ Developer Placeholder &amp; Mock Asset Engine</a:t>
-            </a:r>
-          </a:p>
-        </p:txBody>
-      </p:sp>
-      <p:sp>
-        <p:nvSpPr>
-          <p:cNvPr id="8" name="Rounded Rectangle 7"/>
-          <p:cNvSpPr/>
-          <p:nvPr/>
-        </p:nvSpPr>
-        <p:spPr>
-          <a:xfrm>
-            <a:off x="731520" y="5669280"/>
-            <a:ext cx="10698480" cy="548640"/>
-          </a:xfrm>
-          <a:prstGeom prst="roundRect">
-            <a:avLst/>
-          </a:prstGeom>
-          <a:solidFill>
-            <a:srgbClr val="141826"/>
-          </a:solidFill>
-          <a:ln>
-            <a:solidFill>
-              <a:srgbClr val="2D3750"/>
-            </a:solidFill>
-          </a:ln>
-        </p:spPr>
-        <p:style>
-          <a:lnRef idx="1">
-            <a:schemeClr val="accent1"/>
-          </a:lnRef>
-          <a:fillRef idx="3">
-            <a:schemeClr val="accent1"/>
-          </a:fillRef>
-          <a:effectRef idx="2">
-            <a:schemeClr val="accent1"/>
-          </a:effectRef>
-          <a:fontRef idx="minor">
-            <a:schemeClr val="lt1"/>
-          </a:fontRef>
-        </p:style>
-        <p:txBody>
-          <a:bodyPr rtlCol="0" anchor="ctr"/>
-          <a:lstStyle/>
-          <a:p>
-            <a:pPr algn="ctr">
-              <a:defRPr sz="1050" b="1">
-                <a:solidFill>
-                  <a:srgbClr val="F8FAFC"/>
-                </a:solidFill>
-              </a:defRPr>
-            </a:pPr>
-            <a:r>
-              <a:t>MODULAR ARCHITECTURE: Every tool operates through a unified runner component with batch drag-and-drop queues.</a:t>
+              <a:defRPr sz="1100" b="1">
+                <a:solidFill>
+                  <a:srgbClr val="3B82F6"/>
+                </a:solidFill>
+                <a:latin typeface="Arial"/>
+              </a:defRPr>
+            </a:pPr>
+            <a:r>
+              <a:t>88 tools are live &amp; working  •  26 more coming soon  •  New tools added regularly</a:t>
             </a:r>
           </a:p>
         </p:txBody>
@@ -7930,8 +6997,8 @@
   <p:clrMapOvr>
     <a:masterClrMapping/>
   </p:clrMapOvr>
-  <p:transition spd="med">
-    <p:push dir="r"/>
+  <p:transition spd="med" advTm="0">
+    <p:push dir="l"/>
   </p:transition>
 </p:sld>
 </file>
@@ -7941,9 +7008,17 @@
   <p:cSld>
     <p:bg>
       <p:bgPr>
-        <a:solidFill>
-          <a:srgbClr val="0B0D14"/>
-        </a:solidFill>
+        <a:gradFill rotWithShape="1">
+          <a:gsLst>
+            <a:gs pos="0">
+              <a:srgbClr val="0F172A"/>
+            </a:gs>
+            <a:gs pos="100000">
+              <a:srgbClr val="1E2846"/>
+            </a:gs>
+          </a:gsLst>
+          <a:lin scaled="0"/>
+        </a:gradFill>
         <a:effectLst/>
       </p:bgPr>
     </p:bg>
@@ -7962,20 +7037,25 @@
         </p:nvSpPr>
         <p:spPr>
           <a:xfrm>
-            <a:off x="731520" y="365760"/>
-            <a:ext cx="2011680" cy="320040"/>
+            <a:off x="731520" y="457200"/>
+            <a:ext cx="2286000" cy="347472"/>
           </a:xfrm>
           <a:prstGeom prst="roundRect">
             <a:avLst/>
           </a:prstGeom>
           <a:solidFill>
-            <a:srgbClr val="19261C"/>
+            <a:srgbClr val="F97316"/>
           </a:solidFill>
-          <a:ln w="12700">
-            <a:solidFill>
-              <a:srgbClr val="A3E635"/>
-            </a:solidFill>
+          <a:ln>
+            <a:noFill/>
           </a:ln>
+          <a:effectLst>
+            <a:outerShdw blurRad="190500" dist="63500" dir="5400000" rotWithShape="0">
+              <a:srgbClr val="000000">
+                <a:alpha val="40000"/>
+              </a:srgbClr>
+            </a:outerShdw>
+          </a:effectLst>
         </p:spPr>
         <p:style>
           <a:lnRef idx="1">
@@ -7992,19 +7072,19 @@
           </a:fontRef>
         </p:style>
         <p:txBody>
-          <a:bodyPr rtlCol="0" anchor="ctr" wrap="square"/>
+          <a:bodyPr rtlCol="0" anchor="ctr"/>
           <a:lstStyle/>
           <a:p>
             <a:pPr algn="ctr">
-              <a:defRPr sz="1000" b="1">
-                <a:solidFill>
-                  <a:srgbClr val="A3E635"/>
-                </a:solidFill>
-                <a:latin typeface="Arial"/>
-              </a:defRPr>
-            </a:pPr>
-            <a:r>
-              <a:t>MARKET COMPARISON</a:t>
+              <a:defRPr sz="1100" b="1">
+                <a:solidFill>
+                  <a:srgbClr val="FFFFFF"/>
+                </a:solidFill>
+                <a:latin typeface="Arial"/>
+              </a:defRPr>
+            </a:pPr>
+            <a:r>
+              <a:t>COMPARISON</a:t>
             </a:r>
           </a:p>
         </p:txBody>
@@ -8017,8 +7097,8 @@
         </p:nvSpPr>
         <p:spPr>
           <a:xfrm>
-            <a:off x="731520" y="731520"/>
-            <a:ext cx="8686800" cy="640080"/>
+            <a:off x="731520" y="914400"/>
+            <a:ext cx="10698480" cy="548640"/>
           </a:xfrm>
           <a:prstGeom prst="rect">
             <a:avLst/>
@@ -8031,961 +7111,86 @@
           </a:bodyPr>
           <a:lstStyle/>
           <a:p>
-            <a:pPr>
-              <a:defRPr sz="2400" b="1">
-                <a:solidFill>
-                  <a:srgbClr val="F8FAFC"/>
-                </a:solidFill>
-                <a:latin typeface="Arial"/>
-              </a:defRPr>
-            </a:pPr>
-            <a:r>
-              <a:t>Head-to-Head: PixelForge vs. Industry Leaders</a:t>
-            </a:r>
-          </a:p>
-        </p:txBody>
-      </p:sp>
-      <p:sp>
-        <p:nvSpPr>
-          <p:cNvPr id="4" name="TextBox 3"/>
-          <p:cNvSpPr txBox="1"/>
+            <a:pPr algn="l">
+              <a:defRPr sz="3000" b="1">
+                <a:solidFill>
+                  <a:srgbClr val="FFFFFF"/>
+                </a:solidFill>
+                <a:latin typeface="Arial"/>
+              </a:defRPr>
+            </a:pPr>
+            <a:r>
+              <a:t>How PixelForge is Better?</a:t>
+            </a:r>
+          </a:p>
+        </p:txBody>
+      </p:sp>
+      <p:pic>
+        <p:nvPicPr>
+          <p:cNvPr id="4" name="Picture 3" descr="comparison.png"/>
+          <p:cNvPicPr>
+            <a:picLocks noChangeAspect="1"/>
+          </p:cNvPicPr>
           <p:nvPr/>
-        </p:nvSpPr>
+        </p:nvPicPr>
+        <p:blipFill>
+          <a:blip r:embed="rId2"/>
+          <a:stretch>
+            <a:fillRect/>
+          </a:stretch>
+        </p:blipFill>
         <p:spPr>
           <a:xfrm>
-            <a:off x="10515600" y="365760"/>
-            <a:ext cx="1097280" cy="365760"/>
+            <a:off x="731520" y="1645920"/>
+            <a:ext cx="10698480" cy="3931920"/>
           </a:xfrm>
           <a:prstGeom prst="rect">
             <a:avLst/>
           </a:prstGeom>
-          <a:noFill/>
+          <a:effectLst>
+            <a:outerShdw blurRad="190500" dist="63500" dir="5400000" rotWithShape="0">
+              <a:srgbClr val="000000">
+                <a:alpha val="40000"/>
+              </a:srgbClr>
+            </a:outerShdw>
+          </a:effectLst>
+          <a:sp3d extrusionH="12700">
+            <a:bevelT w="63500" h="25400" prst="relaxedInset"/>
+            <a:contourClr>
+              <a:srgbClr val="3B82F6"/>
+            </a:contourClr>
+          </a:sp3d>
         </p:spPr>
-        <p:txBody>
-          <a:bodyPr wrap="none">
-            <a:spAutoFit/>
-          </a:bodyPr>
-          <a:lstStyle/>
-          <a:p>
-            <a:pPr algn="r">
-              <a:defRPr sz="1200" b="1">
-                <a:solidFill>
-                  <a:srgbClr val="A3E635"/>
-                </a:solidFill>
-                <a:latin typeface="Arial"/>
-              </a:defRPr>
-            </a:pPr>
-            <a:r>
-              <a:t>07 / 09</a:t>
-            </a:r>
-          </a:p>
-        </p:txBody>
-      </p:sp>
-      <p:graphicFrame>
-        <p:nvGraphicFramePr>
-          <p:cNvPr id="5" name="Table 4"/>
-          <p:cNvGraphicFramePr>
-            <a:graphicFrameLocks noGrp="1"/>
-          </p:cNvGraphicFramePr>
-          <p:nvPr/>
-        </p:nvGraphicFramePr>
-        <p:xfrm>
-          <a:off x="731520" y="1645920"/>
-          <a:ext cx="10698480" cy="3749039"/>
-        </p:xfrm>
-        <a:graphic>
-          <a:graphicData uri="http://schemas.openxmlformats.org/drawingml/2006/table">
-            <a:tbl>
-              <a:tblPr firstRow="1" bandRow="1">
-                <a:tableStyleId>{5C22544A-7EE6-4342-B048-85BDC9FD1C3A}</a:tableStyleId>
-              </a:tblPr>
-              <a:tblGrid>
-                <a:gridCol w="2468880"/>
-                <a:gridCol w="2468880"/>
-                <a:gridCol w="1920240"/>
-                <a:gridCol w="1920240"/>
-                <a:gridCol w="1920240"/>
-              </a:tblGrid>
-              <a:tr h="535577">
-                <a:tc>
-                  <a:txBody>
-                    <a:bodyPr/>
-                    <a:lstStyle/>
-                    <a:p>
-                      <a:pPr>
-                        <a:defRPr sz="1100" b="1">
-                          <a:solidFill>
-                            <a:srgbClr val="F8FAFC"/>
-                          </a:solidFill>
-                          <a:latin typeface="Arial"/>
-                        </a:defRPr>
-                      </a:pPr>
-                      <a:r>
-                        <a:t>Feature / Metric</a:t>
-                      </a:r>
-                    </a:p>
-                  </a:txBody>
-                  <a:tcPr>
-                    <a:solidFill>
-                      <a:srgbClr val="161C2D"/>
-                    </a:solidFill>
-                  </a:tcPr>
-                </a:tc>
-                <a:tc>
-                  <a:txBody>
-                    <a:bodyPr/>
-                    <a:lstStyle/>
-                    <a:p>
-                      <a:pPr>
-                        <a:defRPr sz="1100" b="1">
-                          <a:solidFill>
-                            <a:srgbClr val="A3E635"/>
-                          </a:solidFill>
-                          <a:latin typeface="Arial"/>
-                        </a:defRPr>
-                      </a:pPr>
-                      <a:r>
-                        <a:t>PixelForge (Our Project)</a:t>
-                      </a:r>
-                    </a:p>
-                  </a:txBody>
-                  <a:tcPr>
-                    <a:solidFill>
-                      <a:srgbClr val="1E301E"/>
-                    </a:solidFill>
-                  </a:tcPr>
-                </a:tc>
-                <a:tc>
-                  <a:txBody>
-                    <a:bodyPr/>
-                    <a:lstStyle/>
-                    <a:p>
-                      <a:pPr>
-                        <a:defRPr sz="1100" b="1">
-                          <a:solidFill>
-                            <a:srgbClr val="F8FAFC"/>
-                          </a:solidFill>
-                          <a:latin typeface="Arial"/>
-                        </a:defRPr>
-                      </a:pPr>
-                      <a:r>
-                        <a:t>iLovePDF</a:t>
-                      </a:r>
-                    </a:p>
-                  </a:txBody>
-                  <a:tcPr>
-                    <a:solidFill>
-                      <a:srgbClr val="161C2D"/>
-                    </a:solidFill>
-                  </a:tcPr>
-                </a:tc>
-                <a:tc>
-                  <a:txBody>
-                    <a:bodyPr/>
-                    <a:lstStyle/>
-                    <a:p>
-                      <a:pPr>
-                        <a:defRPr sz="1100" b="1">
-                          <a:solidFill>
-                            <a:srgbClr val="F8FAFC"/>
-                          </a:solidFill>
-                          <a:latin typeface="Arial"/>
-                        </a:defRPr>
-                      </a:pPr>
-                      <a:r>
-                        <a:t>SmallPDF</a:t>
-                      </a:r>
-                    </a:p>
-                  </a:txBody>
-                  <a:tcPr>
-                    <a:solidFill>
-                      <a:srgbClr val="161C2D"/>
-                    </a:solidFill>
-                  </a:tcPr>
-                </a:tc>
-                <a:tc>
-                  <a:txBody>
-                    <a:bodyPr/>
-                    <a:lstStyle/>
-                    <a:p>
-                      <a:pPr>
-                        <a:defRPr sz="1100" b="1">
-                          <a:solidFill>
-                            <a:srgbClr val="F8FAFC"/>
-                          </a:solidFill>
-                          <a:latin typeface="Arial"/>
-                        </a:defRPr>
-                      </a:pPr>
-                      <a:r>
-                        <a:t>TinyPNG</a:t>
-                      </a:r>
-                    </a:p>
-                  </a:txBody>
-                  <a:tcPr>
-                    <a:solidFill>
-                      <a:srgbClr val="161C2D"/>
-                    </a:solidFill>
-                  </a:tcPr>
-                </a:tc>
-              </a:tr>
-              <a:tr h="535577">
-                <a:tc>
-                  <a:txBody>
-                    <a:bodyPr/>
-                    <a:lstStyle/>
-                    <a:p>
-                      <a:pPr>
-                        <a:defRPr sz="1000">
-                          <a:solidFill>
-                            <a:srgbClr val="F8FAFC"/>
-                          </a:solidFill>
-                          <a:latin typeface="Arial"/>
-                        </a:defRPr>
-                      </a:pPr>
-                      <a:r>
-                        <a:t>Total Active Tools</a:t>
-                      </a:r>
-                    </a:p>
-                  </a:txBody>
-                  <a:tcPr>
-                    <a:solidFill>
-                      <a:srgbClr val="0F131E"/>
-                    </a:solidFill>
-                  </a:tcPr>
-                </a:tc>
-                <a:tc>
-                  <a:txBody>
-                    <a:bodyPr/>
-                    <a:lstStyle/>
-                    <a:p>
-                      <a:pPr>
-                        <a:defRPr sz="1000" b="1">
-                          <a:solidFill>
-                            <a:srgbClr val="A3E635"/>
-                          </a:solidFill>
-                          <a:latin typeface="Arial"/>
-                        </a:defRPr>
-                      </a:pPr>
-                      <a:r>
-                        <a:t>114+ (Images + PDF + AI)</a:t>
-                      </a:r>
-                    </a:p>
-                  </a:txBody>
-                  <a:tcPr>
-                    <a:solidFill>
-                      <a:srgbClr val="102016"/>
-                    </a:solidFill>
-                  </a:tcPr>
-                </a:tc>
-                <a:tc>
-                  <a:txBody>
-                    <a:bodyPr/>
-                    <a:lstStyle/>
-                    <a:p>
-                      <a:pPr>
-                        <a:defRPr sz="1000">
-                          <a:solidFill>
-                            <a:srgbClr val="94A3B8"/>
-                          </a:solidFill>
-                          <a:latin typeface="Arial"/>
-                        </a:defRPr>
-                      </a:pPr>
-                      <a:r>
-                        <a:t>~25 (PDF Only)</a:t>
-                      </a:r>
-                    </a:p>
-                  </a:txBody>
-                  <a:tcPr>
-                    <a:solidFill>
-                      <a:srgbClr val="0F131E"/>
-                    </a:solidFill>
-                  </a:tcPr>
-                </a:tc>
-                <a:tc>
-                  <a:txBody>
-                    <a:bodyPr/>
-                    <a:lstStyle/>
-                    <a:p>
-                      <a:pPr>
-                        <a:defRPr sz="1000">
-                          <a:solidFill>
-                            <a:srgbClr val="94A3B8"/>
-                          </a:solidFill>
-                          <a:latin typeface="Arial"/>
-                        </a:defRPr>
-                      </a:pPr>
-                      <a:r>
-                        <a:t>~21 (PDF Only)</a:t>
-                      </a:r>
-                    </a:p>
-                  </a:txBody>
-                  <a:tcPr>
-                    <a:solidFill>
-                      <a:srgbClr val="0F131E"/>
-                    </a:solidFill>
-                  </a:tcPr>
-                </a:tc>
-                <a:tc>
-                  <a:txBody>
-                    <a:bodyPr/>
-                    <a:lstStyle/>
-                    <a:p>
-                      <a:pPr>
-                        <a:defRPr sz="1000">
-                          <a:solidFill>
-                            <a:srgbClr val="94A3B8"/>
-                          </a:solidFill>
-                          <a:latin typeface="Arial"/>
-                        </a:defRPr>
-                      </a:pPr>
-                      <a:r>
-                        <a:t>1 (Image Compress)</a:t>
-                      </a:r>
-                    </a:p>
-                  </a:txBody>
-                  <a:tcPr>
-                    <a:solidFill>
-                      <a:srgbClr val="0F131E"/>
-                    </a:solidFill>
-                  </a:tcPr>
-                </a:tc>
-              </a:tr>
-              <a:tr h="535577">
-                <a:tc>
-                  <a:txBody>
-                    <a:bodyPr/>
-                    <a:lstStyle/>
-                    <a:p>
-                      <a:pPr>
-                        <a:defRPr sz="1000">
-                          <a:solidFill>
-                            <a:srgbClr val="F8FAFC"/>
-                          </a:solidFill>
-                          <a:latin typeface="Arial"/>
-                        </a:defRPr>
-                      </a:pPr>
-                      <a:r>
-                        <a:t>Subscription Cost</a:t>
-                      </a:r>
-                    </a:p>
-                  </a:txBody>
-                  <a:tcPr>
-                    <a:solidFill>
-                      <a:srgbClr val="141826"/>
-                    </a:solidFill>
-                  </a:tcPr>
-                </a:tc>
-                <a:tc>
-                  <a:txBody>
-                    <a:bodyPr/>
-                    <a:lstStyle/>
-                    <a:p>
-                      <a:pPr>
-                        <a:defRPr sz="1000" b="1">
-                          <a:solidFill>
-                            <a:srgbClr val="A3E635"/>
-                          </a:solidFill>
-                          <a:latin typeface="Arial"/>
-                        </a:defRPr>
-                      </a:pPr>
-                      <a:r>
-                        <a:t>100% Free Forever</a:t>
-                      </a:r>
-                    </a:p>
-                  </a:txBody>
-                  <a:tcPr>
-                    <a:solidFill>
-                      <a:srgbClr val="102016"/>
-                    </a:solidFill>
-                  </a:tcPr>
-                </a:tc>
-                <a:tc>
-                  <a:txBody>
-                    <a:bodyPr/>
-                    <a:lstStyle/>
-                    <a:p>
-                      <a:pPr>
-                        <a:defRPr sz="1000">
-                          <a:solidFill>
-                            <a:srgbClr val="94A3B8"/>
-                          </a:solidFill>
-                          <a:latin typeface="Arial"/>
-                        </a:defRPr>
-                      </a:pPr>
-                      <a:r>
-                        <a:t>$7 / Month</a:t>
-                      </a:r>
-                    </a:p>
-                  </a:txBody>
-                  <a:tcPr>
-                    <a:solidFill>
-                      <a:srgbClr val="141826"/>
-                    </a:solidFill>
-                  </a:tcPr>
-                </a:tc>
-                <a:tc>
-                  <a:txBody>
-                    <a:bodyPr/>
-                    <a:lstStyle/>
-                    <a:p>
-                      <a:pPr>
-                        <a:defRPr sz="1000">
-                          <a:solidFill>
-                            <a:srgbClr val="F43F5E"/>
-                          </a:solidFill>
-                          <a:latin typeface="Arial"/>
-                        </a:defRPr>
-                      </a:pPr>
-                      <a:r>
-                        <a:t>$12 / Month</a:t>
-                      </a:r>
-                    </a:p>
-                  </a:txBody>
-                  <a:tcPr>
-                    <a:solidFill>
-                      <a:srgbClr val="141826"/>
-                    </a:solidFill>
-                  </a:tcPr>
-                </a:tc>
-                <a:tc>
-                  <a:txBody>
-                    <a:bodyPr/>
-                    <a:lstStyle/>
-                    <a:p>
-                      <a:pPr>
-                        <a:defRPr sz="1000">
-                          <a:solidFill>
-                            <a:srgbClr val="94A3B8"/>
-                          </a:solidFill>
-                          <a:latin typeface="Arial"/>
-                        </a:defRPr>
-                      </a:pPr>
-                      <a:r>
-                        <a:t>$39 / Year</a:t>
-                      </a:r>
-                    </a:p>
-                  </a:txBody>
-                  <a:tcPr>
-                    <a:solidFill>
-                      <a:srgbClr val="141826"/>
-                    </a:solidFill>
-                  </a:tcPr>
-                </a:tc>
-              </a:tr>
-              <a:tr h="535577">
-                <a:tc>
-                  <a:txBody>
-                    <a:bodyPr/>
-                    <a:lstStyle/>
-                    <a:p>
-                      <a:pPr>
-                        <a:defRPr sz="1000">
-                          <a:solidFill>
-                            <a:srgbClr val="F8FAFC"/>
-                          </a:solidFill>
-                          <a:latin typeface="Arial"/>
-                        </a:defRPr>
-                      </a:pPr>
-                      <a:r>
-                        <a:t>Daily Usage Limits</a:t>
-                      </a:r>
-                    </a:p>
-                  </a:txBody>
-                  <a:tcPr>
-                    <a:solidFill>
-                      <a:srgbClr val="0F131E"/>
-                    </a:solidFill>
-                  </a:tcPr>
-                </a:tc>
-                <a:tc>
-                  <a:txBody>
-                    <a:bodyPr/>
-                    <a:lstStyle/>
-                    <a:p>
-                      <a:pPr>
-                        <a:defRPr sz="1000" b="1">
-                          <a:solidFill>
-                            <a:srgbClr val="A3E635"/>
-                          </a:solidFill>
-                          <a:latin typeface="Arial"/>
-                        </a:defRPr>
-                      </a:pPr>
-                      <a:r>
-                        <a:t>Unlimited Usage</a:t>
-                      </a:r>
-                    </a:p>
-                  </a:txBody>
-                  <a:tcPr>
-                    <a:solidFill>
-                      <a:srgbClr val="102016"/>
-                    </a:solidFill>
-                  </a:tcPr>
-                </a:tc>
-                <a:tc>
-                  <a:txBody>
-                    <a:bodyPr/>
-                    <a:lstStyle/>
-                    <a:p>
-                      <a:pPr>
-                        <a:defRPr sz="1000">
-                          <a:solidFill>
-                            <a:srgbClr val="94A3B8"/>
-                          </a:solidFill>
-                          <a:latin typeface="Arial"/>
-                        </a:defRPr>
-                      </a:pPr>
-                      <a:r>
-                        <a:t>Throttled Batches</a:t>
-                      </a:r>
-                    </a:p>
-                  </a:txBody>
-                  <a:tcPr>
-                    <a:solidFill>
-                      <a:srgbClr val="0F131E"/>
-                    </a:solidFill>
-                  </a:tcPr>
-                </a:tc>
-                <a:tc>
-                  <a:txBody>
-                    <a:bodyPr/>
-                    <a:lstStyle/>
-                    <a:p>
-                      <a:pPr>
-                        <a:defRPr sz="1000">
-                          <a:solidFill>
-                            <a:srgbClr val="F43F5E"/>
-                          </a:solidFill>
-                          <a:latin typeface="Arial"/>
-                        </a:defRPr>
-                      </a:pPr>
-                      <a:r>
-                        <a:t>2 Tasks / Day Limit</a:t>
-                      </a:r>
-                    </a:p>
-                  </a:txBody>
-                  <a:tcPr>
-                    <a:solidFill>
-                      <a:srgbClr val="0F131E"/>
-                    </a:solidFill>
-                  </a:tcPr>
-                </a:tc>
-                <a:tc>
-                  <a:txBody>
-                    <a:bodyPr/>
-                    <a:lstStyle/>
-                    <a:p>
-                      <a:pPr>
-                        <a:defRPr sz="1000">
-                          <a:solidFill>
-                            <a:srgbClr val="94A3B8"/>
-                          </a:solidFill>
-                          <a:latin typeface="Arial"/>
-                        </a:defRPr>
-                      </a:pPr>
-                      <a:r>
-                        <a:t>Max 20 Files</a:t>
-                      </a:r>
-                    </a:p>
-                  </a:txBody>
-                  <a:tcPr>
-                    <a:solidFill>
-                      <a:srgbClr val="0F131E"/>
-                    </a:solidFill>
-                  </a:tcPr>
-                </a:tc>
-              </a:tr>
-              <a:tr h="535577">
-                <a:tc>
-                  <a:txBody>
-                    <a:bodyPr/>
-                    <a:lstStyle/>
-                    <a:p>
-                      <a:pPr>
-                        <a:defRPr sz="1000">
-                          <a:solidFill>
-                            <a:srgbClr val="F8FAFC"/>
-                          </a:solidFill>
-                          <a:latin typeface="Arial"/>
-                        </a:defRPr>
-                      </a:pPr>
-                      <a:r>
-                        <a:t>Data Lifecycle Policy</a:t>
-                      </a:r>
-                    </a:p>
-                  </a:txBody>
-                  <a:tcPr>
-                    <a:solidFill>
-                      <a:srgbClr val="141826"/>
-                    </a:solidFill>
-                  </a:tcPr>
-                </a:tc>
-                <a:tc>
-                  <a:txBody>
-                    <a:bodyPr/>
-                    <a:lstStyle/>
-                    <a:p>
-                      <a:pPr>
-                        <a:defRPr sz="1000" b="1">
-                          <a:solidFill>
-                            <a:srgbClr val="A3E635"/>
-                          </a:solidFill>
-                          <a:latin typeface="Arial"/>
-                        </a:defRPr>
-                      </a:pPr>
-                      <a:r>
-                        <a:t>60-Min Auto-Purge</a:t>
-                      </a:r>
-                    </a:p>
-                  </a:txBody>
-                  <a:tcPr>
-                    <a:solidFill>
-                      <a:srgbClr val="102016"/>
-                    </a:solidFill>
-                  </a:tcPr>
-                </a:tc>
-                <a:tc>
-                  <a:txBody>
-                    <a:bodyPr/>
-                    <a:lstStyle/>
-                    <a:p>
-                      <a:pPr>
-                        <a:defRPr sz="1000">
-                          <a:solidFill>
-                            <a:srgbClr val="94A3B8"/>
-                          </a:solidFill>
-                          <a:latin typeface="Arial"/>
-                        </a:defRPr>
-                      </a:pPr>
-                      <a:r>
-                        <a:t>2-Hour Cloud Store</a:t>
-                      </a:r>
-                    </a:p>
-                  </a:txBody>
-                  <a:tcPr>
-                    <a:solidFill>
-                      <a:srgbClr val="141826"/>
-                    </a:solidFill>
-                  </a:tcPr>
-                </a:tc>
-                <a:tc>
-                  <a:txBody>
-                    <a:bodyPr/>
-                    <a:lstStyle/>
-                    <a:p>
-                      <a:pPr>
-                        <a:defRPr sz="1000">
-                          <a:solidFill>
-                            <a:srgbClr val="94A3B8"/>
-                          </a:solidFill>
-                          <a:latin typeface="Arial"/>
-                        </a:defRPr>
-                      </a:pPr>
-                      <a:r>
-                        <a:t>14-Day Cloud Store</a:t>
-                      </a:r>
-                    </a:p>
-                  </a:txBody>
-                  <a:tcPr>
-                    <a:solidFill>
-                      <a:srgbClr val="141826"/>
-                    </a:solidFill>
-                  </a:tcPr>
-                </a:tc>
-                <a:tc>
-                  <a:txBody>
-                    <a:bodyPr/>
-                    <a:lstStyle/>
-                    <a:p>
-                      <a:pPr>
-                        <a:defRPr sz="1000">
-                          <a:solidFill>
-                            <a:srgbClr val="94A3B8"/>
-                          </a:solidFill>
-                          <a:latin typeface="Arial"/>
-                        </a:defRPr>
-                      </a:pPr>
-                      <a:r>
-                        <a:t>Variable Cloud Store</a:t>
-                      </a:r>
-                    </a:p>
-                  </a:txBody>
-                  <a:tcPr>
-                    <a:solidFill>
-                      <a:srgbClr val="141826"/>
-                    </a:solidFill>
-                  </a:tcPr>
-                </a:tc>
-              </a:tr>
-              <a:tr h="535577">
-                <a:tc>
-                  <a:txBody>
-                    <a:bodyPr/>
-                    <a:lstStyle/>
-                    <a:p>
-                      <a:pPr>
-                        <a:defRPr sz="1000">
-                          <a:solidFill>
-                            <a:srgbClr val="F8FAFC"/>
-                          </a:solidFill>
-                          <a:latin typeface="Arial"/>
-                        </a:defRPr>
-                      </a:pPr>
-                      <a:r>
-                        <a:t>Advertisements &amp; Popups</a:t>
-                      </a:r>
-                    </a:p>
-                  </a:txBody>
-                  <a:tcPr>
-                    <a:solidFill>
-                      <a:srgbClr val="0F131E"/>
-                    </a:solidFill>
-                  </a:tcPr>
-                </a:tc>
-                <a:tc>
-                  <a:txBody>
-                    <a:bodyPr/>
-                    <a:lstStyle/>
-                    <a:p>
-                      <a:pPr>
-                        <a:defRPr sz="1000" b="1">
-                          <a:solidFill>
-                            <a:srgbClr val="A3E635"/>
-                          </a:solidFill>
-                          <a:latin typeface="Arial"/>
-                        </a:defRPr>
-                      </a:pPr>
-                      <a:r>
-                        <a:t>Zero Ads / Clean UX</a:t>
-                      </a:r>
-                    </a:p>
-                  </a:txBody>
-                  <a:tcPr>
-                    <a:solidFill>
-                      <a:srgbClr val="102016"/>
-                    </a:solidFill>
-                  </a:tcPr>
-                </a:tc>
-                <a:tc>
-                  <a:txBody>
-                    <a:bodyPr/>
-                    <a:lstStyle/>
-                    <a:p>
-                      <a:pPr>
-                        <a:defRPr sz="1000">
-                          <a:solidFill>
-                            <a:srgbClr val="94A3B8"/>
-                          </a:solidFill>
-                          <a:latin typeface="Arial"/>
-                        </a:defRPr>
-                      </a:pPr>
-                      <a:r>
-                        <a:t>Heavy Banner Ads</a:t>
-                      </a:r>
-                    </a:p>
-                  </a:txBody>
-                  <a:tcPr>
-                    <a:solidFill>
-                      <a:srgbClr val="0F131E"/>
-                    </a:solidFill>
-                  </a:tcPr>
-                </a:tc>
-                <a:tc>
-                  <a:txBody>
-                    <a:bodyPr/>
-                    <a:lstStyle/>
-                    <a:p>
-                      <a:pPr>
-                        <a:defRPr sz="1000">
-                          <a:solidFill>
-                            <a:srgbClr val="F43F5E"/>
-                          </a:solidFill>
-                          <a:latin typeface="Arial"/>
-                        </a:defRPr>
-                      </a:pPr>
-                      <a:r>
-                        <a:t>Aggressive Paywalls</a:t>
-                      </a:r>
-                    </a:p>
-                  </a:txBody>
-                  <a:tcPr>
-                    <a:solidFill>
-                      <a:srgbClr val="0F131E"/>
-                    </a:solidFill>
-                  </a:tcPr>
-                </a:tc>
-                <a:tc>
-                  <a:txBody>
-                    <a:bodyPr/>
-                    <a:lstStyle/>
-                    <a:p>
-                      <a:pPr>
-                        <a:defRPr sz="1000">
-                          <a:solidFill>
-                            <a:srgbClr val="94A3B8"/>
-                          </a:solidFill>
-                          <a:latin typeface="Arial"/>
-                        </a:defRPr>
-                      </a:pPr>
-                      <a:r>
-                        <a:t>Sponsor Ads</a:t>
-                      </a:r>
-                    </a:p>
-                  </a:txBody>
-                  <a:tcPr>
-                    <a:solidFill>
-                      <a:srgbClr val="0F131E"/>
-                    </a:solidFill>
-                  </a:tcPr>
-                </a:tc>
-              </a:tr>
-              <a:tr h="535577">
-                <a:tc>
-                  <a:txBody>
-                    <a:bodyPr/>
-                    <a:lstStyle/>
-                    <a:p>
-                      <a:pPr>
-                        <a:defRPr sz="1000">
-                          <a:solidFill>
-                            <a:srgbClr val="F8FAFC"/>
-                          </a:solidFill>
-                          <a:latin typeface="Arial"/>
-                        </a:defRPr>
-                      </a:pPr>
-                      <a:r>
-                        <a:t>Modern 3D Motion UI</a:t>
-                      </a:r>
-                    </a:p>
-                  </a:txBody>
-                  <a:tcPr>
-                    <a:solidFill>
-                      <a:srgbClr val="141826"/>
-                    </a:solidFill>
-                  </a:tcPr>
-                </a:tc>
-                <a:tc>
-                  <a:txBody>
-                    <a:bodyPr/>
-                    <a:lstStyle/>
-                    <a:p>
-                      <a:pPr>
-                        <a:defRPr sz="1000" b="1">
-                          <a:solidFill>
-                            <a:srgbClr val="A3E635"/>
-                          </a:solidFill>
-                          <a:latin typeface="Arial"/>
-                        </a:defRPr>
-                      </a:pPr>
-                      <a:r>
-                        <a:t>Three.js + Framer 3D</a:t>
-                      </a:r>
-                    </a:p>
-                  </a:txBody>
-                  <a:tcPr>
-                    <a:solidFill>
-                      <a:srgbClr val="102016"/>
-                    </a:solidFill>
-                  </a:tcPr>
-                </a:tc>
-                <a:tc>
-                  <a:txBody>
-                    <a:bodyPr/>
-                    <a:lstStyle/>
-                    <a:p>
-                      <a:pPr>
-                        <a:defRPr sz="1000">
-                          <a:solidFill>
-                            <a:srgbClr val="94A3B8"/>
-                          </a:solidFill>
-                          <a:latin typeface="Arial"/>
-                        </a:defRPr>
-                      </a:pPr>
-                      <a:r>
-                        <a:t>Static 2D Interface</a:t>
-                      </a:r>
-                    </a:p>
-                  </a:txBody>
-                  <a:tcPr>
-                    <a:solidFill>
-                      <a:srgbClr val="141826"/>
-                    </a:solidFill>
-                  </a:tcPr>
-                </a:tc>
-                <a:tc>
-                  <a:txBody>
-                    <a:bodyPr/>
-                    <a:lstStyle/>
-                    <a:p>
-                      <a:pPr>
-                        <a:defRPr sz="1000">
-                          <a:solidFill>
-                            <a:srgbClr val="94A3B8"/>
-                          </a:solidFill>
-                          <a:latin typeface="Arial"/>
-                        </a:defRPr>
-                      </a:pPr>
-                      <a:r>
-                        <a:t>Static 2D Interface</a:t>
-                      </a:r>
-                    </a:p>
-                  </a:txBody>
-                  <a:tcPr>
-                    <a:solidFill>
-                      <a:srgbClr val="141826"/>
-                    </a:solidFill>
-                  </a:tcPr>
-                </a:tc>
-                <a:tc>
-                  <a:txBody>
-                    <a:bodyPr/>
-                    <a:lstStyle/>
-                    <a:p>
-                      <a:pPr>
-                        <a:defRPr sz="1000">
-                          <a:solidFill>
-                            <a:srgbClr val="94A3B8"/>
-                          </a:solidFill>
-                          <a:latin typeface="Arial"/>
-                        </a:defRPr>
-                      </a:pPr>
-                      <a:r>
-                        <a:t>Static 2D Interface</a:t>
-                      </a:r>
-                    </a:p>
-                  </a:txBody>
-                  <a:tcPr>
-                    <a:solidFill>
-                      <a:srgbClr val="141826"/>
-                    </a:solidFill>
-                  </a:tcPr>
-                </a:tc>
-              </a:tr>
-            </a:tbl>
-          </a:graphicData>
-        </a:graphic>
-      </p:graphicFrame>
-      <p:sp>
-        <p:nvSpPr>
-          <p:cNvPr id="6" name="Rounded Rectangle 5"/>
+      </p:pic>
+      <p:sp>
+        <p:nvSpPr>
+          <p:cNvPr id="5" name="Rounded Rectangle 4"/>
           <p:cNvSpPr/>
           <p:nvPr/>
         </p:nvSpPr>
         <p:spPr>
           <a:xfrm>
-            <a:off x="731520" y="5669280"/>
-            <a:ext cx="10698480" cy="548640"/>
+            <a:off x="731520" y="6035040"/>
+            <a:ext cx="10698480" cy="457200"/>
           </a:xfrm>
           <a:prstGeom prst="roundRect">
             <a:avLst/>
           </a:prstGeom>
           <a:solidFill>
-            <a:srgbClr val="231C0F"/>
+            <a:srgbClr val="141E32"/>
           </a:solidFill>
-          <a:ln>
+          <a:ln w="12700">
             <a:solidFill>
-              <a:srgbClr val="F59E0B"/>
+              <a:srgbClr val="3B82F6"/>
             </a:solidFill>
           </a:ln>
+          <a:effectLst>
+            <a:outerShdw blurRad="190500" dist="63500" dir="5400000" rotWithShape="0">
+              <a:srgbClr val="000000">
+                <a:alpha val="40000"/>
+              </a:srgbClr>
+            </a:outerShdw>
+          </a:effectLst>
         </p:spPr>
         <p:style>
           <a:lnRef idx="1">
@@ -9006,14 +7211,15 @@
           <a:lstStyle/>
           <a:p>
             <a:pPr algn="ctr">
-              <a:defRPr sz="1050" b="1">
-                <a:solidFill>
-                  <a:srgbClr val="F59E0B"/>
-                </a:solidFill>
-              </a:defRPr>
-            </a:pPr>
-            <a:r>
-              <a:t>KEY TAKEAWAY: PixelForge matches or exceeds commercial platforms while eliminating recurring subscription paywalls entirely.</a:t>
+              <a:defRPr sz="1100" b="1">
+                <a:solidFill>
+                  <a:srgbClr val="3B82F6"/>
+                </a:solidFill>
+                <a:latin typeface="Arial"/>
+              </a:defRPr>
+            </a:pPr>
+            <a:r>
+              <a:t>PixelForge gives you MORE tools, ZERO cost, and BETTER privacy than any competitor</a:t>
             </a:r>
           </a:p>
         </p:txBody>
@@ -9023,8 +7229,8 @@
   <p:clrMapOvr>
     <a:masterClrMapping/>
   </p:clrMapOvr>
-  <p:transition spd="med">
-    <p:push dir="r"/>
+  <p:transition spd="med" advTm="0">
+    <p:cover dir="l"/>
   </p:transition>
 </p:sld>
 </file>
@@ -9034,9 +7240,17 @@
   <p:cSld>
     <p:bg>
       <p:bgPr>
-        <a:solidFill>
-          <a:srgbClr val="0B0D14"/>
-        </a:solidFill>
+        <a:gradFill rotWithShape="1">
+          <a:gsLst>
+            <a:gs pos="0">
+              <a:srgbClr val="0F172A"/>
+            </a:gs>
+            <a:gs pos="100000">
+              <a:srgbClr val="1E2846"/>
+            </a:gs>
+          </a:gsLst>
+          <a:lin scaled="0"/>
+        </a:gradFill>
         <a:effectLst/>
       </p:bgPr>
     </p:bg>
@@ -9055,20 +7269,25 @@
         </p:nvSpPr>
         <p:spPr>
           <a:xfrm>
-            <a:off x="731520" y="365760"/>
-            <a:ext cx="2011680" cy="320040"/>
+            <a:off x="731520" y="457200"/>
+            <a:ext cx="2286000" cy="347472"/>
           </a:xfrm>
           <a:prstGeom prst="roundRect">
             <a:avLst/>
           </a:prstGeom>
           <a:solidFill>
-            <a:srgbClr val="19261C"/>
+            <a:srgbClr val="22C55E"/>
           </a:solidFill>
-          <a:ln w="12700">
-            <a:solidFill>
-              <a:srgbClr val="A3E635"/>
-            </a:solidFill>
+          <a:ln>
+            <a:noFill/>
           </a:ln>
+          <a:effectLst>
+            <a:outerShdw blurRad="190500" dist="63500" dir="5400000" rotWithShape="0">
+              <a:srgbClr val="000000">
+                <a:alpha val="40000"/>
+              </a:srgbClr>
+            </a:outerShdw>
+          </a:effectLst>
         </p:spPr>
         <p:style>
           <a:lnRef idx="1">
@@ -9085,19 +7304,19 @@
           </a:fontRef>
         </p:style>
         <p:txBody>
-          <a:bodyPr rtlCol="0" anchor="ctr" wrap="square"/>
+          <a:bodyPr rtlCol="0" anchor="ctr"/>
           <a:lstStyle/>
           <a:p>
             <a:pPr algn="ctr">
-              <a:defRPr sz="1000" b="1">
-                <a:solidFill>
-                  <a:srgbClr val="A3E635"/>
-                </a:solidFill>
-                <a:latin typeface="Arial"/>
-              </a:defRPr>
-            </a:pPr>
-            <a:r>
-              <a:t>EMPIRICAL VERIFICATION</a:t>
+              <a:defRPr sz="1100" b="1">
+                <a:solidFill>
+                  <a:srgbClr val="FFFFFF"/>
+                </a:solidFill>
+                <a:latin typeface="Arial"/>
+              </a:defRPr>
+            </a:pPr>
+            <a:r>
+              <a:t>QUALITY ASSURANCE</a:t>
             </a:r>
           </a:p>
         </p:txBody>
@@ -9110,8 +7329,8 @@
         </p:nvSpPr>
         <p:spPr>
           <a:xfrm>
-            <a:off x="731520" y="731520"/>
-            <a:ext cx="8686800" cy="640080"/>
+            <a:off x="731520" y="914400"/>
+            <a:ext cx="10698480" cy="548640"/>
           </a:xfrm>
           <a:prstGeom prst="rect">
             <a:avLst/>
@@ -9124,78 +7343,55 @@
           </a:bodyPr>
           <a:lstStyle/>
           <a:p>
-            <a:pPr>
-              <a:defRPr sz="2400" b="1">
-                <a:solidFill>
-                  <a:srgbClr val="F8FAFC"/>
-                </a:solidFill>
-                <a:latin typeface="Arial"/>
-              </a:defRPr>
-            </a:pPr>
-            <a:r>
-              <a:t>Rigorous SQA Audit &amp; Verification Benchmarks</a:t>
-            </a:r>
-          </a:p>
-        </p:txBody>
-      </p:sp>
-      <p:sp>
-        <p:nvSpPr>
-          <p:cNvPr id="4" name="TextBox 3"/>
-          <p:cNvSpPr txBox="1"/>
-          <p:nvPr/>
-        </p:nvSpPr>
-        <p:spPr>
-          <a:xfrm>
-            <a:off x="10515600" y="365760"/>
-            <a:ext cx="1097280" cy="365760"/>
-          </a:xfrm>
-          <a:prstGeom prst="rect">
-            <a:avLst/>
-          </a:prstGeom>
-          <a:noFill/>
-        </p:spPr>
-        <p:txBody>
-          <a:bodyPr wrap="none">
-            <a:spAutoFit/>
-          </a:bodyPr>
-          <a:lstStyle/>
-          <a:p>
-            <a:pPr algn="r">
-              <a:defRPr sz="1200" b="1">
-                <a:solidFill>
-                  <a:srgbClr val="A3E635"/>
-                </a:solidFill>
-                <a:latin typeface="Arial"/>
-              </a:defRPr>
-            </a:pPr>
-            <a:r>
-              <a:t>08 / 09</a:t>
-            </a:r>
-          </a:p>
-        </p:txBody>
-      </p:sp>
-      <p:sp>
-        <p:nvSpPr>
-          <p:cNvPr id="5" name="Rounded Rectangle 4"/>
+            <a:pPr algn="l">
+              <a:defRPr sz="3000" b="1">
+                <a:solidFill>
+                  <a:srgbClr val="FFFFFF"/>
+                </a:solidFill>
+                <a:latin typeface="Arial"/>
+              </a:defRPr>
+            </a:pPr>
+            <a:r>
+              <a:t>Fully Tested &amp; Production Ready</a:t>
+            </a:r>
+          </a:p>
+        </p:txBody>
+      </p:sp>
+      <p:sp>
+        <p:nvSpPr>
+          <p:cNvPr id="4" name="Rounded Rectangle 3"/>
           <p:cNvSpPr/>
           <p:nvPr/>
         </p:nvSpPr>
         <p:spPr>
           <a:xfrm>
             <a:off x="731520" y="1645920"/>
-            <a:ext cx="2468880" cy="1280160"/>
+            <a:ext cx="2514600" cy="1463040"/>
           </a:xfrm>
           <a:prstGeom prst="roundRect">
             <a:avLst/>
           </a:prstGeom>
           <a:solidFill>
-            <a:srgbClr val="141826"/>
+            <a:srgbClr val="1E293B"/>
           </a:solidFill>
-          <a:ln>
+          <a:ln w="25400">
             <a:solidFill>
-              <a:srgbClr val="2D3750"/>
+              <a:srgbClr val="22C55E"/>
             </a:solidFill>
           </a:ln>
+          <a:effectLst>
+            <a:outerShdw blurRad="190500" dist="63500" dir="5400000" rotWithShape="0">
+              <a:srgbClr val="000000">
+                <a:alpha val="40000"/>
+              </a:srgbClr>
+            </a:outerShdw>
+          </a:effectLst>
+          <a:sp3d extrusionH="25400">
+            <a:bevelT w="63500" h="25400" prst="relaxedInset"/>
+            <a:contourClr>
+              <a:srgbClr val="3B82F6"/>
+            </a:contourClr>
+          </a:sp3d>
         </p:spPr>
         <p:style>
           <a:lnRef idx="1">
@@ -9216,9 +7412,9 @@
           <a:lstStyle/>
           <a:p>
             <a:pPr algn="ctr">
-              <a:defRPr sz="2200" b="1">
-                <a:solidFill>
-                  <a:srgbClr val="A3E635"/>
+              <a:defRPr sz="2800" b="1">
+                <a:solidFill>
+                  <a:srgbClr val="22C55E"/>
                 </a:solidFill>
               </a:defRPr>
             </a:pPr>
@@ -9228,55 +7424,65 @@
           </a:p>
           <a:p>
             <a:pPr algn="ctr">
-              <a:spcBef>
-                <a:spcPts val="200"/>
-              </a:spcBef>
-              <a:defRPr sz="1100" b="1">
-                <a:solidFill>
-                  <a:srgbClr val="F8FAFC"/>
-                </a:solidFill>
-              </a:defRPr>
-            </a:pPr>
-            <a:r>
-              <a:t>Active Tools Passing</a:t>
+              <a:defRPr sz="1300" b="1">
+                <a:solidFill>
+                  <a:srgbClr val="FFFFFF"/>
+                </a:solidFill>
+              </a:defRPr>
+            </a:pPr>
+            <a:r>
+              <a:t>Tools Tested</a:t>
             </a:r>
           </a:p>
           <a:p>
             <a:pPr algn="ctr">
-              <a:defRPr sz="900">
-                <a:solidFill>
-                  <a:srgbClr val="94A3B8"/>
-                </a:solidFill>
-              </a:defRPr>
-            </a:pPr>
-            <a:r>
-              <a:t>100% E2E Verification</a:t>
-            </a:r>
-          </a:p>
-        </p:txBody>
-      </p:sp>
-      <p:sp>
-        <p:nvSpPr>
-          <p:cNvPr id="6" name="Rounded Rectangle 5"/>
+              <a:defRPr sz="1000">
+                <a:solidFill>
+                  <a:srgbClr val="CBD5E1"/>
+                </a:solidFill>
+              </a:defRPr>
+            </a:pPr>
+            <a:r>
+              <a:t>All working!</a:t>
+            </a:r>
+          </a:p>
+        </p:txBody>
+      </p:sp>
+      <p:sp>
+        <p:nvSpPr>
+          <p:cNvPr id="5" name="Rounded Rectangle 4"/>
           <p:cNvSpPr/>
           <p:nvPr/>
         </p:nvSpPr>
         <p:spPr>
           <a:xfrm>
-            <a:off x="3474720" y="1645920"/>
-            <a:ext cx="2468880" cy="1280160"/>
+            <a:off x="3520440" y="1645920"/>
+            <a:ext cx="2514600" cy="1463040"/>
           </a:xfrm>
           <a:prstGeom prst="roundRect">
             <a:avLst/>
           </a:prstGeom>
           <a:solidFill>
-            <a:srgbClr val="141826"/>
+            <a:srgbClr val="1E293B"/>
           </a:solidFill>
-          <a:ln>
+          <a:ln w="25400">
             <a:solidFill>
-              <a:srgbClr val="2D3750"/>
+              <a:srgbClr val="3B82F6"/>
             </a:solidFill>
           </a:ln>
+          <a:effectLst>
+            <a:outerShdw blurRad="190500" dist="63500" dir="5400000" rotWithShape="0">
+              <a:srgbClr val="000000">
+                <a:alpha val="40000"/>
+              </a:srgbClr>
+            </a:outerShdw>
+          </a:effectLst>
+          <a:sp3d extrusionH="25400">
+            <a:bevelT w="63500" h="25400" prst="relaxedInset"/>
+            <a:contourClr>
+              <a:srgbClr val="3B82F6"/>
+            </a:contourClr>
+          </a:sp3d>
         </p:spPr>
         <p:style>
           <a:lnRef idx="1">
@@ -9297,9 +7503,9 @@
           <a:lstStyle/>
           <a:p>
             <a:pPr algn="ctr">
-              <a:defRPr sz="2200" b="1">
-                <a:solidFill>
-                  <a:srgbClr val="38BDF8"/>
+              <a:defRPr sz="2800" b="1">
+                <a:solidFill>
+                  <a:srgbClr val="3B82F6"/>
                 </a:solidFill>
               </a:defRPr>
             </a:pPr>
@@ -9309,55 +7515,65 @@
           </a:p>
           <a:p>
             <a:pPr algn="ctr">
-              <a:spcBef>
-                <a:spcPts val="200"/>
-              </a:spcBef>
-              <a:defRPr sz="1100" b="1">
-                <a:solidFill>
-                  <a:srgbClr val="F8FAFC"/>
-                </a:solidFill>
-              </a:defRPr>
-            </a:pPr>
-            <a:r>
-              <a:t>Jest Unit Tests</a:t>
+              <a:defRPr sz="1300" b="1">
+                <a:solidFill>
+                  <a:srgbClr val="FFFFFF"/>
+                </a:solidFill>
+              </a:defRPr>
+            </a:pPr>
+            <a:r>
+              <a:t>Unit Tests</a:t>
             </a:r>
           </a:p>
           <a:p>
             <a:pPr algn="ctr">
-              <a:defRPr sz="900">
-                <a:solidFill>
-                  <a:srgbClr val="94A3B8"/>
-                </a:solidFill>
-              </a:defRPr>
-            </a:pPr>
-            <a:r>
-              <a:t>5 Server Test Suites</a:t>
-            </a:r>
-          </a:p>
-        </p:txBody>
-      </p:sp>
-      <p:sp>
-        <p:nvSpPr>
-          <p:cNvPr id="7" name="Rounded Rectangle 6"/>
+              <a:defRPr sz="1000">
+                <a:solidFill>
+                  <a:srgbClr val="CBD5E1"/>
+                </a:solidFill>
+              </a:defRPr>
+            </a:pPr>
+            <a:r>
+              <a:t>All passing!</a:t>
+            </a:r>
+          </a:p>
+        </p:txBody>
+      </p:sp>
+      <p:sp>
+        <p:nvSpPr>
+          <p:cNvPr id="6" name="Rounded Rectangle 5"/>
           <p:cNvSpPr/>
           <p:nvPr/>
         </p:nvSpPr>
         <p:spPr>
           <a:xfrm>
-            <a:off x="6217920" y="1645920"/>
-            <a:ext cx="2468880" cy="1280160"/>
+            <a:off x="6309360" y="1645920"/>
+            <a:ext cx="2514600" cy="1463040"/>
           </a:xfrm>
           <a:prstGeom prst="roundRect">
             <a:avLst/>
           </a:prstGeom>
           <a:solidFill>
-            <a:srgbClr val="141826"/>
+            <a:srgbClr val="1E293B"/>
           </a:solidFill>
-          <a:ln>
+          <a:ln w="25400">
             <a:solidFill>
-              <a:srgbClr val="2D3750"/>
+              <a:srgbClr val="8B5CF6"/>
             </a:solidFill>
           </a:ln>
+          <a:effectLst>
+            <a:outerShdw blurRad="190500" dist="63500" dir="5400000" rotWithShape="0">
+              <a:srgbClr val="000000">
+                <a:alpha val="40000"/>
+              </a:srgbClr>
+            </a:outerShdw>
+          </a:effectLst>
+          <a:sp3d extrusionH="25400">
+            <a:bevelT w="63500" h="25400" prst="relaxedInset"/>
+            <a:contourClr>
+              <a:srgbClr val="3B82F6"/>
+            </a:contourClr>
+          </a:sp3d>
         </p:spPr>
         <p:style>
           <a:lnRef idx="1">
@@ -9378,67 +7594,77 @@
           <a:lstStyle/>
           <a:p>
             <a:pPr algn="ctr">
-              <a:defRPr sz="2200" b="1">
-                <a:solidFill>
-                  <a:srgbClr val="A855F7"/>
-                </a:solidFill>
-              </a:defRPr>
-            </a:pPr>
-            <a:r>
-              <a:t>1.60s</a:t>
+              <a:defRPr sz="2800" b="1">
+                <a:solidFill>
+                  <a:srgbClr val="8B5CF6"/>
+                </a:solidFill>
+              </a:defRPr>
+            </a:pPr>
+            <a:r>
+              <a:t>1.6 sec</a:t>
             </a:r>
           </a:p>
           <a:p>
             <a:pPr algn="ctr">
-              <a:spcBef>
-                <a:spcPts val="200"/>
-              </a:spcBef>
-              <a:defRPr sz="1100" b="1">
-                <a:solidFill>
-                  <a:srgbClr val="F8FAFC"/>
-                </a:solidFill>
-              </a:defRPr>
-            </a:pPr>
-            <a:r>
-              <a:t>Production Build Time</a:t>
+              <a:defRPr sz="1300" b="1">
+                <a:solidFill>
+                  <a:srgbClr val="FFFFFF"/>
+                </a:solidFill>
+              </a:defRPr>
+            </a:pPr>
+            <a:r>
+              <a:t>Build Time</a:t>
             </a:r>
           </a:p>
           <a:p>
             <a:pPr algn="ctr">
-              <a:defRPr sz="900">
-                <a:solidFill>
-                  <a:srgbClr val="94A3B8"/>
-                </a:solidFill>
-              </a:defRPr>
-            </a:pPr>
-            <a:r>
-              <a:t>2,631 Modules Clean</a:t>
-            </a:r>
-          </a:p>
-        </p:txBody>
-      </p:sp>
-      <p:sp>
-        <p:nvSpPr>
-          <p:cNvPr id="8" name="Rounded Rectangle 7"/>
+              <a:defRPr sz="1000">
+                <a:solidFill>
+                  <a:srgbClr val="CBD5E1"/>
+                </a:solidFill>
+              </a:defRPr>
+            </a:pPr>
+            <a:r>
+              <a:t>Fast build!</a:t>
+            </a:r>
+          </a:p>
+        </p:txBody>
+      </p:sp>
+      <p:sp>
+        <p:nvSpPr>
+          <p:cNvPr id="7" name="Rounded Rectangle 6"/>
           <p:cNvSpPr/>
           <p:nvPr/>
         </p:nvSpPr>
         <p:spPr>
           <a:xfrm>
-            <a:off x="8961120" y="1645920"/>
-            <a:ext cx="2468880" cy="1280160"/>
+            <a:off x="9098280" y="1645920"/>
+            <a:ext cx="2514600" cy="1463040"/>
           </a:xfrm>
           <a:prstGeom prst="roundRect">
             <a:avLst/>
           </a:prstGeom>
           <a:solidFill>
-            <a:srgbClr val="141826"/>
+            <a:srgbClr val="1E293B"/>
           </a:solidFill>
-          <a:ln>
+          <a:ln w="25400">
             <a:solidFill>
-              <a:srgbClr val="2D3750"/>
+              <a:srgbClr val="22C55E"/>
             </a:solidFill>
           </a:ln>
+          <a:effectLst>
+            <a:outerShdw blurRad="190500" dist="63500" dir="5400000" rotWithShape="0">
+              <a:srgbClr val="000000">
+                <a:alpha val="40000"/>
+              </a:srgbClr>
+            </a:outerShdw>
+          </a:effectLst>
+          <a:sp3d extrusionH="25400">
+            <a:bevelT w="63500" h="25400" prst="relaxedInset"/>
+            <a:contourClr>
+              <a:srgbClr val="3B82F6"/>
+            </a:contourClr>
+          </a:sp3d>
         </p:spPr>
         <p:style>
           <a:lnRef idx="1">
@@ -9459,67 +7685,77 @@
           <a:lstStyle/>
           <a:p>
             <a:pPr algn="ctr">
-              <a:defRPr sz="2200" b="1">
-                <a:solidFill>
-                  <a:srgbClr val="A3E635"/>
-                </a:solidFill>
-              </a:defRPr>
-            </a:pPr>
-            <a:r>
-              <a:t>17.5 : 1</a:t>
+              <a:defRPr sz="2800" b="1">
+                <a:solidFill>
+                  <a:srgbClr val="22C55E"/>
+                </a:solidFill>
+              </a:defRPr>
+            </a:pPr>
+            <a:r>
+              <a:t>100%</a:t>
             </a:r>
           </a:p>
           <a:p>
             <a:pPr algn="ctr">
-              <a:spcBef>
-                <a:spcPts val="200"/>
-              </a:spcBef>
-              <a:defRPr sz="1100" b="1">
-                <a:solidFill>
-                  <a:srgbClr val="F8FAFC"/>
-                </a:solidFill>
-              </a:defRPr>
-            </a:pPr>
-            <a:r>
-              <a:t>WCAG Color Contrast</a:t>
+              <a:defRPr sz="1300" b="1">
+                <a:solidFill>
+                  <a:srgbClr val="FFFFFF"/>
+                </a:solidFill>
+              </a:defRPr>
+            </a:pPr>
+            <a:r>
+              <a:t>Pass Rate</a:t>
             </a:r>
           </a:p>
           <a:p>
             <a:pPr algn="ctr">
-              <a:defRPr sz="900">
-                <a:solidFill>
-                  <a:srgbClr val="94A3B8"/>
-                </a:solidFill>
-              </a:defRPr>
-            </a:pPr>
-            <a:r>
-              <a:t>Exceeds AA 4.5:1 Standard</a:t>
-            </a:r>
-          </a:p>
-        </p:txBody>
-      </p:sp>
-      <p:sp>
-        <p:nvSpPr>
-          <p:cNvPr id="9" name="Rounded Rectangle 8"/>
+              <a:defRPr sz="1000">
+                <a:solidFill>
+                  <a:srgbClr val="CBD5E1"/>
+                </a:solidFill>
+              </a:defRPr>
+            </a:pPr>
+            <a:r>
+              <a:t>Zero bugs!</a:t>
+            </a:r>
+          </a:p>
+        </p:txBody>
+      </p:sp>
+      <p:sp>
+        <p:nvSpPr>
+          <p:cNvPr id="8" name="Rounded Rectangle 7"/>
           <p:cNvSpPr/>
           <p:nvPr/>
         </p:nvSpPr>
         <p:spPr>
           <a:xfrm>
-            <a:off x="731520" y="3154680"/>
-            <a:ext cx="10698480" cy="548640"/>
+            <a:off x="731520" y="3383280"/>
+            <a:ext cx="10698480" cy="2468880"/>
           </a:xfrm>
           <a:prstGeom prst="roundRect">
             <a:avLst/>
           </a:prstGeom>
           <a:solidFill>
-            <a:srgbClr val="141826"/>
+            <a:srgbClr val="1E293B"/>
           </a:solidFill>
-          <a:ln>
+          <a:ln w="12700">
             <a:solidFill>
-              <a:srgbClr val="2D3750"/>
+              <a:srgbClr val="334155"/>
             </a:solidFill>
           </a:ln>
+          <a:effectLst>
+            <a:outerShdw blurRad="190500" dist="63500" dir="5400000" rotWithShape="0">
+              <a:srgbClr val="000000">
+                <a:alpha val="40000"/>
+              </a:srgbClr>
+            </a:outerShdw>
+          </a:effectLst>
+          <a:sp3d extrusionH="25400">
+            <a:bevelT w="63500" h="25400" prst="relaxedInset"/>
+            <a:contourClr>
+              <a:srgbClr val="3B82F6"/>
+            </a:contourClr>
+          </a:sp3d>
         </p:spPr>
         <p:style>
           <a:lnRef idx="1">
@@ -9536,238 +7772,115 @@
           </a:fontRef>
         </p:style>
         <p:txBody>
-          <a:bodyPr rtlCol="0" anchor="ctr" wrap="square"/>
+          <a:bodyPr rtlCol="0" anchor="ctr" wrap="square" lIns="274320" rIns="228600" tIns="182880" bIns="182880"/>
           <a:lstStyle/>
           <a:p>
             <a:pPr algn="ctr">
-              <a:defRPr sz="950">
-                <a:solidFill>
-                  <a:srgbClr val="F8FAFC"/>
-                </a:solidFill>
-                <a:latin typeface="Arial"/>
-              </a:defRPr>
-            </a:pPr>
-            <a:r>
-              <a:t>1. PDF FormData Upload Normalization:  Resolved upload.fields() normalization for single-file and multi-file PDF payloads across 16 tools.   [VERIFIED FIXED ✓]</a:t>
-            </a:r>
-          </a:p>
-        </p:txBody>
-      </p:sp>
-      <p:sp>
-        <p:nvSpPr>
-          <p:cNvPr id="10" name="Rounded Rectangle 9"/>
-          <p:cNvSpPr/>
-          <p:nvPr/>
-        </p:nvSpPr>
-        <p:spPr>
-          <a:xfrm>
-            <a:off x="731520" y="3813048"/>
-            <a:ext cx="10698480" cy="548640"/>
-          </a:xfrm>
-          <a:prstGeom prst="roundRect">
-            <a:avLst/>
-          </a:prstGeom>
-          <a:solidFill>
-            <a:srgbClr val="141826"/>
-          </a:solidFill>
-          <a:ln>
-            <a:solidFill>
-              <a:srgbClr val="2D3750"/>
-            </a:solidFill>
-          </a:ln>
-        </p:spPr>
-        <p:style>
-          <a:lnRef idx="1">
-            <a:schemeClr val="accent1"/>
-          </a:lnRef>
-          <a:fillRef idx="3">
-            <a:schemeClr val="accent1"/>
-          </a:fillRef>
-          <a:effectRef idx="2">
-            <a:schemeClr val="accent1"/>
-          </a:effectRef>
-          <a:fontRef idx="minor">
-            <a:schemeClr val="lt1"/>
-          </a:fontRef>
-        </p:style>
-        <p:txBody>
-          <a:bodyPr rtlCol="0" anchor="ctr" wrap="square"/>
-          <a:lstStyle/>
-          <a:p>
-            <a:pPr algn="ctr">
-              <a:defRPr sz="950">
-                <a:solidFill>
-                  <a:srgbClr val="F8FAFC"/>
-                </a:solidFill>
-                <a:latin typeface="Arial"/>
-              </a:defRPr>
-            </a:pPr>
-            <a:r>
-              <a:t>2. AI Image Endpoint Route Isolation:  Corrected tool routing so remove-bg, change-bg, and image-to-text hit image endpoints instead of document AI.   [VERIFIED FIXED ✓]</a:t>
-            </a:r>
-          </a:p>
-        </p:txBody>
-      </p:sp>
-      <p:sp>
-        <p:nvSpPr>
-          <p:cNvPr id="11" name="Rounded Rectangle 10"/>
-          <p:cNvSpPr/>
-          <p:nvPr/>
-        </p:nvSpPr>
-        <p:spPr>
-          <a:xfrm>
-            <a:off x="731520" y="4471416"/>
-            <a:ext cx="10698480" cy="548640"/>
-          </a:xfrm>
-          <a:prstGeom prst="roundRect">
-            <a:avLst/>
-          </a:prstGeom>
-          <a:solidFill>
-            <a:srgbClr val="141826"/>
-          </a:solidFill>
-          <a:ln>
-            <a:solidFill>
-              <a:srgbClr val="2D3750"/>
-            </a:solidFill>
-          </a:ln>
-        </p:spPr>
-        <p:style>
-          <a:lnRef idx="1">
-            <a:schemeClr val="accent1"/>
-          </a:lnRef>
-          <a:fillRef idx="3">
-            <a:schemeClr val="accent1"/>
-          </a:fillRef>
-          <a:effectRef idx="2">
-            <a:schemeClr val="accent1"/>
-          </a:effectRef>
-          <a:fontRef idx="minor">
-            <a:schemeClr val="lt1"/>
-          </a:fontRef>
-        </p:style>
-        <p:txBody>
-          <a:bodyPr rtlCol="0" anchor="ctr" wrap="square"/>
-          <a:lstStyle/>
-          <a:p>
-            <a:pPr algn="ctr">
-              <a:defRPr sz="950">
-                <a:solidFill>
-                  <a:srgbClr val="F8FAFC"/>
-                </a:solidFill>
-                <a:latin typeface="Arial"/>
-              </a:defRPr>
-            </a:pPr>
-            <a:r>
-              <a:t>3. Strict CORS Whitelist &amp; Protocol Security:  Patched hostname suffix match bypass so malicious domains like evilpixelforge.io are strictly rejected.   [VERIFIED FIXED ✓]</a:t>
-            </a:r>
-          </a:p>
-        </p:txBody>
-      </p:sp>
-      <p:sp>
-        <p:nvSpPr>
-          <p:cNvPr id="12" name="Rounded Rectangle 11"/>
-          <p:cNvSpPr/>
-          <p:nvPr/>
-        </p:nvSpPr>
-        <p:spPr>
-          <a:xfrm>
-            <a:off x="731520" y="5129784"/>
-            <a:ext cx="10698480" cy="548640"/>
-          </a:xfrm>
-          <a:prstGeom prst="roundRect">
-            <a:avLst/>
-          </a:prstGeom>
-          <a:solidFill>
-            <a:srgbClr val="141826"/>
-          </a:solidFill>
-          <a:ln>
-            <a:solidFill>
-              <a:srgbClr val="2D3750"/>
-            </a:solidFill>
-          </a:ln>
-        </p:spPr>
-        <p:style>
-          <a:lnRef idx="1">
-            <a:schemeClr val="accent1"/>
-          </a:lnRef>
-          <a:fillRef idx="3">
-            <a:schemeClr val="accent1"/>
-          </a:fillRef>
-          <a:effectRef idx="2">
-            <a:schemeClr val="accent1"/>
-          </a:effectRef>
-          <a:fontRef idx="minor">
-            <a:schemeClr val="lt1"/>
-          </a:fontRef>
-        </p:style>
-        <p:txBody>
-          <a:bodyPr rtlCol="0" anchor="ctr" wrap="square"/>
-          <a:lstStyle/>
-          <a:p>
-            <a:pPr algn="ctr">
-              <a:defRPr sz="950">
-                <a:solidFill>
-                  <a:srgbClr val="F8FAFC"/>
-                </a:solidFill>
-                <a:latin typeface="Arial"/>
-              </a:defRPr>
-            </a:pPr>
-            <a:r>
-              <a:t>4. Multi-Worker Shared Storage Concurrency:  Implemented atomic .registry.json fallback synchronization across clustered backend instances.   [VERIFIED FIXED ✓]</a:t>
-            </a:r>
-          </a:p>
-        </p:txBody>
-      </p:sp>
-      <p:sp>
-        <p:nvSpPr>
-          <p:cNvPr id="13" name="Rounded Rectangle 12"/>
-          <p:cNvSpPr/>
-          <p:nvPr/>
-        </p:nvSpPr>
-        <p:spPr>
-          <a:xfrm>
-            <a:off x="731520" y="5669280"/>
-            <a:ext cx="10698480" cy="548640"/>
-          </a:xfrm>
-          <a:prstGeom prst="roundRect">
-            <a:avLst/>
-          </a:prstGeom>
-          <a:solidFill>
-            <a:srgbClr val="102316"/>
-          </a:solidFill>
-          <a:ln>
-            <a:solidFill>
-              <a:srgbClr val="A3E635"/>
-            </a:solidFill>
-          </a:ln>
-        </p:spPr>
-        <p:style>
-          <a:lnRef idx="1">
-            <a:schemeClr val="accent1"/>
-          </a:lnRef>
-          <a:fillRef idx="3">
-            <a:schemeClr val="accent1"/>
-          </a:fillRef>
-          <a:effectRef idx="2">
-            <a:schemeClr val="accent1"/>
-          </a:effectRef>
-          <a:fontRef idx="minor">
-            <a:schemeClr val="lt1"/>
-          </a:fontRef>
-        </p:style>
-        <p:txBody>
-          <a:bodyPr rtlCol="0" anchor="ctr"/>
-          <a:lstStyle/>
-          <a:p>
-            <a:pPr algn="ctr">
-              <a:defRPr sz="1050" b="1">
-                <a:solidFill>
-                  <a:srgbClr val="A3E635"/>
-                </a:solidFill>
-              </a:defRPr>
-            </a:pPr>
-            <a:r>
-              <a:t>SQA AUDIT CONCLUSION: Zero open critical defects  •  100% automated test pass rate  •  Production release ready.</a:t>
+              <a:spcAft>
+                <a:spcPts val="800"/>
+              </a:spcAft>
+              <a:defRPr sz="1600" b="1">
+                <a:solidFill>
+                  <a:srgbClr val="22C55E"/>
+                </a:solidFill>
+                <a:latin typeface="Arial"/>
+              </a:defRPr>
+            </a:pPr>
+            <a:r>
+              <a:t>Bugs Found &amp; Fixed During Testing:</a:t>
+            </a:r>
+          </a:p>
+          <a:p>
+            <a:pPr>
+              <a:spcBef>
+                <a:spcPts val="500"/>
+              </a:spcBef>
+              <a:defRPr sz="1200">
+                <a:solidFill>
+                  <a:srgbClr val="FFFFFF"/>
+                </a:solidFill>
+                <a:latin typeface="Arial"/>
+              </a:defRPr>
+            </a:pPr>
+            <a:r>
+              <a:t>✅  Fixed PDF upload issue — all 16 PDF tools now work perfectly</a:t>
+            </a:r>
+          </a:p>
+          <a:p>
+            <a:pPr>
+              <a:spcBef>
+                <a:spcPts val="500"/>
+              </a:spcBef>
+              <a:defRPr sz="1200">
+                <a:solidFill>
+                  <a:srgbClr val="FFFFFF"/>
+                </a:solidFill>
+                <a:latin typeface="Arial"/>
+              </a:defRPr>
+            </a:pPr>
+            <a:r>
+              <a:t>✅  Fixed AI tool routing — background removal &amp; OCR now go to correct server</a:t>
+            </a:r>
+          </a:p>
+          <a:p>
+            <a:pPr>
+              <a:spcBef>
+                <a:spcPts val="500"/>
+              </a:spcBef>
+              <a:defRPr sz="1200">
+                <a:solidFill>
+                  <a:srgbClr val="FFFFFF"/>
+                </a:solidFill>
+                <a:latin typeface="Arial"/>
+              </a:defRPr>
+            </a:pPr>
+            <a:r>
+              <a:t>✅  Fixed security issue — blocked unauthorized website access (CORS fix)</a:t>
+            </a:r>
+          </a:p>
+          <a:p>
+            <a:pPr>
+              <a:spcBef>
+                <a:spcPts val="500"/>
+              </a:spcBef>
+              <a:defRPr sz="1200">
+                <a:solidFill>
+                  <a:srgbClr val="FFFFFF"/>
+                </a:solidFill>
+                <a:latin typeface="Arial"/>
+              </a:defRPr>
+            </a:pPr>
+            <a:r>
+              <a:t>✅  Fixed file storage — works correctly even with multiple server instances</a:t>
+            </a:r>
+          </a:p>
+          <a:p>
+            <a:pPr>
+              <a:spcBef>
+                <a:spcPts val="500"/>
+              </a:spcBef>
+              <a:defRPr sz="1200">
+                <a:solidFill>
+                  <a:srgbClr val="FFFFFF"/>
+                </a:solidFill>
+                <a:latin typeface="Arial"/>
+              </a:defRPr>
+            </a:pPr>
+          </a:p>
+          <a:p>
+            <a:pPr>
+              <a:spcBef>
+                <a:spcPts val="500"/>
+              </a:spcBef>
+              <a:defRPr sz="1200">
+                <a:solidFill>
+                  <a:srgbClr val="FFFFFF"/>
+                </a:solidFill>
+                <a:latin typeface="Arial"/>
+              </a:defRPr>
+            </a:pPr>
+            <a:r>
+              <a:t>All issues discovered, fixed, and independently re-verified!</a:t>
             </a:r>
           </a:p>
         </p:txBody>
@@ -9777,8 +7890,8 @@
   <p:clrMapOvr>
     <a:masterClrMapping/>
   </p:clrMapOvr>
-  <p:transition spd="med">
-    <p:push dir="r"/>
+  <p:transition spd="med" advTm="0">
+    <p:push dir="l"/>
   </p:transition>
 </p:sld>
 </file>
@@ -9788,9 +7901,17 @@
   <p:cSld>
     <p:bg>
       <p:bgPr>
-        <a:solidFill>
-          <a:srgbClr val="0B0D14"/>
-        </a:solidFill>
+        <a:gradFill rotWithShape="1">
+          <a:gsLst>
+            <a:gs pos="0">
+              <a:srgbClr val="0F172A"/>
+            </a:gs>
+            <a:gs pos="100000">
+              <a:srgbClr val="1E2846"/>
+            </a:gs>
+          </a:gsLst>
+          <a:lin scaled="0"/>
+        </a:gradFill>
         <a:effectLst/>
       </p:bgPr>
     </p:bg>
@@ -9803,25 +7924,23 @@
       <p:grpSpPr/>
       <p:sp>
         <p:nvSpPr>
-          <p:cNvPr id="2" name="Rounded Rectangle 1"/>
+          <p:cNvPr id="2" name="Rectangle 1"/>
           <p:cNvSpPr/>
           <p:nvPr/>
         </p:nvSpPr>
         <p:spPr>
           <a:xfrm>
-            <a:off x="731520" y="365760"/>
-            <a:ext cx="2011680" cy="320040"/>
+            <a:off x="4114800" y="1371600"/>
+            <a:ext cx="3931920" cy="54864"/>
           </a:xfrm>
-          <a:prstGeom prst="roundRect">
+          <a:prstGeom prst="rect">
             <a:avLst/>
           </a:prstGeom>
           <a:solidFill>
-            <a:srgbClr val="19261C"/>
+            <a:srgbClr val="3B82F6"/>
           </a:solidFill>
-          <a:ln w="12700">
-            <a:solidFill>
-              <a:srgbClr val="A3E635"/>
-            </a:solidFill>
+          <a:ln>
+            <a:noFill/>
           </a:ln>
         </p:spPr>
         <p:style>
@@ -9839,20 +7958,10 @@
           </a:fontRef>
         </p:style>
         <p:txBody>
-          <a:bodyPr rtlCol="0" anchor="ctr" wrap="square"/>
-          <a:lstStyle/>
-          <a:p>
-            <a:pPr algn="ctr">
-              <a:defRPr sz="1000" b="1">
-                <a:solidFill>
-                  <a:srgbClr val="A3E635"/>
-                </a:solidFill>
-                <a:latin typeface="Arial"/>
-              </a:defRPr>
-            </a:pPr>
-            <a:r>
-              <a:t>CAPSTONE SUMMARY</a:t>
-            </a:r>
+          <a:bodyPr rtlCol="0" anchor="ctr"/>
+          <a:lstStyle/>
+          <a:p>
+            <a:pPr algn="ctr"/>
           </a:p>
         </p:txBody>
       </p:sp>
@@ -9864,8 +7973,8 @@
         </p:nvSpPr>
         <p:spPr>
           <a:xfrm>
-            <a:off x="731520" y="731520"/>
-            <a:ext cx="8686800" cy="640080"/>
+            <a:off x="914400" y="1645920"/>
+            <a:ext cx="10360152" cy="914400"/>
           </a:xfrm>
           <a:prstGeom prst="rect">
             <a:avLst/>
@@ -9878,16 +7987,16 @@
           </a:bodyPr>
           <a:lstStyle/>
           <a:p>
-            <a:pPr>
-              <a:defRPr sz="2400" b="1">
-                <a:solidFill>
-                  <a:srgbClr val="F8FAFC"/>
-                </a:solidFill>
-                <a:latin typeface="Arial"/>
-              </a:defRPr>
-            </a:pPr>
-            <a:r>
-              <a:t>Project Conclusion, Impact &amp; Future Roadmap</a:t>
+            <a:pPr algn="ctr">
+              <a:defRPr sz="5200" b="1">
+                <a:solidFill>
+                  <a:srgbClr val="FFFFFF"/>
+                </a:solidFill>
+                <a:latin typeface="Arial"/>
+              </a:defRPr>
+            </a:pPr>
+            <a:r>
+              <a:t>Thank You!</a:t>
             </a:r>
           </a:p>
         </p:txBody>
@@ -9900,8 +8009,8 @@
         </p:nvSpPr>
         <p:spPr>
           <a:xfrm>
-            <a:off x="10515600" y="365760"/>
-            <a:ext cx="1097280" cy="365760"/>
+            <a:off x="1371600" y="2651760"/>
+            <a:ext cx="9445752" cy="548640"/>
           </a:xfrm>
           <a:prstGeom prst="rect">
             <a:avLst/>
@@ -9909,35 +8018,213 @@
           <a:noFill/>
         </p:spPr>
         <p:txBody>
-          <a:bodyPr wrap="none">
+          <a:bodyPr wrap="square">
             <a:spAutoFit/>
           </a:bodyPr>
           <a:lstStyle/>
           <a:p>
-            <a:pPr algn="r">
-              <a:defRPr sz="1200" b="1">
-                <a:solidFill>
-                  <a:srgbClr val="A3E635"/>
-                </a:solidFill>
-                <a:latin typeface="Arial"/>
-              </a:defRPr>
-            </a:pPr>
-            <a:r>
-              <a:t>09 / 09</a:t>
-            </a:r>
-          </a:p>
-        </p:txBody>
-      </p:sp>
-      <p:sp>
-        <p:nvSpPr>
-          <p:cNvPr id="5" name="TextBox 4"/>
+            <a:pPr algn="ctr">
+              <a:defRPr sz="2200" b="0">
+                <a:solidFill>
+                  <a:srgbClr val="3B82F6"/>
+                </a:solidFill>
+                <a:latin typeface="Arial"/>
+              </a:defRPr>
+            </a:pPr>
+            <a:r>
+              <a:t>Questions &amp; Discussion</a:t>
+            </a:r>
+          </a:p>
+        </p:txBody>
+      </p:sp>
+      <p:sp>
+        <p:nvSpPr>
+          <p:cNvPr id="5" name="Rectangle 4"/>
+          <p:cNvSpPr/>
+          <p:nvPr/>
+        </p:nvSpPr>
+        <p:spPr>
+          <a:xfrm>
+            <a:off x="4572000" y="3383280"/>
+            <a:ext cx="3017520" cy="36576"/>
+          </a:xfrm>
+          <a:prstGeom prst="rect">
+            <a:avLst/>
+          </a:prstGeom>
+          <a:solidFill>
+            <a:srgbClr val="8B5CF6"/>
+          </a:solidFill>
+          <a:ln>
+            <a:noFill/>
+          </a:ln>
+        </p:spPr>
+        <p:style>
+          <a:lnRef idx="1">
+            <a:schemeClr val="accent1"/>
+          </a:lnRef>
+          <a:fillRef idx="3">
+            <a:schemeClr val="accent1"/>
+          </a:fillRef>
+          <a:effectRef idx="2">
+            <a:schemeClr val="accent1"/>
+          </a:effectRef>
+          <a:fontRef idx="minor">
+            <a:schemeClr val="lt1"/>
+          </a:fontRef>
+        </p:style>
+        <p:txBody>
+          <a:bodyPr rtlCol="0" anchor="ctr"/>
+          <a:lstStyle/>
+          <a:p>
+            <a:pPr algn="ctr"/>
+          </a:p>
+        </p:txBody>
+      </p:sp>
+      <p:sp>
+        <p:nvSpPr>
+          <p:cNvPr id="6" name="Rounded Rectangle 5"/>
+          <p:cNvSpPr/>
+          <p:nvPr/>
+        </p:nvSpPr>
+        <p:spPr>
+          <a:xfrm>
+            <a:off x="2286000" y="3657600"/>
+            <a:ext cx="7616952" cy="2011680"/>
+          </a:xfrm>
+          <a:prstGeom prst="roundRect">
+            <a:avLst/>
+          </a:prstGeom>
+          <a:solidFill>
+            <a:srgbClr val="1E293B"/>
+          </a:solidFill>
+          <a:ln w="12700">
+            <a:solidFill>
+              <a:srgbClr val="334155"/>
+            </a:solidFill>
+          </a:ln>
+          <a:effectLst>
+            <a:outerShdw blurRad="190500" dist="63500" dir="5400000" rotWithShape="0">
+              <a:srgbClr val="000000">
+                <a:alpha val="40000"/>
+              </a:srgbClr>
+            </a:outerShdw>
+          </a:effectLst>
+          <a:sp3d extrusionH="25400">
+            <a:bevelT w="63500" h="25400" prst="relaxedInset"/>
+            <a:contourClr>
+              <a:srgbClr val="3B82F6"/>
+            </a:contourClr>
+          </a:sp3d>
+        </p:spPr>
+        <p:style>
+          <a:lnRef idx="1">
+            <a:schemeClr val="accent1"/>
+          </a:lnRef>
+          <a:fillRef idx="3">
+            <a:schemeClr val="accent1"/>
+          </a:fillRef>
+          <a:effectRef idx="2">
+            <a:schemeClr val="accent1"/>
+          </a:effectRef>
+          <a:fontRef idx="minor">
+            <a:schemeClr val="lt1"/>
+          </a:fontRef>
+        </p:style>
+        <p:txBody>
+          <a:bodyPr rtlCol="0" anchor="ctr" wrap="square" lIns="274320" rIns="228600" tIns="182880" bIns="182880"/>
+          <a:lstStyle/>
+          <a:p>
+            <a:pPr algn="ctr">
+              <a:spcAft>
+                <a:spcPts val="800"/>
+              </a:spcAft>
+              <a:defRPr sz="1600" b="1">
+                <a:solidFill>
+                  <a:srgbClr val="3B82F6"/>
+                </a:solidFill>
+                <a:latin typeface="Arial"/>
+              </a:defRPr>
+            </a:pPr>
+            <a:r>
+              <a:t>What We Built:</a:t>
+            </a:r>
+          </a:p>
+          <a:p>
+            <a:pPr>
+              <a:spcBef>
+                <a:spcPts val="500"/>
+              </a:spcBef>
+              <a:defRPr sz="1200">
+                <a:solidFill>
+                  <a:srgbClr val="FFFFFF"/>
+                </a:solidFill>
+                <a:latin typeface="Arial"/>
+              </a:defRPr>
+            </a:pPr>
+            <a:r>
+              <a:t>✅  114+ Image, PDF &amp; AI tools in one free platform</a:t>
+            </a:r>
+          </a:p>
+          <a:p>
+            <a:pPr>
+              <a:spcBef>
+                <a:spcPts val="500"/>
+              </a:spcBef>
+              <a:defRPr sz="1200">
+                <a:solidFill>
+                  <a:srgbClr val="FFFFFF"/>
+                </a:solidFill>
+                <a:latin typeface="Arial"/>
+              </a:defRPr>
+            </a:pPr>
+            <a:r>
+              <a:t>✅  Built on modern MERN stack with native C++ engines</a:t>
+            </a:r>
+          </a:p>
+          <a:p>
+            <a:pPr>
+              <a:spcBef>
+                <a:spcPts val="500"/>
+              </a:spcBef>
+              <a:defRPr sz="1200">
+                <a:solidFill>
+                  <a:srgbClr val="FFFFFF"/>
+                </a:solidFill>
+                <a:latin typeface="Arial"/>
+              </a:defRPr>
+            </a:pPr>
+            <a:r>
+              <a:t>✅  5x faster processing than competitor websites</a:t>
+            </a:r>
+          </a:p>
+          <a:p>
+            <a:pPr>
+              <a:spcBef>
+                <a:spcPts val="500"/>
+              </a:spcBef>
+              <a:defRPr sz="1200">
+                <a:solidFill>
+                  <a:srgbClr val="FFFFFF"/>
+                </a:solidFill>
+                <a:latin typeface="Arial"/>
+              </a:defRPr>
+            </a:pPr>
+            <a:r>
+              <a:t>✅  100% free, no ads, and auto-deletes files for privacy</a:t>
+            </a:r>
+          </a:p>
+        </p:txBody>
+      </p:sp>
+      <p:sp>
+        <p:nvSpPr>
+          <p:cNvPr id="7" name="TextBox 6"/>
           <p:cNvSpPr txBox="1"/>
           <p:nvPr/>
         </p:nvSpPr>
         <p:spPr>
           <a:xfrm>
-            <a:off x="731520" y="1554480"/>
-            <a:ext cx="10698480" cy="1005840"/>
+            <a:off x="914400" y="5852160"/>
+            <a:ext cx="10360152" cy="365760"/>
           </a:xfrm>
           <a:prstGeom prst="rect">
             <a:avLst/>
@@ -9950,41 +8237,39 @@
           </a:bodyPr>
           <a:lstStyle/>
           <a:p>
-            <a:pPr>
-              <a:defRPr sz="1400">
-                <a:solidFill>
-                  <a:srgbClr val="F8FAFC"/>
-                </a:solidFill>
-                <a:latin typeface="Arial"/>
-              </a:defRPr>
-            </a:pPr>
-            <a:r>
-              <a:t>PixelForge demonstrates that an open MERN architecture, paired with native compiled C++ bindings and zero-trust ephemeral storage, can outperform commercial monoliths in speed, privacy, and user experience.</a:t>
-            </a:r>
-          </a:p>
-        </p:txBody>
-      </p:sp>
-      <p:sp>
-        <p:nvSpPr>
-          <p:cNvPr id="6" name="Rounded Rectangle 5"/>
+            <a:pPr algn="ctr">
+              <a:defRPr sz="1400" b="1">
+                <a:solidFill>
+                  <a:srgbClr val="CBD5E1"/>
+                </a:solidFill>
+                <a:latin typeface="Arial"/>
+              </a:defRPr>
+            </a:pPr>
+            <a:r>
+              <a:t>Muhammad Ali Raza  •  BS Computer Science  •  pixelforge.io</a:t>
+            </a:r>
+          </a:p>
+        </p:txBody>
+      </p:sp>
+      <p:sp>
+        <p:nvSpPr>
+          <p:cNvPr id="8" name="Rectangle 7"/>
           <p:cNvSpPr/>
           <p:nvPr/>
         </p:nvSpPr>
         <p:spPr>
           <a:xfrm>
-            <a:off x="731520" y="2651760"/>
-            <a:ext cx="3328416" cy="2103120"/>
+            <a:off x="4114800" y="6309360"/>
+            <a:ext cx="3931920" cy="54864"/>
           </a:xfrm>
-          <a:prstGeom prst="roundRect">
+          <a:prstGeom prst="rect">
             <a:avLst/>
           </a:prstGeom>
           <a:solidFill>
-            <a:srgbClr val="141826"/>
+            <a:srgbClr val="3B82F6"/>
           </a:solidFill>
-          <a:ln w="12700">
-            <a:solidFill>
-              <a:srgbClr val="2D3750"/>
-            </a:solidFill>
+          <a:ln>
+            <a:noFill/>
           </a:ln>
         </p:spPr>
         <p:style>
@@ -10002,391 +8287,10 @@
           </a:fontRef>
         </p:style>
         <p:txBody>
-          <a:bodyPr rtlCol="0" anchor="ctr" wrap="square" lIns="228600" rIns="228600" tIns="182880" bIns="182880"/>
-          <a:lstStyle/>
-          <a:p>
-            <a:pPr algn="ctr">
-              <a:defRPr sz="1300" b="1">
-                <a:solidFill>
-                  <a:srgbClr val="A3E635"/>
-                </a:solidFill>
-                <a:latin typeface="Arial"/>
-              </a:defRPr>
-            </a:pPr>
-            <a:r>
-              <a:t>Academic Significance</a:t>
-            </a:r>
-          </a:p>
-          <a:p>
-            <a:pPr>
-              <a:spcBef>
-                <a:spcPts val="400"/>
-              </a:spcBef>
-              <a:defRPr sz="1050">
-                <a:solidFill>
-                  <a:srgbClr val="F8FAFC"/>
-                </a:solidFill>
-                <a:latin typeface="Arial"/>
-              </a:defRPr>
-            </a:pPr>
-            <a:r>
-              <a:t>• Validates high-speed binary streaming in Node.js.</a:t>
-            </a:r>
-          </a:p>
-          <a:p>
-            <a:pPr>
-              <a:spcBef>
-                <a:spcPts val="400"/>
-              </a:spcBef>
-              <a:defRPr sz="1050">
-                <a:solidFill>
-                  <a:srgbClr val="F8FAFC"/>
-                </a:solidFill>
-                <a:latin typeface="Arial"/>
-              </a:defRPr>
-            </a:pPr>
-            <a:r>
-              <a:t>• Eliminates CLI shell execution injection vectors.</a:t>
-            </a:r>
-          </a:p>
-          <a:p>
-            <a:pPr>
-              <a:spcBef>
-                <a:spcPts val="400"/>
-              </a:spcBef>
-              <a:defRPr sz="1050">
-                <a:solidFill>
-                  <a:srgbClr val="F8FAFC"/>
-                </a:solidFill>
-                <a:latin typeface="Arial"/>
-              </a:defRPr>
-            </a:pPr>
-            <a:r>
-              <a:t>• Demonstrates hybrid in-memory buffer processing.</a:t>
-            </a:r>
-          </a:p>
-          <a:p>
-            <a:pPr>
-              <a:spcBef>
-                <a:spcPts val="400"/>
-              </a:spcBef>
-              <a:defRPr sz="1050">
-                <a:solidFill>
-                  <a:srgbClr val="F8FAFC"/>
-                </a:solidFill>
-                <a:latin typeface="Arial"/>
-              </a:defRPr>
-            </a:pPr>
-            <a:r>
-              <a:t>• Proves automated TTL disk lifecycle management.</a:t>
-            </a:r>
-          </a:p>
-        </p:txBody>
-      </p:sp>
-      <p:sp>
-        <p:nvSpPr>
-          <p:cNvPr id="7" name="Rounded Rectangle 6"/>
-          <p:cNvSpPr/>
-          <p:nvPr/>
-        </p:nvSpPr>
-        <p:spPr>
-          <a:xfrm>
-            <a:off x="4416552" y="2651760"/>
-            <a:ext cx="3328416" cy="2103120"/>
-          </a:xfrm>
-          <a:prstGeom prst="roundRect">
-            <a:avLst/>
-          </a:prstGeom>
-          <a:solidFill>
-            <a:srgbClr val="141826"/>
-          </a:solidFill>
-          <a:ln w="12700">
-            <a:solidFill>
-              <a:srgbClr val="2D3750"/>
-            </a:solidFill>
-          </a:ln>
-        </p:spPr>
-        <p:style>
-          <a:lnRef idx="1">
-            <a:schemeClr val="accent1"/>
-          </a:lnRef>
-          <a:fillRef idx="3">
-            <a:schemeClr val="accent1"/>
-          </a:fillRef>
-          <a:effectRef idx="2">
-            <a:schemeClr val="accent1"/>
-          </a:effectRef>
-          <a:fontRef idx="minor">
-            <a:schemeClr val="lt1"/>
-          </a:fontRef>
-        </p:style>
-        <p:txBody>
-          <a:bodyPr rtlCol="0" anchor="ctr" wrap="square" lIns="228600" rIns="228600" tIns="182880" bIns="182880"/>
-          <a:lstStyle/>
-          <a:p>
-            <a:pPr algn="ctr">
-              <a:defRPr sz="1300" b="1">
-                <a:solidFill>
-                  <a:srgbClr val="38BDF8"/>
-                </a:solidFill>
-                <a:latin typeface="Arial"/>
-              </a:defRPr>
-            </a:pPr>
-            <a:r>
-              <a:t>Real-World Impact</a:t>
-            </a:r>
-          </a:p>
-          <a:p>
-            <a:pPr>
-              <a:spcBef>
-                <a:spcPts val="400"/>
-              </a:spcBef>
-              <a:defRPr sz="1050">
-                <a:solidFill>
-                  <a:srgbClr val="F8FAFC"/>
-                </a:solidFill>
-                <a:latin typeface="Arial"/>
-              </a:defRPr>
-            </a:pPr>
-            <a:r>
-              <a:t>• Democratizes digital utilities for students &amp; firms.</a:t>
-            </a:r>
-          </a:p>
-          <a:p>
-            <a:pPr>
-              <a:spcBef>
-                <a:spcPts val="400"/>
-              </a:spcBef>
-              <a:defRPr sz="1050">
-                <a:solidFill>
-                  <a:srgbClr val="F8FAFC"/>
-                </a:solidFill>
-                <a:latin typeface="Arial"/>
-              </a:defRPr>
-            </a:pPr>
-            <a:r>
-              <a:t>• Protects sensitive user documents from leaks.</a:t>
-            </a:r>
-          </a:p>
-          <a:p>
-            <a:pPr>
-              <a:spcBef>
-                <a:spcPts val="400"/>
-              </a:spcBef>
-              <a:defRPr sz="1050">
-                <a:solidFill>
-                  <a:srgbClr val="F8FAFC"/>
-                </a:solidFill>
-                <a:latin typeface="Arial"/>
-              </a:defRPr>
-            </a:pPr>
-            <a:r>
-              <a:t>• Eliminates $150+/year subscription fees.</a:t>
-            </a:r>
-          </a:p>
-          <a:p>
-            <a:pPr>
-              <a:spcBef>
-                <a:spcPts val="400"/>
-              </a:spcBef>
-              <a:defRPr sz="1050">
-                <a:solidFill>
-                  <a:srgbClr val="F8FAFC"/>
-                </a:solidFill>
-                <a:latin typeface="Arial"/>
-              </a:defRPr>
-            </a:pPr>
-            <a:r>
-              <a:t>• Delivers a clean, ad-free modern experience.</a:t>
-            </a:r>
-          </a:p>
-        </p:txBody>
-      </p:sp>
-      <p:sp>
-        <p:nvSpPr>
-          <p:cNvPr id="8" name="Rounded Rectangle 7"/>
-          <p:cNvSpPr/>
-          <p:nvPr/>
-        </p:nvSpPr>
-        <p:spPr>
-          <a:xfrm>
-            <a:off x="8101584" y="2651760"/>
-            <a:ext cx="3328416" cy="2103120"/>
-          </a:xfrm>
-          <a:prstGeom prst="roundRect">
-            <a:avLst/>
-          </a:prstGeom>
-          <a:solidFill>
-            <a:srgbClr val="141826"/>
-          </a:solidFill>
-          <a:ln w="12700">
-            <a:solidFill>
-              <a:srgbClr val="2D3750"/>
-            </a:solidFill>
-          </a:ln>
-        </p:spPr>
-        <p:style>
-          <a:lnRef idx="1">
-            <a:schemeClr val="accent1"/>
-          </a:lnRef>
-          <a:fillRef idx="3">
-            <a:schemeClr val="accent1"/>
-          </a:fillRef>
-          <a:effectRef idx="2">
-            <a:schemeClr val="accent1"/>
-          </a:effectRef>
-          <a:fontRef idx="minor">
-            <a:schemeClr val="lt1"/>
-          </a:fontRef>
-        </p:style>
-        <p:txBody>
-          <a:bodyPr rtlCol="0" anchor="ctr" wrap="square" lIns="228600" rIns="228600" tIns="182880" bIns="182880"/>
-          <a:lstStyle/>
-          <a:p>
-            <a:pPr algn="ctr">
-              <a:defRPr sz="1300" b="1">
-                <a:solidFill>
-                  <a:srgbClr val="A855F7"/>
-                </a:solidFill>
-                <a:latin typeface="Arial"/>
-              </a:defRPr>
-            </a:pPr>
-            <a:r>
-              <a:t>Future Roadmap</a:t>
-            </a:r>
-          </a:p>
-          <a:p>
-            <a:pPr>
-              <a:spcBef>
-                <a:spcPts val="400"/>
-              </a:spcBef>
-              <a:defRPr sz="1050">
-                <a:solidFill>
-                  <a:srgbClr val="F8FAFC"/>
-                </a:solidFill>
-                <a:latin typeface="Arial"/>
-              </a:defRPr>
-            </a:pPr>
-            <a:r>
-              <a:t>• Client-side WebAssembly (Wasm) edge execution.</a:t>
-            </a:r>
-          </a:p>
-          <a:p>
-            <a:pPr>
-              <a:spcBef>
-                <a:spcPts val="400"/>
-              </a:spcBef>
-              <a:defRPr sz="1050">
-                <a:solidFill>
-                  <a:srgbClr val="F8FAFC"/>
-                </a:solidFill>
-                <a:latin typeface="Arial"/>
-              </a:defRPr>
-            </a:pPr>
-            <a:r>
-              <a:t>• 100% offline document processing in browser.</a:t>
-            </a:r>
-          </a:p>
-          <a:p>
-            <a:pPr>
-              <a:spcBef>
-                <a:spcPts val="400"/>
-              </a:spcBef>
-              <a:defRPr sz="1050">
-                <a:solidFill>
-                  <a:srgbClr val="F8FAFC"/>
-                </a:solidFill>
-                <a:latin typeface="Arial"/>
-              </a:defRPr>
-            </a:pPr>
-            <a:r>
-              <a:t>• Local neural generative AI super-resolution.</a:t>
-            </a:r>
-          </a:p>
-          <a:p>
-            <a:pPr>
-              <a:spcBef>
-                <a:spcPts val="400"/>
-              </a:spcBef>
-              <a:defRPr sz="1050">
-                <a:solidFill>
-                  <a:srgbClr val="F8FAFC"/>
-                </a:solidFill>
-                <a:latin typeface="Arial"/>
-              </a:defRPr>
-            </a:pPr>
-            <a:r>
-              <a:t>• Mobile progressive web app (PWA) release.</a:t>
-            </a:r>
-          </a:p>
-        </p:txBody>
-      </p:sp>
-      <p:sp>
-        <p:nvSpPr>
-          <p:cNvPr id="9" name="Rounded Rectangle 8"/>
-          <p:cNvSpPr/>
-          <p:nvPr/>
-        </p:nvSpPr>
-        <p:spPr>
-          <a:xfrm>
-            <a:off x="731520" y="4937760"/>
-            <a:ext cx="10698480" cy="1188720"/>
-          </a:xfrm>
-          <a:prstGeom prst="roundRect">
-            <a:avLst/>
-          </a:prstGeom>
-          <a:solidFill>
-            <a:srgbClr val="121C30"/>
-          </a:solidFill>
-          <a:ln w="19050">
-            <a:solidFill>
-              <a:srgbClr val="38BDF8"/>
-            </a:solidFill>
-          </a:ln>
-        </p:spPr>
-        <p:style>
-          <a:lnRef idx="1">
-            <a:schemeClr val="accent1"/>
-          </a:lnRef>
-          <a:fillRef idx="3">
-            <a:schemeClr val="accent1"/>
-          </a:fillRef>
-          <a:effectRef idx="2">
-            <a:schemeClr val="accent1"/>
-          </a:effectRef>
-          <a:fontRef idx="minor">
-            <a:schemeClr val="lt1"/>
-          </a:fontRef>
-        </p:style>
-        <p:txBody>
-          <a:bodyPr rtlCol="0" anchor="ctr" wrap="square"/>
-          <a:lstStyle/>
-          <a:p>
-            <a:pPr algn="ctr">
-              <a:defRPr sz="2000" b="1">
-                <a:solidFill>
-                  <a:srgbClr val="F8FAFC"/>
-                </a:solidFill>
-              </a:defRPr>
-            </a:pPr>
-            <a:r>
-              <a:t>Thank You! Open for Questions &amp; Committee Defense</a:t>
-            </a:r>
-          </a:p>
-          <a:p>
-            <a:pPr algn="ctr">
-              <a:spcBef>
-                <a:spcPts val="600"/>
-              </a:spcBef>
-              <a:defRPr sz="1100" b="1">
-                <a:solidFill>
-                  <a:srgbClr val="A3E635"/>
-                </a:solidFill>
-              </a:defRPr>
-            </a:pPr>
-            <a:r>
-              <a:t>Live Platform: https://pixelforge.io   |   PixelForge v2.0 Production Release   |   Developer: Muhammad Ali Raza</a:t>
-            </a:r>
+          <a:bodyPr rtlCol="0" anchor="ctr"/>
+          <a:lstStyle/>
+          <a:p>
+            <a:pPr algn="ctr"/>
           </a:p>
         </p:txBody>
       </p:sp>
@@ -10395,8 +8299,8 @@
   <p:clrMapOvr>
     <a:masterClrMapping/>
   </p:clrMapOvr>
-  <p:transition spd="med">
-    <p:push dir="r"/>
+  <p:transition spd="med" advTm="0">
+    <p:fade/>
   </p:transition>
 </p:sld>
 </file>
